--- a/docs/examples/sample-warm-editorial.pptx
+++ b/docs/examples/sample-warm-editorial.pptx
@@ -23,6 +23,7 @@
     <p:sldId id="271" r:id="rId23"/>
     <p:sldId id="272" r:id="rId24"/>
     <p:sldId id="273" r:id="rId25"/>
+    <p:sldId id="274" r:id="rId26"/>
   </p:sldIdLst>
   <p:sldSz cx="12192000" cy="6858000" type="screen4x3"/>
   <p:notesSz cx="6858000" cy="9144000"/>
@@ -782,7 +783,7 @@
           <a:lstStyle/>
           <a:p>
             <a:r>
-              <a:t>We recommend the shared pool for the pilot.</a:t>
+              <a:t>This is the only new infrastructure, and it never touches production.</a:t>
             </a:r>
           </a:p>
         </p:txBody>
@@ -852,7 +853,7 @@
           <a:lstStyle/>
           <a:p>
             <a:r>
-              <a:t>The decision point is at the end of week four.</a:t>
+              <a:t>We recommend the shared pool for the pilot.</a:t>
             </a:r>
           </a:p>
         </p:txBody>
@@ -922,7 +923,7 @@
           <a:lstStyle/>
           <a:p>
             <a:r>
-              <a:t>These measures are agreed now so the result is not argued afterwards.</a:t>
+              <a:t>The decision point is at the end of week four.</a:t>
             </a:r>
           </a:p>
         </p:txBody>
@@ -992,7 +993,7 @@
           <a:lstStyle/>
           <a:p>
             <a:r>
-              <a:t>Opting in is one line.</a:t>
+              <a:t>These measures are agreed now so the result is not argued afterwards.</a:t>
             </a:r>
           </a:p>
         </p:txBody>
@@ -1062,7 +1063,7 @@
           <a:lstStyle/>
           <a:p>
             <a:r>
-              <a:t>Teams keep control during the pilot; any gate can be turned off.</a:t>
+              <a:t>Opting in is one line.</a:t>
             </a:r>
           </a:p>
         </p:txBody>
@@ -1132,7 +1133,7 @@
           <a:lstStyle/>
           <a:p>
             <a:r>
-              <a:t>The biggest relief is for release managers.</a:t>
+              <a:t>Teams keep control during the pilot; any gate can be turned off.</a:t>
             </a:r>
           </a:p>
         </p:txBody>
@@ -1202,7 +1203,7 @@
           <a:lstStyle/>
           <a:p>
             <a:r>
-              <a:t>Replace with a real, approved quote or delete the slide.</a:t>
+              <a:t>The biggest relief is for release managers.</a:t>
             </a:r>
           </a:p>
         </p:txBody>
@@ -1272,7 +1273,7 @@
           <a:lstStyle/>
           <a:p>
             <a:r>
-              <a:t>That is the decision I am asking for today.</a:t>
+              <a:t>Replace with a real, approved quote or delete the slide.</a:t>
             </a:r>
           </a:p>
         </p:txBody>
@@ -1342,6 +1343,76 @@
           <a:lstStyle/>
           <a:p>
             <a:r>
+              <a:t>That is the decision I am asking for today.</a:t>
+            </a:r>
+          </a:p>
+        </p:txBody>
+      </p:sp>
+      <p:sp>
+        <p:nvSpPr>
+          <p:cNvPr id="4" name="Slide Number Placeholder 3"/>
+          <p:cNvSpPr>
+            <a:spLocks noGrp="1"/>
+          </p:cNvSpPr>
+          <p:nvPr>
+            <p:ph type="sldNum" idx="5" sz="quarter"/>
+          </p:nvPr>
+        </p:nvSpPr>
+        <p:spPr/>
+      </p:sp>
+    </p:spTree>
+  </p:cSld>
+  <p:clrMapOvr>
+    <a:masterClrMapping/>
+  </p:clrMapOvr>
+</p:notes>
+</file>
+
+<file path=ppt/notesSlides/notesSlide19.xml><?xml version="1.0" encoding="utf-8"?>
+<p:notes xmlns:a="http://schemas.openxmlformats.org/drawingml/2006/main" xmlns:p="http://schemas.openxmlformats.org/presentationml/2006/main" xmlns:r="http://schemas.openxmlformats.org/officeDocument/2006/relationships">
+  <p:cSld>
+    <p:spTree>
+      <p:nvGrpSpPr>
+        <p:cNvPr id="1" name=""/>
+        <p:cNvGrpSpPr/>
+        <p:nvPr/>
+      </p:nvGrpSpPr>
+      <p:grpSpPr>
+        <a:xfrm>
+          <a:off x="0" y="0"/>
+          <a:ext cx="0" cy="0"/>
+          <a:chOff x="0" y="0"/>
+          <a:chExt cx="0" cy="0"/>
+        </a:xfrm>
+      </p:grpSpPr>
+      <p:sp>
+        <p:nvSpPr>
+          <p:cNvPr id="2" name="Slide Image Placeholder 1"/>
+          <p:cNvSpPr>
+            <a:spLocks noGrp="1"/>
+          </p:cNvSpPr>
+          <p:nvPr>
+            <p:ph type="sldImg" idx="2"/>
+          </p:nvPr>
+        </p:nvSpPr>
+        <p:spPr/>
+      </p:sp>
+      <p:sp>
+        <p:nvSpPr>
+          <p:cNvPr id="3" name="Notes Placeholder 2"/>
+          <p:cNvSpPr>
+            <a:spLocks noGrp="1"/>
+          </p:cNvSpPr>
+          <p:nvPr>
+            <p:ph type="body" idx="3" sz="quarter"/>
+          </p:nvPr>
+        </p:nvSpPr>
+        <p:spPr/>
+        <p:txBody>
+          <a:bodyPr/>
+          <a:lstStyle/>
+          <a:p>
+            <a:r>
               <a:t>Thank you.</a:t>
             </a:r>
           </a:p>
@@ -1482,7 +1553,7 @@
           <a:lstStyle/>
           <a:p>
             <a:r>
-              <a:t>First, where we find release blockers now.</a:t>
+              <a:t>In one page: blockers are found late and cost ten times more to fix there. Running the same checks per pull request fixes that, and the pilot is cheap.</a:t>
             </a:r>
           </a:p>
         </p:txBody>
@@ -1552,7 +1623,7 @@
           <a:lstStyle/>
           <a:p>
             <a:r>
-              <a:t>Most blockers appear late, and each one costs more than two days.</a:t>
+              <a:t>First, where we find release blockers now.</a:t>
             </a:r>
           </a:p>
         </p:txBody>
@@ -1622,7 +1693,7 @@
           <a:lstStyle/>
           <a:p>
             <a:r>
-              <a:t>The release branch is where the cost jumps.</a:t>
+              <a:t>Most blockers appear late, and each one costs more than two days.</a:t>
             </a:r>
           </a:p>
         </p:txBody>
@@ -1692,7 +1763,7 @@
           <a:lstStyle/>
           <a:p>
             <a:r>
-              <a:t>Next, what the change looks like.</a:t>
+              <a:t>The release branch is where the cost jumps.</a:t>
             </a:r>
           </a:p>
         </p:txBody>
@@ -1762,7 +1833,7 @@
           <a:lstStyle/>
           <a:p>
             <a:r>
-              <a:t>Nothing about the checks changes; only when they run.</a:t>
+              <a:t>Next, what the change looks like.</a:t>
             </a:r>
           </a:p>
         </p:txBody>
@@ -1832,7 +1903,7 @@
           <a:lstStyle/>
           <a:p>
             <a:r>
-              <a:t>The migration dry run is the new gate; the others exist today.</a:t>
+              <a:t>Nothing about the checks changes; only when they run.</a:t>
             </a:r>
           </a:p>
         </p:txBody>
@@ -1902,7 +1973,7 @@
           <a:lstStyle/>
           <a:p>
             <a:r>
-              <a:t>This is the only new infrastructure, and it never touches production.</a:t>
+              <a:t>The migration dry run is the new gate; the others exist today.</a:t>
             </a:r>
           </a:p>
         </p:txBody>
@@ -4965,16 +5036,16 @@
         </p:nvSpPr>
         <p:spPr>
           <a:xfrm>
-            <a:off x="812800" y="2112264"/>
-            <a:ext cx="8664448" cy="1536192"/>
-          </a:xfrm>
-          <a:prstGeom prst="rect">
-            <a:avLst/>
-          </a:prstGeom>
-          <a:noFill/>
-        </p:spPr>
-        <p:txBody>
-          <a:bodyPr wrap="square" lIns="0" tIns="0" rIns="0" bIns="0" anchor="t">
+            <a:off x="812800" y="1190548"/>
+            <a:ext cx="8664448" cy="2457907"/>
+          </a:xfrm>
+          <a:prstGeom prst="rect">
+            <a:avLst/>
+          </a:prstGeom>
+          <a:noFill/>
+        </p:spPr>
+        <p:txBody>
+          <a:bodyPr wrap="square" lIns="0" tIns="0" rIns="0" bIns="0" anchor="b">
             <a:noAutofit/>
           </a:bodyPr>
           <a:lstStyle/>
@@ -5007,7 +5078,7 @@
         <p:spPr>
           <a:xfrm>
             <a:off x="812800" y="3877055"/>
-            <a:ext cx="8664448" cy="292608"/>
+            <a:ext cx="7620000" cy="292608"/>
           </a:xfrm>
           <a:prstGeom prst="rect">
             <a:avLst/>
@@ -5089,6 +5160,943 @@
 </file>
 
 <file path=ppt/slides/slide10.xml><?xml version="1.0" encoding="utf-8"?>
+<p:sld xmlns:a="http://schemas.openxmlformats.org/drawingml/2006/main" xmlns:p="http://schemas.openxmlformats.org/presentationml/2006/main" xmlns:r="http://schemas.openxmlformats.org/officeDocument/2006/relationships">
+  <p:cSld>
+    <p:bg>
+      <p:bgPr>
+        <a:solidFill>
+          <a:srgbClr val="FFFCF7"/>
+        </a:solidFill>
+        <a:effectLst/>
+      </p:bgPr>
+    </p:bg>
+    <p:spTree>
+      <p:nvGrpSpPr>
+        <p:cNvPr id="1" name=""/>
+        <p:cNvGrpSpPr/>
+        <p:nvPr/>
+      </p:nvGrpSpPr>
+      <p:grpSpPr/>
+      <p:sp>
+        <p:nvSpPr>
+          <p:cNvPr id="2" name="Eyebrow"/>
+          <p:cNvSpPr txBox="1"/>
+          <p:nvPr/>
+        </p:nvSpPr>
+        <p:spPr>
+          <a:xfrm>
+            <a:off x="812800" y="431800"/>
+            <a:ext cx="10566400" cy="177800"/>
+          </a:xfrm>
+          <a:prstGeom prst="rect">
+            <a:avLst/>
+          </a:prstGeom>
+          <a:noFill/>
+        </p:spPr>
+        <p:txBody>
+          <a:bodyPr wrap="square" lIns="0" tIns="0" rIns="0" bIns="0" anchor="t">
+            <a:noAutofit/>
+          </a:bodyPr>
+          <a:lstStyle/>
+          <a:p>
+            <a:pPr algn="l">
+              <a:lnSpc>
+                <a:spcPct val="120000"/>
+              </a:lnSpc>
+            </a:pPr>
+            <a:r>
+              <a:rPr sz="1000" b="0" i="0">
+                <a:solidFill>
+                  <a:srgbClr val="9C4422"/>
+                </a:solidFill>
+                <a:latin typeface="Consolas"/>
+                <a:ea typeface="Malgun Gothic"/>
+                <a:cs typeface="Consolas"/>
+              </a:rPr>
+              <a:t>Proposal</a:t>
+            </a:r>
+          </a:p>
+        </p:txBody>
+      </p:sp>
+      <p:sp>
+        <p:nvSpPr>
+          <p:cNvPr id="3" name="Title"/>
+          <p:cNvSpPr txBox="1"/>
+          <p:nvPr/>
+        </p:nvSpPr>
+        <p:spPr>
+          <a:xfrm>
+            <a:off x="812800" y="635000"/>
+            <a:ext cx="10566400" cy="431800"/>
+          </a:xfrm>
+          <a:prstGeom prst="rect">
+            <a:avLst/>
+          </a:prstGeom>
+          <a:noFill/>
+        </p:spPr>
+        <p:txBody>
+          <a:bodyPr wrap="square" lIns="0" tIns="0" rIns="0" bIns="0" anchor="t">
+            <a:noAutofit/>
+          </a:bodyPr>
+          <a:lstStyle/>
+          <a:p>
+            <a:pPr algn="l">
+              <a:lnSpc>
+                <a:spcPct val="105000"/>
+              </a:lnSpc>
+            </a:pPr>
+            <a:r>
+              <a:rPr sz="2600" b="0" i="0">
+                <a:solidFill>
+                  <a:srgbClr val="2B2118"/>
+                </a:solidFill>
+                <a:latin typeface="Georgia"/>
+                <a:ea typeface="Malgun Gothic"/>
+                <a:cs typeface="Georgia"/>
+              </a:rPr>
+              <a:t>Checks run in an isolated runner, never against production</a:t>
+            </a:r>
+          </a:p>
+        </p:txBody>
+      </p:sp>
+      <p:sp>
+        <p:nvSpPr>
+          <p:cNvPr id="4" name="TextBox 3"/>
+          <p:cNvSpPr txBox="1"/>
+          <p:nvPr/>
+        </p:nvSpPr>
+        <p:spPr>
+          <a:xfrm>
+            <a:off x="812800" y="5680456"/>
+            <a:ext cx="10566400" cy="237744"/>
+          </a:xfrm>
+          <a:prstGeom prst="rect">
+            <a:avLst/>
+          </a:prstGeom>
+          <a:noFill/>
+        </p:spPr>
+        <p:txBody>
+          <a:bodyPr wrap="square" lIns="0" tIns="0" rIns="0" bIns="0" anchor="t">
+            <a:noAutofit/>
+          </a:bodyPr>
+          <a:lstStyle/>
+          <a:p>
+            <a:pPr algn="l">
+              <a:lnSpc>
+                <a:spcPct val="120000"/>
+              </a:lnSpc>
+            </a:pPr>
+            <a:r>
+              <a:rPr sz="1300" b="0" i="0">
+                <a:solidFill>
+                  <a:srgbClr val="6B5E52"/>
+                </a:solidFill>
+                <a:latin typeface="Arial"/>
+                <a:ea typeface="Malgun Gothic"/>
+                <a:cs typeface="Arial"/>
+              </a:rPr>
+              <a:t>The runner reads a masked snapshot; it holds no production credentials.</a:t>
+            </a:r>
+          </a:p>
+        </p:txBody>
+      </p:sp>
+      <p:sp>
+        <p:nvSpPr>
+          <p:cNvPr id="5" name="Group CI environment"/>
+          <p:cNvSpPr/>
+          <p:nvPr/>
+        </p:nvSpPr>
+        <p:spPr>
+          <a:xfrm>
+            <a:off x="3505200" y="1473200"/>
+            <a:ext cx="5181600" cy="3505200"/>
+          </a:xfrm>
+          <a:prstGeom prst="roundRect">
+            <a:avLst>
+              <a:gd name="adj" fmla="val 2173"/>
+            </a:avLst>
+          </a:prstGeom>
+          <a:noFill/>
+          <a:ln w="9525">
+            <a:solidFill>
+              <a:srgbClr val="9C8F82"/>
+            </a:solidFill>
+          </a:ln>
+        </p:spPr>
+        <p:txBody>
+          <a:bodyPr rtlCol="0" anchor="ctr" wrap="square" lIns="76200" tIns="76200" rIns="76200" bIns="76200"/>
+          <a:lstStyle/>
+          <a:p>
+            <a:pPr algn="ctr"/>
+          </a:p>
+        </p:txBody>
+      </p:sp>
+      <p:sp>
+        <p:nvSpPr>
+          <p:cNvPr id="6" name="TextBox 5"/>
+          <p:cNvSpPr txBox="1"/>
+          <p:nvPr/>
+        </p:nvSpPr>
+        <p:spPr>
+          <a:xfrm>
+            <a:off x="3606800" y="1536700"/>
+            <a:ext cx="4978400" cy="190500"/>
+          </a:xfrm>
+          <a:prstGeom prst="rect">
+            <a:avLst/>
+          </a:prstGeom>
+          <a:noFill/>
+        </p:spPr>
+        <p:txBody>
+          <a:bodyPr wrap="square" lIns="0" tIns="0" rIns="0" bIns="0" anchor="t">
+            <a:noAutofit/>
+          </a:bodyPr>
+          <a:lstStyle/>
+          <a:p>
+            <a:pPr algn="l">
+              <a:lnSpc>
+                <a:spcPct val="120000"/>
+              </a:lnSpc>
+            </a:pPr>
+            <a:r>
+              <a:rPr sz="1000" b="0" i="0">
+                <a:solidFill>
+                  <a:srgbClr val="6B5E52"/>
+                </a:solidFill>
+                <a:latin typeface="Consolas"/>
+                <a:ea typeface="Malgun Gothic"/>
+                <a:cs typeface="Consolas"/>
+              </a:rPr>
+              <a:t>CI environment</a:t>
+            </a:r>
+          </a:p>
+        </p:txBody>
+      </p:sp>
+      <p:sp>
+        <p:nvSpPr>
+          <p:cNvPr id="7" name="Node pr"/>
+          <p:cNvSpPr/>
+          <p:nvPr/>
+        </p:nvSpPr>
+        <p:spPr>
+          <a:xfrm>
+            <a:off x="1288288" y="1955800"/>
+            <a:ext cx="1690624" cy="736600"/>
+          </a:xfrm>
+          <a:prstGeom prst="roundRect">
+            <a:avLst>
+              <a:gd name="adj" fmla="val 10344"/>
+            </a:avLst>
+          </a:prstGeom>
+          <a:solidFill>
+            <a:srgbClr val="FFFCF7"/>
+          </a:solidFill>
+          <a:ln w="9525">
+            <a:solidFill>
+              <a:srgbClr val="6B5E52"/>
+            </a:solidFill>
+            <a:prstDash val="dash"/>
+          </a:ln>
+        </p:spPr>
+        <p:txBody>
+          <a:bodyPr rtlCol="0" anchor="ctr" wrap="square" lIns="76200" tIns="76200" rIns="76200" bIns="76200"/>
+          <a:lstStyle/>
+          <a:p>
+            <a:pPr algn="ctr"/>
+          </a:p>
+        </p:txBody>
+      </p:sp>
+      <p:sp>
+        <p:nvSpPr>
+          <p:cNvPr id="8" name="Label pr"/>
+          <p:cNvSpPr txBox="1"/>
+          <p:nvPr/>
+        </p:nvSpPr>
+        <p:spPr>
+          <a:xfrm>
+            <a:off x="1389888" y="1955800"/>
+            <a:ext cx="1487424" cy="736600"/>
+          </a:xfrm>
+          <a:prstGeom prst="rect">
+            <a:avLst/>
+          </a:prstGeom>
+          <a:noFill/>
+        </p:spPr>
+        <p:txBody>
+          <a:bodyPr wrap="square" lIns="0" tIns="0" rIns="0" bIns="0" anchor="ctr">
+            <a:noAutofit/>
+          </a:bodyPr>
+          <a:lstStyle/>
+          <a:p>
+            <a:pPr algn="ctr">
+              <a:lnSpc>
+                <a:spcPct val="120000"/>
+              </a:lnSpc>
+            </a:pPr>
+            <a:r>
+              <a:rPr sz="1300" b="0" i="0">
+                <a:solidFill>
+                  <a:srgbClr val="2B2118"/>
+                </a:solidFill>
+                <a:latin typeface="Arial"/>
+                <a:ea typeface="Malgun Gothic"/>
+                <a:cs typeface="Arial"/>
+              </a:rPr>
+              <a:t>Pull request</a:t>
+            </a:r>
+          </a:p>
+        </p:txBody>
+      </p:sp>
+      <p:sp>
+        <p:nvSpPr>
+          <p:cNvPr id="9" name="Node runner"/>
+          <p:cNvSpPr/>
+          <p:nvPr/>
+        </p:nvSpPr>
+        <p:spPr>
+          <a:xfrm>
+            <a:off x="3929888" y="1955800"/>
+            <a:ext cx="1690624" cy="736600"/>
+          </a:xfrm>
+          <a:prstGeom prst="roundRect">
+            <a:avLst>
+              <a:gd name="adj" fmla="val 10344"/>
+            </a:avLst>
+          </a:prstGeom>
+          <a:solidFill>
+            <a:srgbClr val="F5ECE9"/>
+          </a:solidFill>
+          <a:ln w="15875">
+            <a:solidFill>
+              <a:srgbClr val="9C4422"/>
+            </a:solidFill>
+          </a:ln>
+        </p:spPr>
+        <p:txBody>
+          <a:bodyPr rtlCol="0" anchor="ctr" wrap="square" lIns="76200" tIns="76200" rIns="76200" bIns="76200"/>
+          <a:lstStyle/>
+          <a:p>
+            <a:pPr algn="ctr"/>
+          </a:p>
+        </p:txBody>
+      </p:sp>
+      <p:sp>
+        <p:nvSpPr>
+          <p:cNvPr id="10" name="Label runner"/>
+          <p:cNvSpPr txBox="1"/>
+          <p:nvPr/>
+        </p:nvSpPr>
+        <p:spPr>
+          <a:xfrm>
+            <a:off x="4031488" y="1955800"/>
+            <a:ext cx="1487424" cy="736600"/>
+          </a:xfrm>
+          <a:prstGeom prst="rect">
+            <a:avLst/>
+          </a:prstGeom>
+          <a:noFill/>
+        </p:spPr>
+        <p:txBody>
+          <a:bodyPr wrap="square" lIns="0" tIns="0" rIns="0" bIns="0" anchor="ctr">
+            <a:noAutofit/>
+          </a:bodyPr>
+          <a:lstStyle/>
+          <a:p>
+            <a:pPr algn="ctr">
+              <a:lnSpc>
+                <a:spcPct val="120000"/>
+              </a:lnSpc>
+            </a:pPr>
+            <a:r>
+              <a:rPr sz="1300" b="0" i="0">
+                <a:solidFill>
+                  <a:srgbClr val="2B2118"/>
+                </a:solidFill>
+                <a:latin typeface="Arial"/>
+                <a:ea typeface="Malgun Gothic"/>
+                <a:cs typeface="Arial"/>
+              </a:rPr>
+              <a:t>Check runner</a:t>
+            </a:r>
+          </a:p>
+          <a:p>
+            <a:pPr algn="ctr">
+              <a:lnSpc>
+                <a:spcPct val="120000"/>
+              </a:lnSpc>
+            </a:pPr>
+            <a:r>
+              <a:rPr sz="1300" b="0" i="0">
+                <a:solidFill>
+                  <a:srgbClr val="2B2118"/>
+                </a:solidFill>
+                <a:latin typeface="Arial"/>
+                <a:ea typeface="Malgun Gothic"/>
+                <a:cs typeface="Arial"/>
+              </a:rPr>
+              <a:t>isolated</a:t>
+            </a:r>
+          </a:p>
+        </p:txBody>
+      </p:sp>
+      <p:sp>
+        <p:nvSpPr>
+          <p:cNvPr id="11" name="Node snap"/>
+          <p:cNvSpPr/>
+          <p:nvPr/>
+        </p:nvSpPr>
+        <p:spPr>
+          <a:xfrm>
+            <a:off x="6571488" y="1955800"/>
+            <a:ext cx="1690624" cy="736600"/>
+          </a:xfrm>
+          <a:prstGeom prst="can">
+            <a:avLst/>
+          </a:prstGeom>
+          <a:solidFill>
+            <a:srgbClr val="FFFCF7"/>
+          </a:solidFill>
+          <a:ln w="9525">
+            <a:solidFill>
+              <a:srgbClr val="6B5E52"/>
+            </a:solidFill>
+          </a:ln>
+        </p:spPr>
+        <p:txBody>
+          <a:bodyPr rtlCol="0" anchor="ctr" wrap="square" lIns="76200" tIns="76200" rIns="76200" bIns="76200"/>
+          <a:lstStyle/>
+          <a:p>
+            <a:pPr algn="ctr"/>
+          </a:p>
+        </p:txBody>
+      </p:sp>
+      <p:sp>
+        <p:nvSpPr>
+          <p:cNvPr id="12" name="Label snap"/>
+          <p:cNvSpPr txBox="1"/>
+          <p:nvPr/>
+        </p:nvSpPr>
+        <p:spPr>
+          <a:xfrm>
+            <a:off x="6673088" y="1955800"/>
+            <a:ext cx="1487424" cy="736600"/>
+          </a:xfrm>
+          <a:prstGeom prst="rect">
+            <a:avLst/>
+          </a:prstGeom>
+          <a:noFill/>
+        </p:spPr>
+        <p:txBody>
+          <a:bodyPr wrap="square" lIns="0" tIns="0" rIns="0" bIns="0" anchor="ctr">
+            <a:noAutofit/>
+          </a:bodyPr>
+          <a:lstStyle/>
+          <a:p>
+            <a:pPr algn="ctr">
+              <a:lnSpc>
+                <a:spcPct val="120000"/>
+              </a:lnSpc>
+            </a:pPr>
+            <a:r>
+              <a:rPr sz="1300" b="0" i="0">
+                <a:solidFill>
+                  <a:srgbClr val="2B2118"/>
+                </a:solidFill>
+                <a:latin typeface="Arial"/>
+                <a:ea typeface="Malgun Gothic"/>
+                <a:cs typeface="Arial"/>
+              </a:rPr>
+              <a:t>Snapshot DB</a:t>
+            </a:r>
+          </a:p>
+          <a:p>
+            <a:pPr algn="ctr">
+              <a:lnSpc>
+                <a:spcPct val="120000"/>
+              </a:lnSpc>
+            </a:pPr>
+            <a:r>
+              <a:rPr sz="1300" b="0" i="0">
+                <a:solidFill>
+                  <a:srgbClr val="2B2118"/>
+                </a:solidFill>
+                <a:latin typeface="Arial"/>
+                <a:ea typeface="Malgun Gothic"/>
+                <a:cs typeface="Arial"/>
+              </a:rPr>
+              <a:t>masked copy</a:t>
+            </a:r>
+          </a:p>
+        </p:txBody>
+      </p:sp>
+      <p:sp>
+        <p:nvSpPr>
+          <p:cNvPr id="13" name="Node report"/>
+          <p:cNvSpPr/>
+          <p:nvPr/>
+        </p:nvSpPr>
+        <p:spPr>
+          <a:xfrm>
+            <a:off x="3929888" y="3759200"/>
+            <a:ext cx="1690624" cy="736600"/>
+          </a:xfrm>
+          <a:prstGeom prst="roundRect">
+            <a:avLst>
+              <a:gd name="adj" fmla="val 10344"/>
+            </a:avLst>
+          </a:prstGeom>
+          <a:solidFill>
+            <a:srgbClr val="FFFCF7"/>
+          </a:solidFill>
+          <a:ln w="9525">
+            <a:solidFill>
+              <a:srgbClr val="6B5E52"/>
+            </a:solidFill>
+          </a:ln>
+        </p:spPr>
+        <p:txBody>
+          <a:bodyPr rtlCol="0" anchor="ctr" wrap="square" lIns="76200" tIns="76200" rIns="76200" bIns="76200"/>
+          <a:lstStyle/>
+          <a:p>
+            <a:pPr algn="ctr"/>
+          </a:p>
+        </p:txBody>
+      </p:sp>
+      <p:sp>
+        <p:nvSpPr>
+          <p:cNvPr id="14" name="Label report"/>
+          <p:cNvSpPr txBox="1"/>
+          <p:nvPr/>
+        </p:nvSpPr>
+        <p:spPr>
+          <a:xfrm>
+            <a:off x="4031488" y="3759200"/>
+            <a:ext cx="1487424" cy="736600"/>
+          </a:xfrm>
+          <a:prstGeom prst="rect">
+            <a:avLst/>
+          </a:prstGeom>
+          <a:noFill/>
+        </p:spPr>
+        <p:txBody>
+          <a:bodyPr wrap="square" lIns="0" tIns="0" rIns="0" bIns="0" anchor="ctr">
+            <a:noAutofit/>
+          </a:bodyPr>
+          <a:lstStyle/>
+          <a:p>
+            <a:pPr algn="ctr">
+              <a:lnSpc>
+                <a:spcPct val="120000"/>
+              </a:lnSpc>
+            </a:pPr>
+            <a:r>
+              <a:rPr sz="1300" b="0" i="0">
+                <a:solidFill>
+                  <a:srgbClr val="2B2118"/>
+                </a:solidFill>
+                <a:latin typeface="Arial"/>
+                <a:ea typeface="Malgun Gothic"/>
+                <a:cs typeface="Arial"/>
+              </a:rPr>
+              <a:t>Check report</a:t>
+            </a:r>
+          </a:p>
+        </p:txBody>
+      </p:sp>
+      <p:sp>
+        <p:nvSpPr>
+          <p:cNvPr id="15" name="Node merge"/>
+          <p:cNvSpPr/>
+          <p:nvPr/>
+        </p:nvSpPr>
+        <p:spPr>
+          <a:xfrm>
+            <a:off x="9213088" y="3759200"/>
+            <a:ext cx="1690624" cy="736600"/>
+          </a:xfrm>
+          <a:prstGeom prst="roundRect">
+            <a:avLst>
+              <a:gd name="adj" fmla="val 10344"/>
+            </a:avLst>
+          </a:prstGeom>
+          <a:solidFill>
+            <a:srgbClr val="FFFCF7"/>
+          </a:solidFill>
+          <a:ln w="9525">
+            <a:solidFill>
+              <a:srgbClr val="6B5E52"/>
+            </a:solidFill>
+          </a:ln>
+        </p:spPr>
+        <p:txBody>
+          <a:bodyPr rtlCol="0" anchor="ctr" wrap="square" lIns="76200" tIns="76200" rIns="76200" bIns="76200"/>
+          <a:lstStyle/>
+          <a:p>
+            <a:pPr algn="ctr"/>
+          </a:p>
+        </p:txBody>
+      </p:sp>
+      <p:sp>
+        <p:nvSpPr>
+          <p:cNvPr id="16" name="Label merge"/>
+          <p:cNvSpPr txBox="1"/>
+          <p:nvPr/>
+        </p:nvSpPr>
+        <p:spPr>
+          <a:xfrm>
+            <a:off x="9314688" y="3759200"/>
+            <a:ext cx="1487424" cy="736600"/>
+          </a:xfrm>
+          <a:prstGeom prst="rect">
+            <a:avLst/>
+          </a:prstGeom>
+          <a:noFill/>
+        </p:spPr>
+        <p:txBody>
+          <a:bodyPr wrap="square" lIns="0" tIns="0" rIns="0" bIns="0" anchor="ctr">
+            <a:noAutofit/>
+          </a:bodyPr>
+          <a:lstStyle/>
+          <a:p>
+            <a:pPr algn="ctr">
+              <a:lnSpc>
+                <a:spcPct val="120000"/>
+              </a:lnSpc>
+            </a:pPr>
+            <a:r>
+              <a:rPr sz="1300" b="0" i="0">
+                <a:solidFill>
+                  <a:srgbClr val="2B2118"/>
+                </a:solidFill>
+                <a:latin typeface="Arial"/>
+                <a:ea typeface="Malgun Gothic"/>
+                <a:cs typeface="Arial"/>
+              </a:rPr>
+              <a:t>Merge gate</a:t>
+            </a:r>
+          </a:p>
+        </p:txBody>
+      </p:sp>
+      <p:cxnSp>
+        <p:nvCxnSpPr>
+          <p:cNvPr id="17" name="Edge pr-runner"/>
+          <p:cNvCxnSpPr>
+            <a:stCxn id="7" idx="3"/>
+            <a:endCxn id="9" idx="1"/>
+          </p:cNvCxnSpPr>
+          <p:nvPr/>
+        </p:nvCxnSpPr>
+        <p:spPr>
+          <a:xfrm flipV="1">
+            <a:off x="2978912" y="2324100"/>
+            <a:ext cx="950976" cy="0"/>
+          </a:xfrm>
+          <a:prstGeom prst="line">
+            <a:avLst/>
+          </a:prstGeom>
+          <a:ln w="19050">
+            <a:solidFill>
+              <a:srgbClr val="9C4422"/>
+            </a:solidFill>
+            <a:tailEnd type="triangle" w="med" len="med"/>
+          </a:ln>
+        </p:spPr>
+      </p:cxnSp>
+      <p:sp>
+        <p:nvSpPr>
+          <p:cNvPr id="18" name="Edge label"/>
+          <p:cNvSpPr txBox="1"/>
+          <p:nvPr/>
+        </p:nvSpPr>
+        <p:spPr>
+          <a:xfrm>
+            <a:off x="3137383" y="2089150"/>
+            <a:ext cx="634033" cy="209550"/>
+          </a:xfrm>
+          <a:prstGeom prst="rect">
+            <a:avLst/>
+          </a:prstGeom>
+          <a:solidFill>
+            <a:srgbClr val="FFFCF7"/>
+          </a:solidFill>
+        </p:spPr>
+        <p:txBody>
+          <a:bodyPr wrap="square" lIns="12700" tIns="12700" rIns="12700" bIns="12700" anchor="ctr">
+            <a:noAutofit/>
+          </a:bodyPr>
+          <a:lstStyle/>
+          <a:p>
+            <a:pPr algn="ctr">
+              <a:lnSpc>
+                <a:spcPct val="120000"/>
+              </a:lnSpc>
+            </a:pPr>
+            <a:r>
+              <a:rPr sz="1100" b="0" i="0">
+                <a:solidFill>
+                  <a:srgbClr val="6B5E52"/>
+                </a:solidFill>
+                <a:latin typeface="Arial"/>
+                <a:ea typeface="Malgun Gothic"/>
+                <a:cs typeface="Arial"/>
+              </a:rPr>
+              <a:t>on push</a:t>
+            </a:r>
+          </a:p>
+        </p:txBody>
+      </p:sp>
+      <p:cxnSp>
+        <p:nvCxnSpPr>
+          <p:cNvPr id="19" name="Edge runner-snap"/>
+          <p:cNvCxnSpPr>
+            <a:stCxn id="9" idx="3"/>
+            <a:endCxn id="11" idx="1"/>
+          </p:cNvCxnSpPr>
+          <p:nvPr/>
+        </p:nvCxnSpPr>
+        <p:spPr>
+          <a:xfrm flipV="1">
+            <a:off x="5620512" y="2324100"/>
+            <a:ext cx="950976" cy="0"/>
+          </a:xfrm>
+          <a:prstGeom prst="line">
+            <a:avLst/>
+          </a:prstGeom>
+          <a:ln w="12700">
+            <a:solidFill>
+              <a:srgbClr val="6B5E52"/>
+            </a:solidFill>
+            <a:tailEnd type="triangle" w="med" len="med"/>
+          </a:ln>
+        </p:spPr>
+      </p:cxnSp>
+      <p:sp>
+        <p:nvSpPr>
+          <p:cNvPr id="20" name="Edge label"/>
+          <p:cNvSpPr txBox="1"/>
+          <p:nvPr/>
+        </p:nvSpPr>
+        <p:spPr>
+          <a:xfrm>
+            <a:off x="5810777" y="2089150"/>
+            <a:ext cx="570445" cy="209550"/>
+          </a:xfrm>
+          <a:prstGeom prst="rect">
+            <a:avLst/>
+          </a:prstGeom>
+          <a:solidFill>
+            <a:srgbClr val="FFFCF7"/>
+          </a:solidFill>
+        </p:spPr>
+        <p:txBody>
+          <a:bodyPr wrap="square" lIns="12700" tIns="12700" rIns="12700" bIns="12700" anchor="ctr">
+            <a:noAutofit/>
+          </a:bodyPr>
+          <a:lstStyle/>
+          <a:p>
+            <a:pPr algn="ctr">
+              <a:lnSpc>
+                <a:spcPct val="120000"/>
+              </a:lnSpc>
+            </a:pPr>
+            <a:r>
+              <a:rPr sz="1100" b="0" i="0">
+                <a:solidFill>
+                  <a:srgbClr val="6B5E52"/>
+                </a:solidFill>
+                <a:latin typeface="Arial"/>
+                <a:ea typeface="Malgun Gothic"/>
+                <a:cs typeface="Arial"/>
+              </a:rPr>
+              <a:t>dry run</a:t>
+            </a:r>
+          </a:p>
+        </p:txBody>
+      </p:sp>
+      <p:cxnSp>
+        <p:nvCxnSpPr>
+          <p:cNvPr id="21" name="Edge runner-report"/>
+          <p:cNvCxnSpPr>
+            <a:stCxn id="9" idx="2"/>
+            <a:endCxn id="13" idx="0"/>
+          </p:cNvCxnSpPr>
+          <p:nvPr/>
+        </p:nvCxnSpPr>
+        <p:spPr>
+          <a:xfrm flipH="1">
+            <a:off x="4775200" y="2692400"/>
+            <a:ext cx="0" cy="1066800"/>
+          </a:xfrm>
+          <a:prstGeom prst="line">
+            <a:avLst/>
+          </a:prstGeom>
+          <a:ln w="12700">
+            <a:solidFill>
+              <a:srgbClr val="6B5E52"/>
+            </a:solidFill>
+            <a:tailEnd type="triangle" w="med" len="med"/>
+          </a:ln>
+        </p:spPr>
+      </p:cxnSp>
+      <p:cxnSp>
+        <p:nvCxnSpPr>
+          <p:cNvPr id="22" name="Edge report-merge"/>
+          <p:cNvCxnSpPr>
+            <a:stCxn id="13" idx="3"/>
+            <a:endCxn id="15" idx="1"/>
+          </p:cNvCxnSpPr>
+          <p:nvPr/>
+        </p:nvCxnSpPr>
+        <p:spPr>
+          <a:xfrm flipV="1">
+            <a:off x="5620512" y="4127500"/>
+            <a:ext cx="3592576" cy="0"/>
+          </a:xfrm>
+          <a:prstGeom prst="line">
+            <a:avLst/>
+          </a:prstGeom>
+          <a:ln w="12700">
+            <a:solidFill>
+              <a:srgbClr val="6B5E52"/>
+            </a:solidFill>
+            <a:tailEnd type="triangle" w="med" len="med"/>
+          </a:ln>
+        </p:spPr>
+      </p:cxnSp>
+      <p:sp>
+        <p:nvSpPr>
+          <p:cNvPr id="23" name="Edge label"/>
+          <p:cNvSpPr txBox="1"/>
+          <p:nvPr/>
+        </p:nvSpPr>
+        <p:spPr>
+          <a:xfrm>
+            <a:off x="7052359" y="3892550"/>
+            <a:ext cx="728881" cy="209550"/>
+          </a:xfrm>
+          <a:prstGeom prst="rect">
+            <a:avLst/>
+          </a:prstGeom>
+          <a:solidFill>
+            <a:srgbClr val="FFFCF7"/>
+          </a:solidFill>
+        </p:spPr>
+        <p:txBody>
+          <a:bodyPr wrap="square" lIns="12700" tIns="12700" rIns="12700" bIns="12700" anchor="ctr">
+            <a:noAutofit/>
+          </a:bodyPr>
+          <a:lstStyle/>
+          <a:p>
+            <a:pPr algn="ctr">
+              <a:lnSpc>
+                <a:spcPct val="120000"/>
+              </a:lnSpc>
+            </a:pPr>
+            <a:r>
+              <a:rPr sz="1100" b="0" i="0">
+                <a:solidFill>
+                  <a:srgbClr val="6B5E52"/>
+                </a:solidFill>
+                <a:latin typeface="Arial"/>
+                <a:ea typeface="Malgun Gothic"/>
+                <a:cs typeface="Arial"/>
+              </a:rPr>
+              <a:t>pass / fail</a:t>
+            </a:r>
+          </a:p>
+        </p:txBody>
+      </p:sp>
+      <p:sp>
+        <p:nvSpPr>
+          <p:cNvPr id="24" name="Footer"/>
+          <p:cNvSpPr txBox="1"/>
+          <p:nvPr/>
+        </p:nvSpPr>
+        <p:spPr>
+          <a:xfrm>
+            <a:off x="812800" y="6426200"/>
+            <a:ext cx="6604000" cy="190500"/>
+          </a:xfrm>
+          <a:prstGeom prst="rect">
+            <a:avLst/>
+          </a:prstGeom>
+          <a:noFill/>
+        </p:spPr>
+        <p:txBody>
+          <a:bodyPr wrap="square" lIns="0" tIns="0" rIns="0" bIns="0" anchor="t">
+            <a:noAutofit/>
+          </a:bodyPr>
+          <a:lstStyle/>
+          <a:p>
+            <a:pPr algn="l">
+              <a:lnSpc>
+                <a:spcPct val="120000"/>
+              </a:lnSpc>
+            </a:pPr>
+            <a:r>
+              <a:rPr sz="1000" b="0" i="0">
+                <a:solidFill>
+                  <a:srgbClr val="6B5E52"/>
+                </a:solidFill>
+                <a:latin typeface="Arial"/>
+                <a:ea typeface="Malgun Gothic"/>
+                <a:cs typeface="Arial"/>
+              </a:rPr>
+              <a:t>Example Corp — internal</a:t>
+            </a:r>
+          </a:p>
+        </p:txBody>
+      </p:sp>
+      <p:sp>
+        <p:nvSpPr>
+          <p:cNvPr id="25" name="Page number"/>
+          <p:cNvSpPr txBox="1"/>
+          <p:nvPr/>
+        </p:nvSpPr>
+        <p:spPr>
+          <a:xfrm>
+            <a:off x="10617200" y="6426200"/>
+            <a:ext cx="762000" cy="190500"/>
+          </a:xfrm>
+          <a:prstGeom prst="rect">
+            <a:avLst/>
+          </a:prstGeom>
+          <a:noFill/>
+        </p:spPr>
+        <p:txBody>
+          <a:bodyPr wrap="square" lIns="0" tIns="0" rIns="0" bIns="0" anchor="t">
+            <a:noAutofit/>
+          </a:bodyPr>
+          <a:lstStyle/>
+          <a:p>
+            <a:pPr algn="r">
+              <a:lnSpc>
+                <a:spcPct val="120000"/>
+              </a:lnSpc>
+            </a:pPr>
+            <a:r>
+              <a:rPr sz="1000" b="0" i="0">
+                <a:solidFill>
+                  <a:srgbClr val="6B5E52"/>
+                </a:solidFill>
+                <a:latin typeface="Consolas"/>
+                <a:ea typeface="Malgun Gothic"/>
+                <a:cs typeface="Consolas"/>
+              </a:rPr>
+              <a:t>10</a:t>
+            </a:r>
+          </a:p>
+        </p:txBody>
+      </p:sp>
+    </p:spTree>
+  </p:cSld>
+  <p:clrMapOvr>
+    <a:masterClrMapping/>
+  </p:clrMapOvr>
+</p:sld>
+</file>
+
+<file path=ppt/slides/slide11.xml><?xml version="1.0" encoding="utf-8"?>
 <p:sld xmlns:a="http://schemas.openxmlformats.org/drawingml/2006/main" xmlns:p="http://schemas.openxmlformats.org/presentationml/2006/main" xmlns:r="http://schemas.openxmlformats.org/officeDocument/2006/relationships">
   <p:cSld>
     <p:bg>
@@ -6008,825 +7016,6 @@
                 <a:ea typeface="Malgun Gothic"/>
                 <a:cs typeface="Consolas"/>
               </a:rPr>
-              <a:t>10</a:t>
-            </a:r>
-          </a:p>
-        </p:txBody>
-      </p:sp>
-    </p:spTree>
-  </p:cSld>
-  <p:clrMapOvr>
-    <a:masterClrMapping/>
-  </p:clrMapOvr>
-</p:sld>
-</file>
-
-<file path=ppt/slides/slide11.xml><?xml version="1.0" encoding="utf-8"?>
-<p:sld xmlns:a="http://schemas.openxmlformats.org/drawingml/2006/main" xmlns:p="http://schemas.openxmlformats.org/presentationml/2006/main" xmlns:r="http://schemas.openxmlformats.org/officeDocument/2006/relationships">
-  <p:cSld>
-    <p:bg>
-      <p:bgPr>
-        <a:solidFill>
-          <a:srgbClr val="FFFCF7"/>
-        </a:solidFill>
-        <a:effectLst/>
-      </p:bgPr>
-    </p:bg>
-    <p:spTree>
-      <p:nvGrpSpPr>
-        <p:cNvPr id="1" name=""/>
-        <p:cNvGrpSpPr/>
-        <p:nvPr/>
-      </p:nvGrpSpPr>
-      <p:grpSpPr/>
-      <p:sp>
-        <p:nvSpPr>
-          <p:cNvPr id="2" name="Eyebrow"/>
-          <p:cNvSpPr txBox="1"/>
-          <p:nvPr/>
-        </p:nvSpPr>
-        <p:spPr>
-          <a:xfrm>
-            <a:off x="812800" y="431800"/>
-            <a:ext cx="10566400" cy="177800"/>
-          </a:xfrm>
-          <a:prstGeom prst="rect">
-            <a:avLst/>
-          </a:prstGeom>
-          <a:noFill/>
-        </p:spPr>
-        <p:txBody>
-          <a:bodyPr wrap="square" lIns="0" tIns="0" rIns="0" bIns="0" anchor="t">
-            <a:noAutofit/>
-          </a:bodyPr>
-          <a:lstStyle/>
-          <a:p>
-            <a:pPr algn="l">
-              <a:lnSpc>
-                <a:spcPct val="120000"/>
-              </a:lnSpc>
-            </a:pPr>
-            <a:r>
-              <a:rPr sz="1000" b="0" i="0">
-                <a:solidFill>
-                  <a:srgbClr val="9C4422"/>
-                </a:solidFill>
-                <a:latin typeface="Consolas"/>
-                <a:ea typeface="Malgun Gothic"/>
-                <a:cs typeface="Consolas"/>
-              </a:rPr>
-              <a:t>Plan</a:t>
-            </a:r>
-          </a:p>
-        </p:txBody>
-      </p:sp>
-      <p:sp>
-        <p:nvSpPr>
-          <p:cNvPr id="3" name="Title"/>
-          <p:cNvSpPr txBox="1"/>
-          <p:nvPr/>
-        </p:nvSpPr>
-        <p:spPr>
-          <a:xfrm>
-            <a:off x="812800" y="635000"/>
-            <a:ext cx="10566400" cy="431800"/>
-          </a:xfrm>
-          <a:prstGeom prst="rect">
-            <a:avLst/>
-          </a:prstGeom>
-          <a:noFill/>
-        </p:spPr>
-        <p:txBody>
-          <a:bodyPr wrap="square" lIns="0" tIns="0" rIns="0" bIns="0" anchor="t">
-            <a:noAutofit/>
-          </a:bodyPr>
-          <a:lstStyle/>
-          <a:p>
-            <a:pPr algn="l">
-              <a:lnSpc>
-                <a:spcPct val="105000"/>
-              </a:lnSpc>
-            </a:pPr>
-            <a:r>
-              <a:rPr sz="2600" b="0" i="0">
-                <a:solidFill>
-                  <a:srgbClr val="2B2118"/>
-                </a:solidFill>
-                <a:latin typeface="Georgia"/>
-                <a:ea typeface="Malgun Gothic"/>
-                <a:cs typeface="Georgia"/>
-              </a:rPr>
-              <a:t>Four weeks from setup to a go / no-go decision</a:t>
-            </a:r>
-          </a:p>
-        </p:txBody>
-      </p:sp>
-      <p:cxnSp>
-        <p:nvCxnSpPr>
-          <p:cNvPr id="4" name="Connector 3"/>
-          <p:cNvCxnSpPr/>
-          <p:nvPr/>
-        </p:nvCxnSpPr>
-        <p:spPr>
-          <a:xfrm>
-            <a:off x="812800" y="1752600"/>
-            <a:ext cx="10566400" cy="0"/>
-          </a:xfrm>
-          <a:prstGeom prst="line">
-            <a:avLst/>
-          </a:prstGeom>
-          <a:ln w="12700">
-            <a:solidFill>
-              <a:srgbClr val="E3DBD1"/>
-            </a:solidFill>
-          </a:ln>
-        </p:spPr>
-      </p:cxnSp>
-      <p:sp>
-        <p:nvSpPr>
-          <p:cNvPr id="5" name="TextBox 4"/>
-          <p:cNvSpPr txBox="1"/>
-          <p:nvPr/>
-        </p:nvSpPr>
-        <p:spPr>
-          <a:xfrm>
-            <a:off x="812800" y="1422400"/>
-            <a:ext cx="2470150" cy="203200"/>
-          </a:xfrm>
-          <a:prstGeom prst="rect">
-            <a:avLst/>
-          </a:prstGeom>
-          <a:noFill/>
-        </p:spPr>
-        <p:txBody>
-          <a:bodyPr wrap="square" lIns="0" tIns="0" rIns="0" bIns="0" anchor="t">
-            <a:noAutofit/>
-          </a:bodyPr>
-          <a:lstStyle/>
-          <a:p>
-            <a:pPr algn="l">
-              <a:lnSpc>
-                <a:spcPct val="120000"/>
-              </a:lnSpc>
-            </a:pPr>
-            <a:r>
-              <a:rPr sz="1000" b="0" i="0">
-                <a:solidFill>
-                  <a:srgbClr val="9C4422"/>
-                </a:solidFill>
-                <a:latin typeface="Consolas"/>
-                <a:ea typeface="Malgun Gothic"/>
-                <a:cs typeface="Consolas"/>
-              </a:rPr>
-              <a:t>Week 1</a:t>
-            </a:r>
-          </a:p>
-        </p:txBody>
-      </p:sp>
-      <p:sp>
-        <p:nvSpPr>
-          <p:cNvPr id="6" name="Oval 5"/>
-          <p:cNvSpPr/>
-          <p:nvPr/>
-        </p:nvSpPr>
-        <p:spPr>
-          <a:xfrm>
-            <a:off x="812800" y="1701800"/>
-            <a:ext cx="101600" cy="101600"/>
-          </a:xfrm>
-          <a:prstGeom prst="ellipse">
-            <a:avLst/>
-          </a:prstGeom>
-          <a:solidFill>
-            <a:srgbClr val="9C4422"/>
-          </a:solidFill>
-          <a:ln>
-            <a:noFill/>
-          </a:ln>
-        </p:spPr>
-        <p:txBody>
-          <a:bodyPr rtlCol="0" anchor="ctr" wrap="square" lIns="76200" tIns="76200" rIns="76200" bIns="76200"/>
-          <a:lstStyle/>
-          <a:p>
-            <a:pPr algn="ctr"/>
-          </a:p>
-        </p:txBody>
-      </p:sp>
-      <p:sp>
-        <p:nvSpPr>
-          <p:cNvPr id="7" name="TextBox 6"/>
-          <p:cNvSpPr txBox="1"/>
-          <p:nvPr/>
-        </p:nvSpPr>
-        <p:spPr>
-          <a:xfrm>
-            <a:off x="812800" y="1955800"/>
-            <a:ext cx="2470150" cy="292608"/>
-          </a:xfrm>
-          <a:prstGeom prst="rect">
-            <a:avLst/>
-          </a:prstGeom>
-          <a:noFill/>
-        </p:spPr>
-        <p:txBody>
-          <a:bodyPr wrap="square" lIns="0" tIns="0" rIns="0" bIns="0" anchor="t">
-            <a:noAutofit/>
-          </a:bodyPr>
-          <a:lstStyle/>
-          <a:p>
-            <a:pPr algn="l">
-              <a:lnSpc>
-                <a:spcPct val="120000"/>
-              </a:lnSpc>
-            </a:pPr>
-            <a:r>
-              <a:rPr sz="1600" b="0" i="0">
-                <a:solidFill>
-                  <a:srgbClr val="2B2118"/>
-                </a:solidFill>
-                <a:latin typeface="Arial"/>
-                <a:ea typeface="Malgun Gothic"/>
-                <a:cs typeface="Arial"/>
-              </a:rPr>
-              <a:t>Set up runners</a:t>
-            </a:r>
-          </a:p>
-        </p:txBody>
-      </p:sp>
-      <p:sp>
-        <p:nvSpPr>
-          <p:cNvPr id="8" name="TextBox 7"/>
-          <p:cNvSpPr txBox="1"/>
-          <p:nvPr/>
-        </p:nvSpPr>
-        <p:spPr>
-          <a:xfrm>
-            <a:off x="812800" y="2299208"/>
-            <a:ext cx="2470150" cy="237744"/>
-          </a:xfrm>
-          <a:prstGeom prst="rect">
-            <a:avLst/>
-          </a:prstGeom>
-          <a:noFill/>
-        </p:spPr>
-        <p:txBody>
-          <a:bodyPr wrap="square" lIns="0" tIns="0" rIns="0" bIns="0" anchor="t">
-            <a:noAutofit/>
-          </a:bodyPr>
-          <a:lstStyle/>
-          <a:p>
-            <a:pPr algn="l">
-              <a:lnSpc>
-                <a:spcPct val="120000"/>
-              </a:lnSpc>
-            </a:pPr>
-            <a:r>
-              <a:rPr sz="1300" b="0" i="0">
-                <a:solidFill>
-                  <a:srgbClr val="4A3F35"/>
-                </a:solidFill>
-                <a:latin typeface="Arial"/>
-                <a:ea typeface="Malgun Gothic"/>
-                <a:cs typeface="Arial"/>
-              </a:rPr>
-              <a:t>Shared pool and snapshot job</a:t>
-            </a:r>
-          </a:p>
-        </p:txBody>
-      </p:sp>
-      <p:sp>
-        <p:nvSpPr>
-          <p:cNvPr id="9" name="TextBox 8"/>
-          <p:cNvSpPr txBox="1"/>
-          <p:nvPr/>
-        </p:nvSpPr>
-        <p:spPr>
-          <a:xfrm>
-            <a:off x="3511550" y="1422400"/>
-            <a:ext cx="2470150" cy="203200"/>
-          </a:xfrm>
-          <a:prstGeom prst="rect">
-            <a:avLst/>
-          </a:prstGeom>
-          <a:noFill/>
-        </p:spPr>
-        <p:txBody>
-          <a:bodyPr wrap="square" lIns="0" tIns="0" rIns="0" bIns="0" anchor="t">
-            <a:noAutofit/>
-          </a:bodyPr>
-          <a:lstStyle/>
-          <a:p>
-            <a:pPr algn="l">
-              <a:lnSpc>
-                <a:spcPct val="120000"/>
-              </a:lnSpc>
-            </a:pPr>
-            <a:r>
-              <a:rPr sz="1000" b="0" i="0">
-                <a:solidFill>
-                  <a:srgbClr val="6B5E52"/>
-                </a:solidFill>
-                <a:latin typeface="Consolas"/>
-                <a:ea typeface="Malgun Gothic"/>
-                <a:cs typeface="Consolas"/>
-              </a:rPr>
-              <a:t>Week 2</a:t>
-            </a:r>
-          </a:p>
-        </p:txBody>
-      </p:sp>
-      <p:sp>
-        <p:nvSpPr>
-          <p:cNvPr id="10" name="Oval 9"/>
-          <p:cNvSpPr/>
-          <p:nvPr/>
-        </p:nvSpPr>
-        <p:spPr>
-          <a:xfrm>
-            <a:off x="3511550" y="1701800"/>
-            <a:ext cx="101600" cy="101600"/>
-          </a:xfrm>
-          <a:prstGeom prst="ellipse">
-            <a:avLst/>
-          </a:prstGeom>
-          <a:solidFill>
-            <a:srgbClr val="9C8F82"/>
-          </a:solidFill>
-          <a:ln>
-            <a:noFill/>
-          </a:ln>
-        </p:spPr>
-        <p:txBody>
-          <a:bodyPr rtlCol="0" anchor="ctr" wrap="square" lIns="76200" tIns="76200" rIns="76200" bIns="76200"/>
-          <a:lstStyle/>
-          <a:p>
-            <a:pPr algn="ctr"/>
-          </a:p>
-        </p:txBody>
-      </p:sp>
-      <p:sp>
-        <p:nvSpPr>
-          <p:cNvPr id="11" name="TextBox 10"/>
-          <p:cNvSpPr txBox="1"/>
-          <p:nvPr/>
-        </p:nvSpPr>
-        <p:spPr>
-          <a:xfrm>
-            <a:off x="3511550" y="1955800"/>
-            <a:ext cx="2470150" cy="292608"/>
-          </a:xfrm>
-          <a:prstGeom prst="rect">
-            <a:avLst/>
-          </a:prstGeom>
-          <a:noFill/>
-        </p:spPr>
-        <p:txBody>
-          <a:bodyPr wrap="square" lIns="0" tIns="0" rIns="0" bIns="0" anchor="t">
-            <a:noAutofit/>
-          </a:bodyPr>
-          <a:lstStyle/>
-          <a:p>
-            <a:pPr algn="l">
-              <a:lnSpc>
-                <a:spcPct val="120000"/>
-              </a:lnSpc>
-            </a:pPr>
-            <a:r>
-              <a:rPr sz="1600" b="0" i="0">
-                <a:solidFill>
-                  <a:srgbClr val="2B2118"/>
-                </a:solidFill>
-                <a:latin typeface="Arial"/>
-                <a:ea typeface="Malgun Gothic"/>
-                <a:cs typeface="Arial"/>
-              </a:rPr>
-              <a:t>Two teams join</a:t>
-            </a:r>
-          </a:p>
-        </p:txBody>
-      </p:sp>
-      <p:sp>
-        <p:nvSpPr>
-          <p:cNvPr id="12" name="TextBox 11"/>
-          <p:cNvSpPr txBox="1"/>
-          <p:nvPr/>
-        </p:nvSpPr>
-        <p:spPr>
-          <a:xfrm>
-            <a:off x="3511550" y="2299208"/>
-            <a:ext cx="2470150" cy="237744"/>
-          </a:xfrm>
-          <a:prstGeom prst="rect">
-            <a:avLst/>
-          </a:prstGeom>
-          <a:noFill/>
-        </p:spPr>
-        <p:txBody>
-          <a:bodyPr wrap="square" lIns="0" tIns="0" rIns="0" bIns="0" anchor="t">
-            <a:noAutofit/>
-          </a:bodyPr>
-          <a:lstStyle/>
-          <a:p>
-            <a:pPr algn="l">
-              <a:lnSpc>
-                <a:spcPct val="120000"/>
-              </a:lnSpc>
-            </a:pPr>
-            <a:r>
-              <a:rPr sz="1300" b="0" i="0">
-                <a:solidFill>
-                  <a:srgbClr val="4A3F35"/>
-                </a:solidFill>
-                <a:latin typeface="Arial"/>
-                <a:ea typeface="Malgun Gothic"/>
-                <a:cs typeface="Arial"/>
-              </a:rPr>
-              <a:t>Checks are advisory only</a:t>
-            </a:r>
-          </a:p>
-        </p:txBody>
-      </p:sp>
-      <p:sp>
-        <p:nvSpPr>
-          <p:cNvPr id="13" name="TextBox 12"/>
-          <p:cNvSpPr txBox="1"/>
-          <p:nvPr/>
-        </p:nvSpPr>
-        <p:spPr>
-          <a:xfrm>
-            <a:off x="6210300" y="1422400"/>
-            <a:ext cx="2470150" cy="203200"/>
-          </a:xfrm>
-          <a:prstGeom prst="rect">
-            <a:avLst/>
-          </a:prstGeom>
-          <a:noFill/>
-        </p:spPr>
-        <p:txBody>
-          <a:bodyPr wrap="square" lIns="0" tIns="0" rIns="0" bIns="0" anchor="t">
-            <a:noAutofit/>
-          </a:bodyPr>
-          <a:lstStyle/>
-          <a:p>
-            <a:pPr algn="l">
-              <a:lnSpc>
-                <a:spcPct val="120000"/>
-              </a:lnSpc>
-            </a:pPr>
-            <a:r>
-              <a:rPr sz="1000" b="0" i="0">
-                <a:solidFill>
-                  <a:srgbClr val="6B5E52"/>
-                </a:solidFill>
-                <a:latin typeface="Consolas"/>
-                <a:ea typeface="Malgun Gothic"/>
-                <a:cs typeface="Consolas"/>
-              </a:rPr>
-              <a:t>Week 3</a:t>
-            </a:r>
-          </a:p>
-        </p:txBody>
-      </p:sp>
-      <p:sp>
-        <p:nvSpPr>
-          <p:cNvPr id="14" name="Oval 13"/>
-          <p:cNvSpPr/>
-          <p:nvPr/>
-        </p:nvSpPr>
-        <p:spPr>
-          <a:xfrm>
-            <a:off x="6210300" y="1701800"/>
-            <a:ext cx="101600" cy="101600"/>
-          </a:xfrm>
-          <a:prstGeom prst="ellipse">
-            <a:avLst/>
-          </a:prstGeom>
-          <a:solidFill>
-            <a:srgbClr val="9C8F82"/>
-          </a:solidFill>
-          <a:ln>
-            <a:noFill/>
-          </a:ln>
-        </p:spPr>
-        <p:txBody>
-          <a:bodyPr rtlCol="0" anchor="ctr" wrap="square" lIns="76200" tIns="76200" rIns="76200" bIns="76200"/>
-          <a:lstStyle/>
-          <a:p>
-            <a:pPr algn="ctr"/>
-          </a:p>
-        </p:txBody>
-      </p:sp>
-      <p:sp>
-        <p:nvSpPr>
-          <p:cNvPr id="15" name="TextBox 14"/>
-          <p:cNvSpPr txBox="1"/>
-          <p:nvPr/>
-        </p:nvSpPr>
-        <p:spPr>
-          <a:xfrm>
-            <a:off x="6210300" y="1955800"/>
-            <a:ext cx="2470150" cy="292608"/>
-          </a:xfrm>
-          <a:prstGeom prst="rect">
-            <a:avLst/>
-          </a:prstGeom>
-          <a:noFill/>
-        </p:spPr>
-        <p:txBody>
-          <a:bodyPr wrap="square" lIns="0" tIns="0" rIns="0" bIns="0" anchor="t">
-            <a:noAutofit/>
-          </a:bodyPr>
-          <a:lstStyle/>
-          <a:p>
-            <a:pPr algn="l">
-              <a:lnSpc>
-                <a:spcPct val="120000"/>
-              </a:lnSpc>
-            </a:pPr>
-            <a:r>
-              <a:rPr sz="1600" b="0" i="0">
-                <a:solidFill>
-                  <a:srgbClr val="2B2118"/>
-                </a:solidFill>
-                <a:latin typeface="Arial"/>
-                <a:ea typeface="Malgun Gothic"/>
-                <a:cs typeface="Arial"/>
-              </a:rPr>
-              <a:t>Checks block merge</a:t>
-            </a:r>
-          </a:p>
-        </p:txBody>
-      </p:sp>
-      <p:sp>
-        <p:nvSpPr>
-          <p:cNvPr id="16" name="TextBox 15"/>
-          <p:cNvSpPr txBox="1"/>
-          <p:nvPr/>
-        </p:nvSpPr>
-        <p:spPr>
-          <a:xfrm>
-            <a:off x="6210300" y="2299208"/>
-            <a:ext cx="2470150" cy="237744"/>
-          </a:xfrm>
-          <a:prstGeom prst="rect">
-            <a:avLst/>
-          </a:prstGeom>
-          <a:noFill/>
-        </p:spPr>
-        <p:txBody>
-          <a:bodyPr wrap="square" lIns="0" tIns="0" rIns="0" bIns="0" anchor="t">
-            <a:noAutofit/>
-          </a:bodyPr>
-          <a:lstStyle/>
-          <a:p>
-            <a:pPr algn="l">
-              <a:lnSpc>
-                <a:spcPct val="120000"/>
-              </a:lnSpc>
-            </a:pPr>
-            <a:r>
-              <a:rPr sz="1300" b="0" i="0">
-                <a:solidFill>
-                  <a:srgbClr val="4A3F35"/>
-                </a:solidFill>
-                <a:latin typeface="Arial"/>
-                <a:ea typeface="Malgun Gothic"/>
-                <a:cs typeface="Arial"/>
-              </a:rPr>
-              <a:t>For the two pilot teams</a:t>
-            </a:r>
-          </a:p>
-        </p:txBody>
-      </p:sp>
-      <p:sp>
-        <p:nvSpPr>
-          <p:cNvPr id="17" name="TextBox 16"/>
-          <p:cNvSpPr txBox="1"/>
-          <p:nvPr/>
-        </p:nvSpPr>
-        <p:spPr>
-          <a:xfrm>
-            <a:off x="8909050" y="1422400"/>
-            <a:ext cx="2470150" cy="203200"/>
-          </a:xfrm>
-          <a:prstGeom prst="rect">
-            <a:avLst/>
-          </a:prstGeom>
-          <a:noFill/>
-        </p:spPr>
-        <p:txBody>
-          <a:bodyPr wrap="square" lIns="0" tIns="0" rIns="0" bIns="0" anchor="t">
-            <a:noAutofit/>
-          </a:bodyPr>
-          <a:lstStyle/>
-          <a:p>
-            <a:pPr algn="l">
-              <a:lnSpc>
-                <a:spcPct val="120000"/>
-              </a:lnSpc>
-            </a:pPr>
-            <a:r>
-              <a:rPr sz="1000" b="0" i="0">
-                <a:solidFill>
-                  <a:srgbClr val="6B5E52"/>
-                </a:solidFill>
-                <a:latin typeface="Consolas"/>
-                <a:ea typeface="Malgun Gothic"/>
-                <a:cs typeface="Consolas"/>
-              </a:rPr>
-              <a:t>Week 4</a:t>
-            </a:r>
-          </a:p>
-        </p:txBody>
-      </p:sp>
-      <p:sp>
-        <p:nvSpPr>
-          <p:cNvPr id="18" name="Oval 17"/>
-          <p:cNvSpPr/>
-          <p:nvPr/>
-        </p:nvSpPr>
-        <p:spPr>
-          <a:xfrm>
-            <a:off x="8909050" y="1701800"/>
-            <a:ext cx="101600" cy="101600"/>
-          </a:xfrm>
-          <a:prstGeom prst="ellipse">
-            <a:avLst/>
-          </a:prstGeom>
-          <a:solidFill>
-            <a:srgbClr val="9C8F82"/>
-          </a:solidFill>
-          <a:ln>
-            <a:noFill/>
-          </a:ln>
-        </p:spPr>
-        <p:txBody>
-          <a:bodyPr rtlCol="0" anchor="ctr" wrap="square" lIns="76200" tIns="76200" rIns="76200" bIns="76200"/>
-          <a:lstStyle/>
-          <a:p>
-            <a:pPr algn="ctr"/>
-          </a:p>
-        </p:txBody>
-      </p:sp>
-      <p:sp>
-        <p:nvSpPr>
-          <p:cNvPr id="19" name="TextBox 18"/>
-          <p:cNvSpPr txBox="1"/>
-          <p:nvPr/>
-        </p:nvSpPr>
-        <p:spPr>
-          <a:xfrm>
-            <a:off x="8909050" y="1955800"/>
-            <a:ext cx="2470150" cy="292608"/>
-          </a:xfrm>
-          <a:prstGeom prst="rect">
-            <a:avLst/>
-          </a:prstGeom>
-          <a:noFill/>
-        </p:spPr>
-        <p:txBody>
-          <a:bodyPr wrap="square" lIns="0" tIns="0" rIns="0" bIns="0" anchor="t">
-            <a:noAutofit/>
-          </a:bodyPr>
-          <a:lstStyle/>
-          <a:p>
-            <a:pPr algn="l">
-              <a:lnSpc>
-                <a:spcPct val="120000"/>
-              </a:lnSpc>
-            </a:pPr>
-            <a:r>
-              <a:rPr sz="1600" b="0" i="0">
-                <a:solidFill>
-                  <a:srgbClr val="2B2118"/>
-                </a:solidFill>
-                <a:latin typeface="Arial"/>
-                <a:ea typeface="Malgun Gothic"/>
-                <a:cs typeface="Arial"/>
-              </a:rPr>
-              <a:t>Decide</a:t>
-            </a:r>
-          </a:p>
-        </p:txBody>
-      </p:sp>
-      <p:sp>
-        <p:nvSpPr>
-          <p:cNvPr id="20" name="TextBox 19"/>
-          <p:cNvSpPr txBox="1"/>
-          <p:nvPr/>
-        </p:nvSpPr>
-        <p:spPr>
-          <a:xfrm>
-            <a:off x="8909050" y="2299208"/>
-            <a:ext cx="2470150" cy="475488"/>
-          </a:xfrm>
-          <a:prstGeom prst="rect">
-            <a:avLst/>
-          </a:prstGeom>
-          <a:noFill/>
-        </p:spPr>
-        <p:txBody>
-          <a:bodyPr wrap="square" lIns="0" tIns="0" rIns="0" bIns="0" anchor="t">
-            <a:noAutofit/>
-          </a:bodyPr>
-          <a:lstStyle/>
-          <a:p>
-            <a:pPr algn="l">
-              <a:lnSpc>
-                <a:spcPct val="120000"/>
-              </a:lnSpc>
-            </a:pPr>
-            <a:r>
-              <a:rPr sz="1300" b="0" i="0">
-                <a:solidFill>
-                  <a:srgbClr val="4A3F35"/>
-                </a:solidFill>
-                <a:latin typeface="Arial"/>
-                <a:ea typeface="Malgun Gothic"/>
-                <a:cs typeface="Arial"/>
-              </a:rPr>
-              <a:t>Compare blockers found and time to fix</a:t>
-            </a:r>
-          </a:p>
-        </p:txBody>
-      </p:sp>
-      <p:sp>
-        <p:nvSpPr>
-          <p:cNvPr id="21" name="Footer"/>
-          <p:cNvSpPr txBox="1"/>
-          <p:nvPr/>
-        </p:nvSpPr>
-        <p:spPr>
-          <a:xfrm>
-            <a:off x="812800" y="6426200"/>
-            <a:ext cx="6604000" cy="190500"/>
-          </a:xfrm>
-          <a:prstGeom prst="rect">
-            <a:avLst/>
-          </a:prstGeom>
-          <a:noFill/>
-        </p:spPr>
-        <p:txBody>
-          <a:bodyPr wrap="square" lIns="0" tIns="0" rIns="0" bIns="0" anchor="t">
-            <a:noAutofit/>
-          </a:bodyPr>
-          <a:lstStyle/>
-          <a:p>
-            <a:pPr algn="l">
-              <a:lnSpc>
-                <a:spcPct val="120000"/>
-              </a:lnSpc>
-            </a:pPr>
-            <a:r>
-              <a:rPr sz="1000" b="0" i="0">
-                <a:solidFill>
-                  <a:srgbClr val="6B5E52"/>
-                </a:solidFill>
-                <a:latin typeface="Arial"/>
-                <a:ea typeface="Malgun Gothic"/>
-                <a:cs typeface="Arial"/>
-              </a:rPr>
-              <a:t>Example Corp — internal</a:t>
-            </a:r>
-          </a:p>
-        </p:txBody>
-      </p:sp>
-      <p:sp>
-        <p:nvSpPr>
-          <p:cNvPr id="22" name="Page number"/>
-          <p:cNvSpPr txBox="1"/>
-          <p:nvPr/>
-        </p:nvSpPr>
-        <p:spPr>
-          <a:xfrm>
-            <a:off x="10617200" y="6426200"/>
-            <a:ext cx="762000" cy="190500"/>
-          </a:xfrm>
-          <a:prstGeom prst="rect">
-            <a:avLst/>
-          </a:prstGeom>
-          <a:noFill/>
-        </p:spPr>
-        <p:txBody>
-          <a:bodyPr wrap="square" lIns="0" tIns="0" rIns="0" bIns="0" anchor="t">
-            <a:noAutofit/>
-          </a:bodyPr>
-          <a:lstStyle/>
-          <a:p>
-            <a:pPr algn="r">
-              <a:lnSpc>
-                <a:spcPct val="120000"/>
-              </a:lnSpc>
-            </a:pPr>
-            <a:r>
-              <a:rPr sz="1000" b="0" i="0">
-                <a:solidFill>
-                  <a:srgbClr val="6B5E52"/>
-                </a:solidFill>
-                <a:latin typeface="Consolas"/>
-                <a:ea typeface="Malgun Gothic"/>
-                <a:cs typeface="Consolas"/>
-              </a:rPr>
               <a:t>11</a:t>
             </a:r>
           </a:p>
@@ -6894,7 +7083,7 @@
                 <a:ea typeface="Malgun Gothic"/>
                 <a:cs typeface="Consolas"/>
               </a:rPr>
-              <a:t>Decision</a:t>
+              <a:t>Plan</a:t>
             </a:r>
           </a:p>
         </p:txBody>
@@ -6935,21 +7124,42 @@
                 <a:ea typeface="Malgun Gothic"/>
                 <a:cs typeface="Georgia"/>
               </a:rPr>
-              <a:t>We judge the pilot on three measures agreed in advance</a:t>
-            </a:r>
-          </a:p>
-        </p:txBody>
-      </p:sp>
-      <p:sp>
-        <p:nvSpPr>
-          <p:cNvPr id="4" name="Lead"/>
+              <a:t>Four weeks from setup to a go / no-go decision</a:t>
+            </a:r>
+          </a:p>
+        </p:txBody>
+      </p:sp>
+      <p:cxnSp>
+        <p:nvCxnSpPr>
+          <p:cNvPr id="4" name="Connector 3"/>
+          <p:cNvCxnSpPr/>
+          <p:nvPr/>
+        </p:nvCxnSpPr>
+        <p:spPr>
+          <a:xfrm>
+            <a:off x="812800" y="1752600"/>
+            <a:ext cx="10566400" cy="0"/>
+          </a:xfrm>
+          <a:prstGeom prst="line">
+            <a:avLst/>
+          </a:prstGeom>
+          <a:ln w="12700">
+            <a:solidFill>
+              <a:srgbClr val="E3DBD1"/>
+            </a:solidFill>
+          </a:ln>
+        </p:spPr>
+      </p:cxnSp>
+      <p:sp>
+        <p:nvSpPr>
+          <p:cNvPr id="5" name="TextBox 4"/>
           <p:cNvSpPr txBox="1"/>
           <p:nvPr/>
         </p:nvSpPr>
         <p:spPr>
           <a:xfrm>
             <a:off x="812800" y="1422400"/>
-            <a:ext cx="10566400" cy="292608"/>
+            <a:ext cx="2470150" cy="203200"/>
           </a:xfrm>
           <a:prstGeom prst="rect">
             <a:avLst/>
@@ -6968,29 +7178,140 @@
               </a:lnSpc>
             </a:pPr>
             <a:r>
+              <a:rPr sz="1000" b="0" i="0">
+                <a:solidFill>
+                  <a:srgbClr val="9C4422"/>
+                </a:solidFill>
+                <a:latin typeface="Consolas"/>
+                <a:ea typeface="Malgun Gothic"/>
+                <a:cs typeface="Consolas"/>
+              </a:rPr>
+              <a:t>Week 1</a:t>
+            </a:r>
+          </a:p>
+        </p:txBody>
+      </p:sp>
+      <p:sp>
+        <p:nvSpPr>
+          <p:cNvPr id="6" name="Oval 5"/>
+          <p:cNvSpPr/>
+          <p:nvPr/>
+        </p:nvSpPr>
+        <p:spPr>
+          <a:xfrm>
+            <a:off x="812800" y="1701800"/>
+            <a:ext cx="101600" cy="101600"/>
+          </a:xfrm>
+          <a:prstGeom prst="ellipse">
+            <a:avLst/>
+          </a:prstGeom>
+          <a:solidFill>
+            <a:srgbClr val="9C4422"/>
+          </a:solidFill>
+          <a:ln>
+            <a:noFill/>
+          </a:ln>
+        </p:spPr>
+        <p:txBody>
+          <a:bodyPr rtlCol="0" anchor="ctr" wrap="square" lIns="76200" tIns="76200" rIns="76200" bIns="76200"/>
+          <a:lstStyle/>
+          <a:p>
+            <a:pPr algn="ctr"/>
+          </a:p>
+        </p:txBody>
+      </p:sp>
+      <p:sp>
+        <p:nvSpPr>
+          <p:cNvPr id="7" name="TextBox 6"/>
+          <p:cNvSpPr txBox="1"/>
+          <p:nvPr/>
+        </p:nvSpPr>
+        <p:spPr>
+          <a:xfrm>
+            <a:off x="812800" y="1955800"/>
+            <a:ext cx="2470150" cy="292608"/>
+          </a:xfrm>
+          <a:prstGeom prst="rect">
+            <a:avLst/>
+          </a:prstGeom>
+          <a:noFill/>
+        </p:spPr>
+        <p:txBody>
+          <a:bodyPr wrap="square" lIns="0" tIns="0" rIns="0" bIns="0" anchor="t">
+            <a:noAutofit/>
+          </a:bodyPr>
+          <a:lstStyle/>
+          <a:p>
+            <a:pPr algn="l">
+              <a:lnSpc>
+                <a:spcPct val="120000"/>
+              </a:lnSpc>
+            </a:pPr>
+            <a:r>
               <a:rPr sz="1600" b="0" i="0">
                 <a:solidFill>
+                  <a:srgbClr val="2B2118"/>
+                </a:solidFill>
+                <a:latin typeface="Arial"/>
+                <a:ea typeface="Malgun Gothic"/>
+                <a:cs typeface="Arial"/>
+              </a:rPr>
+              <a:t>Set up runners</a:t>
+            </a:r>
+          </a:p>
+        </p:txBody>
+      </p:sp>
+      <p:sp>
+        <p:nvSpPr>
+          <p:cNvPr id="8" name="TextBox 7"/>
+          <p:cNvSpPr txBox="1"/>
+          <p:nvPr/>
+        </p:nvSpPr>
+        <p:spPr>
+          <a:xfrm>
+            <a:off x="812800" y="2299208"/>
+            <a:ext cx="2470150" cy="237744"/>
+          </a:xfrm>
+          <a:prstGeom prst="rect">
+            <a:avLst/>
+          </a:prstGeom>
+          <a:noFill/>
+        </p:spPr>
+        <p:txBody>
+          <a:bodyPr wrap="square" lIns="0" tIns="0" rIns="0" bIns="0" anchor="t">
+            <a:noAutofit/>
+          </a:bodyPr>
+          <a:lstStyle/>
+          <a:p>
+            <a:pPr algn="l">
+              <a:lnSpc>
+                <a:spcPct val="120000"/>
+              </a:lnSpc>
+            </a:pPr>
+            <a:r>
+              <a:rPr sz="1300" b="0" i="0">
+                <a:solidFill>
                   <a:srgbClr val="4A3F35"/>
                 </a:solidFill>
                 <a:latin typeface="Arial"/>
                 <a:ea typeface="Malgun Gothic"/>
                 <a:cs typeface="Arial"/>
               </a:rPr>
-              <a:t>The pilot continues only if the measures improve without slowing merges.</a:t>
-            </a:r>
-          </a:p>
-        </p:txBody>
-      </p:sp>
-      <p:sp>
-        <p:nvSpPr>
-          <p:cNvPr id="5" name="TextBox 4"/>
-          <p:cNvSpPr txBox="1"/>
-          <p:nvPr/>
-        </p:nvSpPr>
-        <p:spPr>
-          <a:xfrm>
-            <a:off x="812800" y="1943608"/>
-            <a:ext cx="9509760" cy="292608"/>
+              <a:t>Shared pool and snapshot job</a:t>
+            </a:r>
+          </a:p>
+        </p:txBody>
+      </p:sp>
+      <p:sp>
+        <p:nvSpPr>
+          <p:cNvPr id="9" name="TextBox 8"/>
+          <p:cNvSpPr txBox="1"/>
+          <p:nvPr/>
+        </p:nvSpPr>
+        <p:spPr>
+          <a:xfrm>
+            <a:off x="3511550" y="1422400"/>
+            <a:ext cx="2470150" cy="203200"/>
           </a:xfrm>
           <a:prstGeom prst="rect">
             <a:avLst/>
@@ -7003,17 +7324,83 @@
           </a:bodyPr>
           <a:lstStyle/>
           <a:p>
-            <a:pPr algn="l" marL="223520" indent="-223520">
+            <a:pPr algn="l">
               <a:lnSpc>
                 <a:spcPct val="120000"/>
               </a:lnSpc>
-              <a:buClr>
-                <a:srgbClr val="9C4422"/>
-              </a:buClr>
-              <a:buChar char="•"/>
-            </a:pPr>
-            <a:r>
-              <a:rPr sz="1600" b="1" i="0">
+            </a:pPr>
+            <a:r>
+              <a:rPr sz="1000" b="0" i="0">
+                <a:solidFill>
+                  <a:srgbClr val="6B5E52"/>
+                </a:solidFill>
+                <a:latin typeface="Consolas"/>
+                <a:ea typeface="Malgun Gothic"/>
+                <a:cs typeface="Consolas"/>
+              </a:rPr>
+              <a:t>Week 2</a:t>
+            </a:r>
+          </a:p>
+        </p:txBody>
+      </p:sp>
+      <p:sp>
+        <p:nvSpPr>
+          <p:cNvPr id="10" name="Oval 9"/>
+          <p:cNvSpPr/>
+          <p:nvPr/>
+        </p:nvSpPr>
+        <p:spPr>
+          <a:xfrm>
+            <a:off x="3511550" y="1701800"/>
+            <a:ext cx="101600" cy="101600"/>
+          </a:xfrm>
+          <a:prstGeom prst="ellipse">
+            <a:avLst/>
+          </a:prstGeom>
+          <a:solidFill>
+            <a:srgbClr val="9C8F82"/>
+          </a:solidFill>
+          <a:ln>
+            <a:noFill/>
+          </a:ln>
+        </p:spPr>
+        <p:txBody>
+          <a:bodyPr rtlCol="0" anchor="ctr" wrap="square" lIns="76200" tIns="76200" rIns="76200" bIns="76200"/>
+          <a:lstStyle/>
+          <a:p>
+            <a:pPr algn="ctr"/>
+          </a:p>
+        </p:txBody>
+      </p:sp>
+      <p:sp>
+        <p:nvSpPr>
+          <p:cNvPr id="11" name="TextBox 10"/>
+          <p:cNvSpPr txBox="1"/>
+          <p:nvPr/>
+        </p:nvSpPr>
+        <p:spPr>
+          <a:xfrm>
+            <a:off x="3511550" y="1955800"/>
+            <a:ext cx="2470150" cy="292608"/>
+          </a:xfrm>
+          <a:prstGeom prst="rect">
+            <a:avLst/>
+          </a:prstGeom>
+          <a:noFill/>
+        </p:spPr>
+        <p:txBody>
+          <a:bodyPr wrap="square" lIns="0" tIns="0" rIns="0" bIns="0" anchor="t">
+            <a:noAutofit/>
+          </a:bodyPr>
+          <a:lstStyle/>
+          <a:p>
+            <a:pPr algn="l">
+              <a:lnSpc>
+                <a:spcPct val="120000"/>
+              </a:lnSpc>
+            </a:pPr>
+            <a:r>
+              <a:rPr sz="1600" b="0" i="0">
                 <a:solidFill>
                   <a:srgbClr val="2B2118"/>
                 </a:solidFill>
@@ -7021,32 +7408,214 @@
                 <a:ea typeface="Malgun Gothic"/>
                 <a:cs typeface="Arial"/>
               </a:rPr>
-              <a:t>Share of blockers found before merge</a:t>
-            </a:r>
+              <a:t>Two teams join</a:t>
+            </a:r>
+          </a:p>
+        </p:txBody>
+      </p:sp>
+      <p:sp>
+        <p:nvSpPr>
+          <p:cNvPr id="12" name="TextBox 11"/>
+          <p:cNvSpPr txBox="1"/>
+          <p:nvPr/>
+        </p:nvSpPr>
+        <p:spPr>
+          <a:xfrm>
+            <a:off x="3511550" y="2299208"/>
+            <a:ext cx="2470150" cy="237744"/>
+          </a:xfrm>
+          <a:prstGeom prst="rect">
+            <a:avLst/>
+          </a:prstGeom>
+          <a:noFill/>
+        </p:spPr>
+        <p:txBody>
+          <a:bodyPr wrap="square" lIns="0" tIns="0" rIns="0" bIns="0" anchor="t">
+            <a:noAutofit/>
+          </a:bodyPr>
+          <a:lstStyle/>
+          <a:p>
+            <a:pPr algn="l">
+              <a:lnSpc>
+                <a:spcPct val="120000"/>
+              </a:lnSpc>
+            </a:pPr>
+            <a:r>
+              <a:rPr sz="1300" b="0" i="0">
+                <a:solidFill>
+                  <a:srgbClr val="4A3F35"/>
+                </a:solidFill>
+                <a:latin typeface="Arial"/>
+                <a:ea typeface="Malgun Gothic"/>
+                <a:cs typeface="Arial"/>
+              </a:rPr>
+              <a:t>Checks are advisory only</a:t>
+            </a:r>
+          </a:p>
+        </p:txBody>
+      </p:sp>
+      <p:sp>
+        <p:nvSpPr>
+          <p:cNvPr id="13" name="TextBox 12"/>
+          <p:cNvSpPr txBox="1"/>
+          <p:nvPr/>
+        </p:nvSpPr>
+        <p:spPr>
+          <a:xfrm>
+            <a:off x="6210300" y="1422400"/>
+            <a:ext cx="2470150" cy="203200"/>
+          </a:xfrm>
+          <a:prstGeom prst="rect">
+            <a:avLst/>
+          </a:prstGeom>
+          <a:noFill/>
+        </p:spPr>
+        <p:txBody>
+          <a:bodyPr wrap="square" lIns="0" tIns="0" rIns="0" bIns="0" anchor="t">
+            <a:noAutofit/>
+          </a:bodyPr>
+          <a:lstStyle/>
+          <a:p>
+            <a:pPr algn="l">
+              <a:lnSpc>
+                <a:spcPct val="120000"/>
+              </a:lnSpc>
+            </a:pPr>
+            <a:r>
+              <a:rPr sz="1000" b="0" i="0">
+                <a:solidFill>
+                  <a:srgbClr val="6B5E52"/>
+                </a:solidFill>
+                <a:latin typeface="Consolas"/>
+                <a:ea typeface="Malgun Gothic"/>
+                <a:cs typeface="Consolas"/>
+              </a:rPr>
+              <a:t>Week 3</a:t>
+            </a:r>
+          </a:p>
+        </p:txBody>
+      </p:sp>
+      <p:sp>
+        <p:nvSpPr>
+          <p:cNvPr id="14" name="Oval 13"/>
+          <p:cNvSpPr/>
+          <p:nvPr/>
+        </p:nvSpPr>
+        <p:spPr>
+          <a:xfrm>
+            <a:off x="6210300" y="1701800"/>
+            <a:ext cx="101600" cy="101600"/>
+          </a:xfrm>
+          <a:prstGeom prst="ellipse">
+            <a:avLst/>
+          </a:prstGeom>
+          <a:solidFill>
+            <a:srgbClr val="9C8F82"/>
+          </a:solidFill>
+          <a:ln>
+            <a:noFill/>
+          </a:ln>
+        </p:spPr>
+        <p:txBody>
+          <a:bodyPr rtlCol="0" anchor="ctr" wrap="square" lIns="76200" tIns="76200" rIns="76200" bIns="76200"/>
+          <a:lstStyle/>
+          <a:p>
+            <a:pPr algn="ctr"/>
+          </a:p>
+        </p:txBody>
+      </p:sp>
+      <p:sp>
+        <p:nvSpPr>
+          <p:cNvPr id="15" name="TextBox 14"/>
+          <p:cNvSpPr txBox="1"/>
+          <p:nvPr/>
+        </p:nvSpPr>
+        <p:spPr>
+          <a:xfrm>
+            <a:off x="6210300" y="1955800"/>
+            <a:ext cx="2470150" cy="292608"/>
+          </a:xfrm>
+          <a:prstGeom prst="rect">
+            <a:avLst/>
+          </a:prstGeom>
+          <a:noFill/>
+        </p:spPr>
+        <p:txBody>
+          <a:bodyPr wrap="square" lIns="0" tIns="0" rIns="0" bIns="0" anchor="t">
+            <a:noAutofit/>
+          </a:bodyPr>
+          <a:lstStyle/>
+          <a:p>
+            <a:pPr algn="l">
+              <a:lnSpc>
+                <a:spcPct val="120000"/>
+              </a:lnSpc>
+            </a:pPr>
             <a:r>
               <a:rPr sz="1600" b="0" i="0">
                 <a:solidFill>
+                  <a:srgbClr val="2B2118"/>
+                </a:solidFill>
+                <a:latin typeface="Arial"/>
+                <a:ea typeface="Malgun Gothic"/>
+                <a:cs typeface="Arial"/>
+              </a:rPr>
+              <a:t>Checks block merge</a:t>
+            </a:r>
+          </a:p>
+        </p:txBody>
+      </p:sp>
+      <p:sp>
+        <p:nvSpPr>
+          <p:cNvPr id="16" name="TextBox 15"/>
+          <p:cNvSpPr txBox="1"/>
+          <p:nvPr/>
+        </p:nvSpPr>
+        <p:spPr>
+          <a:xfrm>
+            <a:off x="6210300" y="2299208"/>
+            <a:ext cx="2470150" cy="237744"/>
+          </a:xfrm>
+          <a:prstGeom prst="rect">
+            <a:avLst/>
+          </a:prstGeom>
+          <a:noFill/>
+        </p:spPr>
+        <p:txBody>
+          <a:bodyPr wrap="square" lIns="0" tIns="0" rIns="0" bIns="0" anchor="t">
+            <a:noAutofit/>
+          </a:bodyPr>
+          <a:lstStyle/>
+          <a:p>
+            <a:pPr algn="l">
+              <a:lnSpc>
+                <a:spcPct val="120000"/>
+              </a:lnSpc>
+            </a:pPr>
+            <a:r>
+              <a:rPr sz="1300" b="0" i="0">
+                <a:solidFill>
                   <a:srgbClr val="4A3F35"/>
                 </a:solidFill>
                 <a:latin typeface="Arial"/>
                 <a:ea typeface="Malgun Gothic"/>
                 <a:cs typeface="Arial"/>
               </a:rPr>
-              <a:t> — target: a clear majority</a:t>
-            </a:r>
-          </a:p>
-        </p:txBody>
-      </p:sp>
-      <p:sp>
-        <p:nvSpPr>
-          <p:cNvPr id="6" name="TextBox 5"/>
-          <p:cNvSpPr txBox="1"/>
-          <p:nvPr/>
-        </p:nvSpPr>
-        <p:spPr>
-          <a:xfrm>
-            <a:off x="812800" y="2358135"/>
-            <a:ext cx="9509760" cy="292608"/>
+              <a:t>For the two pilot teams</a:t>
+            </a:r>
+          </a:p>
+        </p:txBody>
+      </p:sp>
+      <p:sp>
+        <p:nvSpPr>
+          <p:cNvPr id="17" name="TextBox 16"/>
+          <p:cNvSpPr txBox="1"/>
+          <p:nvPr/>
+        </p:nvSpPr>
+        <p:spPr>
+          <a:xfrm>
+            <a:off x="8909050" y="1422400"/>
+            <a:ext cx="2470150" cy="203200"/>
           </a:xfrm>
           <a:prstGeom prst="rect">
             <a:avLst/>
@@ -7059,17 +7628,83 @@
           </a:bodyPr>
           <a:lstStyle/>
           <a:p>
-            <a:pPr algn="l" marL="223520" indent="-223520">
+            <a:pPr algn="l">
               <a:lnSpc>
                 <a:spcPct val="120000"/>
               </a:lnSpc>
-              <a:buClr>
-                <a:srgbClr val="9C4422"/>
-              </a:buClr>
-              <a:buChar char="•"/>
-            </a:pPr>
-            <a:r>
-              <a:rPr sz="1600" b="1" i="0">
+            </a:pPr>
+            <a:r>
+              <a:rPr sz="1000" b="0" i="0">
+                <a:solidFill>
+                  <a:srgbClr val="6B5E52"/>
+                </a:solidFill>
+                <a:latin typeface="Consolas"/>
+                <a:ea typeface="Malgun Gothic"/>
+                <a:cs typeface="Consolas"/>
+              </a:rPr>
+              <a:t>Week 4</a:t>
+            </a:r>
+          </a:p>
+        </p:txBody>
+      </p:sp>
+      <p:sp>
+        <p:nvSpPr>
+          <p:cNvPr id="18" name="Oval 17"/>
+          <p:cNvSpPr/>
+          <p:nvPr/>
+        </p:nvSpPr>
+        <p:spPr>
+          <a:xfrm>
+            <a:off x="8909050" y="1701800"/>
+            <a:ext cx="101600" cy="101600"/>
+          </a:xfrm>
+          <a:prstGeom prst="ellipse">
+            <a:avLst/>
+          </a:prstGeom>
+          <a:solidFill>
+            <a:srgbClr val="9C8F82"/>
+          </a:solidFill>
+          <a:ln>
+            <a:noFill/>
+          </a:ln>
+        </p:spPr>
+        <p:txBody>
+          <a:bodyPr rtlCol="0" anchor="ctr" wrap="square" lIns="76200" tIns="76200" rIns="76200" bIns="76200"/>
+          <a:lstStyle/>
+          <a:p>
+            <a:pPr algn="ctr"/>
+          </a:p>
+        </p:txBody>
+      </p:sp>
+      <p:sp>
+        <p:nvSpPr>
+          <p:cNvPr id="19" name="TextBox 18"/>
+          <p:cNvSpPr txBox="1"/>
+          <p:nvPr/>
+        </p:nvSpPr>
+        <p:spPr>
+          <a:xfrm>
+            <a:off x="8909050" y="1955800"/>
+            <a:ext cx="2470150" cy="292608"/>
+          </a:xfrm>
+          <a:prstGeom prst="rect">
+            <a:avLst/>
+          </a:prstGeom>
+          <a:noFill/>
+        </p:spPr>
+        <p:txBody>
+          <a:bodyPr wrap="square" lIns="0" tIns="0" rIns="0" bIns="0" anchor="t">
+            <a:noAutofit/>
+          </a:bodyPr>
+          <a:lstStyle/>
+          <a:p>
+            <a:pPr algn="l">
+              <a:lnSpc>
+                <a:spcPct val="120000"/>
+              </a:lnSpc>
+            </a:pPr>
+            <a:r>
+              <a:rPr sz="1600" b="0" i="0">
                 <a:solidFill>
                   <a:srgbClr val="2B2118"/>
                 </a:solidFill>
@@ -7077,10 +7712,40 @@
                 <a:ea typeface="Malgun Gothic"/>
                 <a:cs typeface="Arial"/>
               </a:rPr>
-              <a:t>Median time to fix</a:t>
-            </a:r>
-            <a:r>
-              <a:rPr sz="1600" b="0" i="0">
+              <a:t>Decide</a:t>
+            </a:r>
+          </a:p>
+        </p:txBody>
+      </p:sp>
+      <p:sp>
+        <p:nvSpPr>
+          <p:cNvPr id="20" name="TextBox 19"/>
+          <p:cNvSpPr txBox="1"/>
+          <p:nvPr/>
+        </p:nvSpPr>
+        <p:spPr>
+          <a:xfrm>
+            <a:off x="8909050" y="2299208"/>
+            <a:ext cx="2470150" cy="475488"/>
+          </a:xfrm>
+          <a:prstGeom prst="rect">
+            <a:avLst/>
+          </a:prstGeom>
+          <a:noFill/>
+        </p:spPr>
+        <p:txBody>
+          <a:bodyPr wrap="square" lIns="0" tIns="0" rIns="0" bIns="0" anchor="t">
+            <a:noAutofit/>
+          </a:bodyPr>
+          <a:lstStyle/>
+          <a:p>
+            <a:pPr algn="l">
+              <a:lnSpc>
+                <a:spcPct val="120000"/>
+              </a:lnSpc>
+            </a:pPr>
+            <a:r>
+              <a:rPr sz="1300" b="0" i="0">
                 <a:solidFill>
                   <a:srgbClr val="4A3F35"/>
                 </a:solidFill>
@@ -7088,160 +7753,14 @@
                 <a:ea typeface="Malgun Gothic"/>
                 <a:cs typeface="Arial"/>
               </a:rPr>
-              <a:t> — target: lower than on the release branch</a:t>
-            </a:r>
-          </a:p>
-        </p:txBody>
-      </p:sp>
-      <p:sp>
-        <p:nvSpPr>
-          <p:cNvPr id="7" name="TextBox 6"/>
-          <p:cNvSpPr txBox="1"/>
-          <p:nvPr/>
-        </p:nvSpPr>
-        <p:spPr>
-          <a:xfrm>
-            <a:off x="812800" y="2772663"/>
-            <a:ext cx="9509760" cy="292608"/>
-          </a:xfrm>
-          <a:prstGeom prst="rect">
-            <a:avLst/>
-          </a:prstGeom>
-          <a:noFill/>
-        </p:spPr>
-        <p:txBody>
-          <a:bodyPr wrap="square" lIns="0" tIns="0" rIns="0" bIns="0" anchor="t">
-            <a:noAutofit/>
-          </a:bodyPr>
-          <a:lstStyle/>
-          <a:p>
-            <a:pPr algn="l" marL="223520" indent="-223520">
-              <a:lnSpc>
-                <a:spcPct val="120000"/>
-              </a:lnSpc>
-              <a:buClr>
-                <a:srgbClr val="9C4422"/>
-              </a:buClr>
-              <a:buChar char="•"/>
-            </a:pPr>
-            <a:r>
-              <a:rPr sz="1600" b="1" i="0">
-                <a:solidFill>
-                  <a:srgbClr val="2B2118"/>
-                </a:solidFill>
-                <a:latin typeface="Arial"/>
-                <a:ea typeface="Malgun Gothic"/>
-                <a:cs typeface="Arial"/>
-              </a:rPr>
-              <a:t>Median time to merge</a:t>
-            </a:r>
-            <a:r>
-              <a:rPr sz="1600" b="0" i="0">
-                <a:solidFill>
-                  <a:srgbClr val="4A3F35"/>
-                </a:solidFill>
-                <a:latin typeface="Arial"/>
-                <a:ea typeface="Malgun Gothic"/>
-                <a:cs typeface="Arial"/>
-              </a:rPr>
-              <a:t> — must not grow by more than a small margin</a:t>
-            </a:r>
-          </a:p>
-        </p:txBody>
-      </p:sp>
-      <p:sp>
-        <p:nvSpPr>
-          <p:cNvPr id="8" name="TextBox 7"/>
-          <p:cNvSpPr txBox="1"/>
-          <p:nvPr/>
-        </p:nvSpPr>
-        <p:spPr>
-          <a:xfrm>
-            <a:off x="1036319" y="3090671"/>
-            <a:ext cx="9286240" cy="237744"/>
-          </a:xfrm>
-          <a:prstGeom prst="rect">
-            <a:avLst/>
-          </a:prstGeom>
-          <a:noFill/>
-        </p:spPr>
-        <p:txBody>
-          <a:bodyPr wrap="square" lIns="0" tIns="0" rIns="0" bIns="0" anchor="t">
-            <a:noAutofit/>
-          </a:bodyPr>
-          <a:lstStyle/>
-          <a:p>
-            <a:pPr algn="l" marL="181610" indent="-181610">
-              <a:lnSpc>
-                <a:spcPct val="120000"/>
-              </a:lnSpc>
-              <a:buClr>
-                <a:srgbClr val="9C4422"/>
-              </a:buClr>
-              <a:buChar char="–"/>
-            </a:pPr>
-            <a:r>
-              <a:rPr sz="1300" b="0" i="0">
-                <a:solidFill>
-                  <a:srgbClr val="6B5E52"/>
-                </a:solidFill>
-                <a:latin typeface="Arial"/>
-                <a:ea typeface="Malgun Gothic"/>
-                <a:cs typeface="Arial"/>
-              </a:rPr>
-              <a:t>Measured on the same two teams</a:t>
-            </a:r>
-          </a:p>
-        </p:txBody>
-      </p:sp>
-      <p:sp>
-        <p:nvSpPr>
-          <p:cNvPr id="9" name="TextBox 8"/>
-          <p:cNvSpPr txBox="1"/>
-          <p:nvPr/>
-        </p:nvSpPr>
-        <p:spPr>
-          <a:xfrm>
-            <a:off x="1036319" y="3353815"/>
-            <a:ext cx="9286240" cy="237744"/>
-          </a:xfrm>
-          <a:prstGeom prst="rect">
-            <a:avLst/>
-          </a:prstGeom>
-          <a:noFill/>
-        </p:spPr>
-        <p:txBody>
-          <a:bodyPr wrap="square" lIns="0" tIns="0" rIns="0" bIns="0" anchor="t">
-            <a:noAutofit/>
-          </a:bodyPr>
-          <a:lstStyle/>
-          <a:p>
-            <a:pPr algn="l" marL="181610" indent="-181610">
-              <a:lnSpc>
-                <a:spcPct val="120000"/>
-              </a:lnSpc>
-              <a:buClr>
-                <a:srgbClr val="9C4422"/>
-              </a:buClr>
-              <a:buChar char="–"/>
-            </a:pPr>
-            <a:r>
-              <a:rPr sz="1300" b="0" i="0">
-                <a:solidFill>
-                  <a:srgbClr val="6B5E52"/>
-                </a:solidFill>
-                <a:latin typeface="Arial"/>
-                <a:ea typeface="Malgun Gothic"/>
-                <a:cs typeface="Arial"/>
-              </a:rPr>
-              <a:t>before and during the pilot</a:t>
-            </a:r>
-          </a:p>
-        </p:txBody>
-      </p:sp>
-      <p:sp>
-        <p:nvSpPr>
-          <p:cNvPr id="10" name="Footer"/>
+              <a:t>Compare blockers found and time to fix</a:t>
+            </a:r>
+          </a:p>
+        </p:txBody>
+      </p:sp>
+      <p:sp>
+        <p:nvSpPr>
+          <p:cNvPr id="21" name="Footer"/>
           <p:cNvSpPr txBox="1"/>
           <p:nvPr/>
         </p:nvSpPr>
@@ -7282,7 +7801,7 @@
       </p:sp>
       <p:sp>
         <p:nvSpPr>
-          <p:cNvPr id="11" name="Page number"/>
+          <p:cNvPr id="22" name="Page number"/>
           <p:cNvSpPr txBox="1"/>
           <p:nvPr/>
         </p:nvSpPr>
@@ -7383,7 +7902,7 @@
                 <a:ea typeface="Malgun Gothic"/>
                 <a:cs typeface="Consolas"/>
               </a:rPr>
-              <a:t>Appendix</a:t>
+              <a:t>Decision</a:t>
             </a:r>
           </a:p>
         </p:txBody>
@@ -7424,97 +7943,201 @@
                 <a:ea typeface="Malgun Gothic"/>
                 <a:cs typeface="Georgia"/>
               </a:rPr>
-              <a:t>Teams opt in with one line in their pipeline file</a:t>
-            </a:r>
-          </a:p>
-        </p:txBody>
-      </p:sp>
-      <p:sp>
-        <p:nvSpPr>
-          <p:cNvPr id="4" name="Code panel"/>
-          <p:cNvSpPr/>
+              <a:t>We judge the pilot on three measures agreed in advance</a:t>
+            </a:r>
+          </a:p>
+        </p:txBody>
+      </p:sp>
+      <p:sp>
+        <p:nvSpPr>
+          <p:cNvPr id="4" name="Lead"/>
+          <p:cNvSpPr txBox="1"/>
           <p:nvPr/>
         </p:nvSpPr>
         <p:spPr>
           <a:xfrm>
             <a:off x="812800" y="1422400"/>
-            <a:ext cx="10566400" cy="811276"/>
-          </a:xfrm>
-          <a:prstGeom prst="roundRect">
-            <a:avLst>
-              <a:gd name="adj" fmla="val 9392"/>
-            </a:avLst>
-          </a:prstGeom>
-          <a:solidFill>
-            <a:srgbClr val="F5EEE4"/>
-          </a:solidFill>
-          <a:ln>
-            <a:noFill/>
-          </a:ln>
-        </p:spPr>
-        <p:txBody>
-          <a:bodyPr rtlCol="0" anchor="ctr" wrap="square" lIns="76200" tIns="76200" rIns="76200" bIns="76200"/>
-          <a:lstStyle/>
-          <a:p>
-            <a:pPr algn="ctr"/>
-          </a:p>
-        </p:txBody>
-      </p:sp>
-      <p:sp>
-        <p:nvSpPr>
-          <p:cNvPr id="5" name="Code"/>
-          <p:cNvSpPr txBox="1"/>
-          <p:nvPr/>
-        </p:nvSpPr>
-        <p:spPr>
-          <a:xfrm>
-            <a:off x="990600" y="1600200"/>
-            <a:ext cx="10210800" cy="455675"/>
-          </a:xfrm>
-          <a:prstGeom prst="rect">
-            <a:avLst/>
-          </a:prstGeom>
-          <a:noFill/>
-        </p:spPr>
-        <p:txBody>
-          <a:bodyPr wrap="none" lIns="0" tIns="0" rIns="0" bIns="0" anchor="t">
+            <a:ext cx="7620000" cy="292608"/>
+          </a:xfrm>
+          <a:prstGeom prst="rect">
+            <a:avLst/>
+          </a:prstGeom>
+          <a:noFill/>
+        </p:spPr>
+        <p:txBody>
+          <a:bodyPr wrap="square" lIns="0" tIns="0" rIns="0" bIns="0" anchor="t">
             <a:noAutofit/>
           </a:bodyPr>
           <a:lstStyle/>
           <a:p>
             <a:pPr algn="l">
               <a:lnSpc>
-                <a:spcPct val="115000"/>
-              </a:lnSpc>
+                <a:spcPct val="120000"/>
+              </a:lnSpc>
+            </a:pPr>
+            <a:r>
+              <a:rPr sz="1600" b="0" i="0">
+                <a:solidFill>
+                  <a:srgbClr val="4A3F35"/>
+                </a:solidFill>
+                <a:latin typeface="Arial"/>
+                <a:ea typeface="Malgun Gothic"/>
+                <a:cs typeface="Arial"/>
+              </a:rPr>
+              <a:t>The pilot continues only if the measures improve without slowing merges.</a:t>
+            </a:r>
+          </a:p>
+        </p:txBody>
+      </p:sp>
+      <p:sp>
+        <p:nvSpPr>
+          <p:cNvPr id="5" name="Bullets"/>
+          <p:cNvSpPr txBox="1"/>
+          <p:nvPr/>
+        </p:nvSpPr>
+        <p:spPr>
+          <a:xfrm>
+            <a:off x="812800" y="1943608"/>
+            <a:ext cx="7620000" cy="1384808"/>
+          </a:xfrm>
+          <a:prstGeom prst="rect">
+            <a:avLst/>
+          </a:prstGeom>
+          <a:noFill/>
+        </p:spPr>
+        <p:txBody>
+          <a:bodyPr wrap="square" lIns="0" tIns="0" rIns="0" bIns="0">
+            <a:noAutofit/>
+          </a:bodyPr>
+          <a:lstStyle/>
+          <a:p>
+            <a:pPr algn="l" marL="223520" indent="-223520">
+              <a:lnSpc>
+                <a:spcPct val="120000"/>
+              </a:lnSpc>
+              <a:buClr>
+                <a:srgbClr val="9C4422"/>
+              </a:buClr>
+              <a:buChar char="•"/>
+            </a:pPr>
+            <a:r>
+              <a:rPr sz="1600" b="1" i="0">
+                <a:solidFill>
+                  <a:srgbClr val="2B2118"/>
+                </a:solidFill>
+                <a:latin typeface="Arial"/>
+                <a:ea typeface="Malgun Gothic"/>
+                <a:cs typeface="Arial"/>
+              </a:rPr>
+              <a:t>Share of blockers found before merge</a:t>
+            </a:r>
+            <a:r>
+              <a:rPr sz="1600" b="0" i="0">
+                <a:solidFill>
+                  <a:srgbClr val="4A3F35"/>
+                </a:solidFill>
+                <a:latin typeface="Arial"/>
+                <a:ea typeface="Malgun Gothic"/>
+                <a:cs typeface="Arial"/>
+              </a:rPr>
+              <a:t> — target: a clear majority</a:t>
+            </a:r>
+          </a:p>
+          <a:p>
+            <a:pPr algn="l" marL="223520" indent="-223520">
+              <a:lnSpc>
+                <a:spcPct val="120000"/>
+              </a:lnSpc>
+              <a:spcBef>
+                <a:spcPts val="960"/>
+              </a:spcBef>
+              <a:buClr>
+                <a:srgbClr val="9C4422"/>
+              </a:buClr>
+              <a:buChar char="•"/>
+            </a:pPr>
+            <a:r>
+              <a:rPr sz="1600" b="1" i="0">
+                <a:solidFill>
+                  <a:srgbClr val="2B2118"/>
+                </a:solidFill>
+                <a:latin typeface="Arial"/>
+                <a:ea typeface="Malgun Gothic"/>
+                <a:cs typeface="Arial"/>
+              </a:rPr>
+              <a:t>Median time to fix</a:t>
+            </a:r>
+            <a:r>
+              <a:rPr sz="1600" b="0" i="0">
+                <a:solidFill>
+                  <a:srgbClr val="4A3F35"/>
+                </a:solidFill>
+                <a:latin typeface="Arial"/>
+                <a:ea typeface="Malgun Gothic"/>
+                <a:cs typeface="Arial"/>
+              </a:rPr>
+              <a:t> — target: lower than on the release branch</a:t>
+            </a:r>
+          </a:p>
+          <a:p>
+            <a:pPr algn="l" marL="223520" indent="-223520">
+              <a:lnSpc>
+                <a:spcPct val="120000"/>
+              </a:lnSpc>
+              <a:spcBef>
+                <a:spcPts val="960"/>
+              </a:spcBef>
+              <a:buClr>
+                <a:srgbClr val="9C4422"/>
+              </a:buClr>
+              <a:buChar char="•"/>
+            </a:pPr>
+            <a:r>
+              <a:rPr sz="1600" b="1" i="0">
+                <a:solidFill>
+                  <a:srgbClr val="2B2118"/>
+                </a:solidFill>
+                <a:latin typeface="Arial"/>
+                <a:ea typeface="Malgun Gothic"/>
+                <a:cs typeface="Arial"/>
+              </a:rPr>
+              <a:t>Median time to merge</a:t>
+            </a:r>
+            <a:r>
+              <a:rPr sz="1600" b="0" i="0">
+                <a:solidFill>
+                  <a:srgbClr val="4A3F35"/>
+                </a:solidFill>
+                <a:latin typeface="Arial"/>
+                <a:ea typeface="Malgun Gothic"/>
+                <a:cs typeface="Arial"/>
+              </a:rPr>
+              <a:t> — must not grow by more than a small margin</a:t>
+            </a:r>
+          </a:p>
+          <a:p>
+            <a:pPr algn="l" marL="405130" indent="-181610">
+              <a:lnSpc>
+                <a:spcPct val="120000"/>
+              </a:lnSpc>
+              <a:spcBef>
+                <a:spcPts val="200"/>
+              </a:spcBef>
+              <a:buClr>
+                <a:srgbClr val="9C4422"/>
+              </a:buClr>
+              <a:buChar char="–"/>
             </a:pPr>
             <a:r>
               <a:rPr sz="1300" b="0" i="0">
                 <a:solidFill>
-                  <a:srgbClr val="2B2118"/>
-                </a:solidFill>
-                <a:latin typeface="Consolas"/>
-                <a:ea typeface="Malgun Gothic"/>
-                <a:cs typeface="Consolas"/>
-              </a:rPr>
-              <a:t>checks:</a:t>
-            </a:r>
-          </a:p>
-          <a:p>
-            <a:pPr algn="l">
-              <a:lnSpc>
-                <a:spcPct val="115000"/>
-              </a:lnSpc>
-            </a:pPr>
-            <a:r>
-              <a:rPr sz="1300" b="0" i="0">
-                <a:solidFill>
-                  <a:srgbClr val="2B2118"/>
-                </a:solidFill>
-                <a:latin typeface="Consolas"/>
-                <a:ea typeface="Malgun Gothic"/>
-                <a:cs typeface="Consolas"/>
-              </a:rPr>
-              <a:t>  release-gates: enabled   # build, contract tests, migration dry run</a:t>
+                  <a:srgbClr val="6B5E52"/>
+                </a:solidFill>
+                <a:latin typeface="Arial"/>
+                <a:ea typeface="Malgun Gothic"/>
+                <a:cs typeface="Arial"/>
+              </a:rPr>
+              <a:t>Measured on the same two teams, before and during the pilot</a:t>
             </a:r>
           </a:p>
         </p:txBody>
@@ -7704,76 +8327,101 @@
                 <a:ea typeface="Malgun Gothic"/>
                 <a:cs typeface="Georgia"/>
               </a:rPr>
-              <a:t>Each gate can be switched off per repository while teams adopt it</a:t>
-            </a:r>
-          </a:p>
-        </p:txBody>
-      </p:sp>
-      <p:sp>
-        <p:nvSpPr>
-          <p:cNvPr id="4" name="TextBox 3"/>
-          <p:cNvSpPr txBox="1"/>
-          <p:nvPr/>
-        </p:nvSpPr>
-        <p:spPr>
-          <a:xfrm>
-            <a:off x="812800" y="5680456"/>
-            <a:ext cx="10566400" cy="237744"/>
-          </a:xfrm>
-          <a:prstGeom prst="rect">
-            <a:avLst/>
-          </a:prstGeom>
-          <a:noFill/>
-        </p:spPr>
-        <p:txBody>
-          <a:bodyPr wrap="square" lIns="0" tIns="0" rIns="0" bIns="0" anchor="t">
+              <a:t>Teams opt in with one line in their pipeline file</a:t>
+            </a:r>
+          </a:p>
+        </p:txBody>
+      </p:sp>
+      <p:sp>
+        <p:nvSpPr>
+          <p:cNvPr id="4" name="Code panel"/>
+          <p:cNvSpPr/>
+          <p:nvPr/>
+        </p:nvSpPr>
+        <p:spPr>
+          <a:xfrm>
+            <a:off x="812800" y="1422400"/>
+            <a:ext cx="10566400" cy="811276"/>
+          </a:xfrm>
+          <a:prstGeom prst="roundRect">
+            <a:avLst>
+              <a:gd name="adj" fmla="val 9392"/>
+            </a:avLst>
+          </a:prstGeom>
+          <a:solidFill>
+            <a:srgbClr val="F5EEE4"/>
+          </a:solidFill>
+          <a:ln>
+            <a:noFill/>
+          </a:ln>
+        </p:spPr>
+        <p:txBody>
+          <a:bodyPr rtlCol="0" anchor="ctr" wrap="square" lIns="76200" tIns="76200" rIns="76200" bIns="76200"/>
+          <a:lstStyle/>
+          <a:p>
+            <a:pPr algn="ctr"/>
+          </a:p>
+        </p:txBody>
+      </p:sp>
+      <p:sp>
+        <p:nvSpPr>
+          <p:cNvPr id="5" name="Code"/>
+          <p:cNvSpPr txBox="1"/>
+          <p:nvPr/>
+        </p:nvSpPr>
+        <p:spPr>
+          <a:xfrm>
+            <a:off x="990600" y="1600200"/>
+            <a:ext cx="10210800" cy="455675"/>
+          </a:xfrm>
+          <a:prstGeom prst="rect">
+            <a:avLst/>
+          </a:prstGeom>
+          <a:noFill/>
+        </p:spPr>
+        <p:txBody>
+          <a:bodyPr wrap="none" lIns="0" tIns="0" rIns="0" bIns="0" anchor="t">
             <a:noAutofit/>
           </a:bodyPr>
           <a:lstStyle/>
           <a:p>
             <a:pPr algn="l">
               <a:lnSpc>
-                <a:spcPct val="120000"/>
+                <a:spcPct val="115000"/>
               </a:lnSpc>
             </a:pPr>
             <a:r>
               <a:rPr sz="1300" b="0" i="0">
                 <a:solidFill>
-                  <a:srgbClr val="6B5E52"/>
-                </a:solidFill>
-                <a:latin typeface="Arial"/>
-                <a:ea typeface="Malgun Gothic"/>
-                <a:cs typeface="Arial"/>
-              </a:rPr>
-              <a:t>Wireframe of the pipeline settings screen; one gate is switched off.</a:t>
-            </a:r>
-          </a:p>
-        </p:txBody>
-      </p:sp>
-      <p:pic>
-        <p:nvPicPr>
-          <p:cNvPr id="5" name="Image" descr="Pipeline settings screen with one toggle per release gate"/>
-          <p:cNvPicPr>
-            <a:picLocks noChangeAspect="1"/>
-          </p:cNvPicPr>
-          <p:nvPr/>
-        </p:nvPicPr>
-        <p:blipFill>
-          <a:blip r:embed="rId2"/>
-          <a:stretch>
-            <a:fillRect/>
-          </a:stretch>
-        </p:blipFill>
-        <p:spPr>
-          <a:xfrm>
-            <a:off x="2401372" y="1422400"/>
-            <a:ext cx="7389255" cy="4156455"/>
-          </a:xfrm>
-          <a:prstGeom prst="rect">
-            <a:avLst/>
-          </a:prstGeom>
-        </p:spPr>
-      </p:pic>
+                  <a:srgbClr val="2B2118"/>
+                </a:solidFill>
+                <a:latin typeface="Consolas"/>
+                <a:ea typeface="Malgun Gothic"/>
+                <a:cs typeface="Consolas"/>
+              </a:rPr>
+              <a:t>checks:</a:t>
+            </a:r>
+          </a:p>
+          <a:p>
+            <a:pPr algn="l">
+              <a:lnSpc>
+                <a:spcPct val="115000"/>
+              </a:lnSpc>
+            </a:pPr>
+            <a:r>
+              <a:rPr sz="1300" b="0" i="0">
+                <a:solidFill>
+                  <a:srgbClr val="2B2118"/>
+                </a:solidFill>
+                <a:latin typeface="Consolas"/>
+                <a:ea typeface="Malgun Gothic"/>
+                <a:cs typeface="Consolas"/>
+              </a:rPr>
+              <a:t>  release-gates: enabled   # build, contract tests, migration dry run</a:t>
+            </a:r>
+          </a:p>
+        </p:txBody>
+      </p:sp>
       <p:sp>
         <p:nvSpPr>
           <p:cNvPr id="6" name="Footer"/>
@@ -7959,52 +8607,21 @@
                 <a:ea typeface="Malgun Gothic"/>
                 <a:cs typeface="Georgia"/>
               </a:rPr>
-              <a:t>Each role gets something concrete from the pilot</a:t>
-            </a:r>
-          </a:p>
-        </p:txBody>
-      </p:sp>
-      <p:sp>
-        <p:nvSpPr>
-          <p:cNvPr id="4" name="Card 1"/>
-          <p:cNvSpPr/>
-          <p:nvPr/>
-        </p:nvSpPr>
-        <p:spPr>
-          <a:xfrm>
-            <a:off x="812800" y="1422400"/>
-            <a:ext cx="3369733" cy="1199895"/>
-          </a:xfrm>
-          <a:prstGeom prst="roundRect">
-            <a:avLst>
-              <a:gd name="adj" fmla="val 6350"/>
-            </a:avLst>
-          </a:prstGeom>
-          <a:solidFill>
-            <a:srgbClr val="F5EEE4"/>
-          </a:solidFill>
-          <a:ln>
-            <a:noFill/>
-          </a:ln>
-        </p:spPr>
-        <p:txBody>
-          <a:bodyPr rtlCol="0" anchor="ctr" wrap="square" lIns="76200" tIns="76200" rIns="76200" bIns="76200"/>
-          <a:lstStyle/>
-          <a:p>
-            <a:pPr algn="ctr"/>
-          </a:p>
-        </p:txBody>
-      </p:sp>
-      <p:sp>
-        <p:nvSpPr>
-          <p:cNvPr id="5" name="TextBox 4"/>
-          <p:cNvSpPr txBox="1"/>
-          <p:nvPr/>
-        </p:nvSpPr>
-        <p:spPr>
-          <a:xfrm>
-            <a:off x="990600" y="1600200"/>
-            <a:ext cx="3014133" cy="292608"/>
+              <a:t>Each gate can be switched off per repository during adoption</a:t>
+            </a:r>
+          </a:p>
+        </p:txBody>
+      </p:sp>
+      <p:sp>
+        <p:nvSpPr>
+          <p:cNvPr id="4" name="TextBox 3"/>
+          <p:cNvSpPr txBox="1"/>
+          <p:nvPr/>
+        </p:nvSpPr>
+        <p:spPr>
+          <a:xfrm>
+            <a:off x="812800" y="5680456"/>
+            <a:ext cx="10566400" cy="237744"/>
           </a:xfrm>
           <a:prstGeom prst="rect">
             <a:avLst/>
@@ -8023,291 +8640,46 @@
               </a:lnSpc>
             </a:pPr>
             <a:r>
-              <a:rPr sz="1600" b="0" i="0">
-                <a:solidFill>
-                  <a:srgbClr val="2B2118"/>
+              <a:rPr sz="1300" b="0" i="0">
+                <a:solidFill>
+                  <a:srgbClr val="6B5E52"/>
                 </a:solidFill>
                 <a:latin typeface="Arial"/>
                 <a:ea typeface="Malgun Gothic"/>
                 <a:cs typeface="Arial"/>
               </a:rPr>
-              <a:t>Authors</a:t>
-            </a:r>
-          </a:p>
-        </p:txBody>
-      </p:sp>
-      <p:sp>
-        <p:nvSpPr>
-          <p:cNvPr id="6" name="TextBox 5"/>
-          <p:cNvSpPr txBox="1"/>
-          <p:nvPr/>
-        </p:nvSpPr>
-        <p:spPr>
-          <a:xfrm>
-            <a:off x="990600" y="1969008"/>
-            <a:ext cx="3014133" cy="475488"/>
-          </a:xfrm>
-          <a:prstGeom prst="rect">
-            <a:avLst/>
-          </a:prstGeom>
-          <a:noFill/>
-        </p:spPr>
-        <p:txBody>
-          <a:bodyPr wrap="square" lIns="0" tIns="0" rIns="0" bIns="0" anchor="t">
-            <a:noAutofit/>
-          </a:bodyPr>
-          <a:lstStyle/>
-          <a:p>
-            <a:pPr algn="l">
-              <a:lnSpc>
-                <a:spcPct val="120000"/>
-              </a:lnSpc>
-            </a:pPr>
-            <a:r>
-              <a:rPr sz="1300" b="0" i="0">
-                <a:solidFill>
-                  <a:srgbClr val="4A3F35"/>
-                </a:solidFill>
-                <a:latin typeface="Arial"/>
-                <a:ea typeface="Malgun Gothic"/>
-                <a:cs typeface="Arial"/>
-              </a:rPr>
-              <a:t>A failing check points at their own change, while it is still fresh</a:t>
-            </a:r>
-          </a:p>
-        </p:txBody>
-      </p:sp>
-      <p:sp>
-        <p:nvSpPr>
-          <p:cNvPr id="7" name="Card 2"/>
-          <p:cNvSpPr/>
-          <p:nvPr/>
-        </p:nvSpPr>
-        <p:spPr>
-          <a:xfrm>
-            <a:off x="4411133" y="1422400"/>
-            <a:ext cx="3369733" cy="1199895"/>
-          </a:xfrm>
-          <a:prstGeom prst="roundRect">
-            <a:avLst>
-              <a:gd name="adj" fmla="val 6350"/>
-            </a:avLst>
-          </a:prstGeom>
-          <a:solidFill>
-            <a:srgbClr val="F5EEE4"/>
-          </a:solidFill>
-          <a:ln>
-            <a:noFill/>
-          </a:ln>
-        </p:spPr>
-        <p:txBody>
-          <a:bodyPr rtlCol="0" anchor="ctr" wrap="square" lIns="76200" tIns="76200" rIns="76200" bIns="76200"/>
-          <a:lstStyle/>
-          <a:p>
-            <a:pPr algn="ctr"/>
-          </a:p>
-        </p:txBody>
-      </p:sp>
-      <p:sp>
-        <p:nvSpPr>
-          <p:cNvPr id="8" name="TextBox 7"/>
-          <p:cNvSpPr txBox="1"/>
-          <p:nvPr/>
-        </p:nvSpPr>
-        <p:spPr>
-          <a:xfrm>
-            <a:off x="4588933" y="1600200"/>
-            <a:ext cx="3014133" cy="292608"/>
-          </a:xfrm>
-          <a:prstGeom prst="rect">
-            <a:avLst/>
-          </a:prstGeom>
-          <a:noFill/>
-        </p:spPr>
-        <p:txBody>
-          <a:bodyPr wrap="square" lIns="0" tIns="0" rIns="0" bIns="0" anchor="t">
-            <a:noAutofit/>
-          </a:bodyPr>
-          <a:lstStyle/>
-          <a:p>
-            <a:pPr algn="l">
-              <a:lnSpc>
-                <a:spcPct val="120000"/>
-              </a:lnSpc>
-            </a:pPr>
-            <a:r>
-              <a:rPr sz="1600" b="0" i="0">
-                <a:solidFill>
-                  <a:srgbClr val="2B2118"/>
-                </a:solidFill>
-                <a:latin typeface="Arial"/>
-                <a:ea typeface="Malgun Gothic"/>
-                <a:cs typeface="Arial"/>
-              </a:rPr>
-              <a:t>Reviewers</a:t>
-            </a:r>
-          </a:p>
-        </p:txBody>
-      </p:sp>
-      <p:sp>
-        <p:nvSpPr>
-          <p:cNvPr id="9" name="TextBox 8"/>
-          <p:cNvSpPr txBox="1"/>
-          <p:nvPr/>
-        </p:nvSpPr>
-        <p:spPr>
-          <a:xfrm>
-            <a:off x="4588933" y="1969008"/>
-            <a:ext cx="3014133" cy="475488"/>
-          </a:xfrm>
-          <a:prstGeom prst="rect">
-            <a:avLst/>
-          </a:prstGeom>
-          <a:noFill/>
-        </p:spPr>
-        <p:txBody>
-          <a:bodyPr wrap="square" lIns="0" tIns="0" rIns="0" bIns="0" anchor="t">
-            <a:noAutofit/>
-          </a:bodyPr>
-          <a:lstStyle/>
-          <a:p>
-            <a:pPr algn="l">
-              <a:lnSpc>
-                <a:spcPct val="120000"/>
-              </a:lnSpc>
-            </a:pPr>
-            <a:r>
-              <a:rPr sz="1300" b="0" i="0">
-                <a:solidFill>
-                  <a:srgbClr val="4A3F35"/>
-                </a:solidFill>
-                <a:latin typeface="Arial"/>
-                <a:ea typeface="Malgun Gothic"/>
-                <a:cs typeface="Arial"/>
-              </a:rPr>
-              <a:t>Reviews start from a change that already builds and migrates</a:t>
-            </a:r>
-          </a:p>
-        </p:txBody>
-      </p:sp>
-      <p:sp>
-        <p:nvSpPr>
-          <p:cNvPr id="10" name="Card 3"/>
-          <p:cNvSpPr/>
-          <p:nvPr/>
-        </p:nvSpPr>
-        <p:spPr>
-          <a:xfrm>
-            <a:off x="8009466" y="1422400"/>
-            <a:ext cx="3369733" cy="1199895"/>
-          </a:xfrm>
-          <a:prstGeom prst="roundRect">
-            <a:avLst>
-              <a:gd name="adj" fmla="val 6350"/>
-            </a:avLst>
-          </a:prstGeom>
-          <a:solidFill>
-            <a:srgbClr val="F7F0ED"/>
-          </a:solidFill>
-          <a:ln w="12700">
-            <a:solidFill>
-              <a:srgbClr val="9C4422"/>
-            </a:solidFill>
-          </a:ln>
-        </p:spPr>
-        <p:txBody>
-          <a:bodyPr rtlCol="0" anchor="ctr" wrap="square" lIns="76200" tIns="76200" rIns="76200" bIns="76200"/>
-          <a:lstStyle/>
-          <a:p>
-            <a:pPr algn="ctr"/>
-          </a:p>
-        </p:txBody>
-      </p:sp>
-      <p:sp>
-        <p:nvSpPr>
-          <p:cNvPr id="11" name="TextBox 10"/>
-          <p:cNvSpPr txBox="1"/>
-          <p:nvPr/>
-        </p:nvSpPr>
-        <p:spPr>
-          <a:xfrm>
-            <a:off x="8187266" y="1600200"/>
-            <a:ext cx="3014133" cy="292608"/>
-          </a:xfrm>
-          <a:prstGeom prst="rect">
-            <a:avLst/>
-          </a:prstGeom>
-          <a:noFill/>
-        </p:spPr>
-        <p:txBody>
-          <a:bodyPr wrap="square" lIns="0" tIns="0" rIns="0" bIns="0" anchor="t">
-            <a:noAutofit/>
-          </a:bodyPr>
-          <a:lstStyle/>
-          <a:p>
-            <a:pPr algn="l">
-              <a:lnSpc>
-                <a:spcPct val="120000"/>
-              </a:lnSpc>
-            </a:pPr>
-            <a:r>
-              <a:rPr sz="1600" b="0" i="0">
-                <a:solidFill>
-                  <a:srgbClr val="2B2118"/>
-                </a:solidFill>
-                <a:latin typeface="Arial"/>
-                <a:ea typeface="Malgun Gothic"/>
-                <a:cs typeface="Arial"/>
-              </a:rPr>
-              <a:t>Release managers</a:t>
-            </a:r>
-          </a:p>
-        </p:txBody>
-      </p:sp>
-      <p:sp>
-        <p:nvSpPr>
-          <p:cNvPr id="12" name="TextBox 11"/>
-          <p:cNvSpPr txBox="1"/>
-          <p:nvPr/>
-        </p:nvSpPr>
-        <p:spPr>
-          <a:xfrm>
-            <a:off x="8187266" y="1969008"/>
-            <a:ext cx="3014133" cy="475488"/>
-          </a:xfrm>
-          <a:prstGeom prst="rect">
-            <a:avLst/>
-          </a:prstGeom>
-          <a:noFill/>
-        </p:spPr>
-        <p:txBody>
-          <a:bodyPr wrap="square" lIns="0" tIns="0" rIns="0" bIns="0" anchor="t">
-            <a:noAutofit/>
-          </a:bodyPr>
-          <a:lstStyle/>
-          <a:p>
-            <a:pPr algn="l">
-              <a:lnSpc>
-                <a:spcPct val="120000"/>
-              </a:lnSpc>
-            </a:pPr>
-            <a:r>
-              <a:rPr sz="1300" b="0" i="0">
-                <a:solidFill>
-                  <a:srgbClr val="4A3F35"/>
-                </a:solidFill>
-                <a:latin typeface="Arial"/>
-                <a:ea typeface="Malgun Gothic"/>
-                <a:cs typeface="Arial"/>
-              </a:rPr>
-              <a:t>Release week stops being the first time the checks run together</a:t>
-            </a:r>
-          </a:p>
-        </p:txBody>
-      </p:sp>
-      <p:sp>
-        <p:nvSpPr>
-          <p:cNvPr id="13" name="Footer"/>
+              <a:t>Wireframe of the pipeline settings screen; one gate is switched off.</a:t>
+            </a:r>
+          </a:p>
+        </p:txBody>
+      </p:sp>
+      <p:pic>
+        <p:nvPicPr>
+          <p:cNvPr id="5" name="Image" descr="Pipeline settings screen with one toggle per release gate"/>
+          <p:cNvPicPr>
+            <a:picLocks noChangeAspect="1"/>
+          </p:cNvPicPr>
+          <p:nvPr/>
+        </p:nvPicPr>
+        <p:blipFill>
+          <a:blip r:embed="rId2"/>
+          <a:stretch>
+            <a:fillRect/>
+          </a:stretch>
+        </p:blipFill>
+        <p:spPr>
+          <a:xfrm>
+            <a:off x="2401372" y="1422400"/>
+            <a:ext cx="7389255" cy="4156455"/>
+          </a:xfrm>
+          <a:prstGeom prst="rect">
+            <a:avLst/>
+          </a:prstGeom>
+        </p:spPr>
+      </p:pic>
+      <p:sp>
+        <p:nvSpPr>
+          <p:cNvPr id="6" name="Footer"/>
           <p:cNvSpPr txBox="1"/>
           <p:nvPr/>
         </p:nvSpPr>
@@ -8348,7 +8720,7 @@
       </p:sp>
       <p:sp>
         <p:nvSpPr>
-          <p:cNvPr id="14" name="Page number"/>
+          <p:cNvPr id="7" name="Page number"/>
           <p:cNvSpPr txBox="1"/>
           <p:nvPr/>
         </p:nvSpPr>
@@ -8415,20 +8787,104 @@
       <p:grpSpPr/>
       <p:sp>
         <p:nvSpPr>
-          <p:cNvPr id="2" name="Rectangle 1"/>
+          <p:cNvPr id="2" name="Eyebrow"/>
+          <p:cNvSpPr txBox="1"/>
+          <p:nvPr/>
+        </p:nvSpPr>
+        <p:spPr>
+          <a:xfrm>
+            <a:off x="812800" y="431800"/>
+            <a:ext cx="10566400" cy="177800"/>
+          </a:xfrm>
+          <a:prstGeom prst="rect">
+            <a:avLst/>
+          </a:prstGeom>
+          <a:noFill/>
+        </p:spPr>
+        <p:txBody>
+          <a:bodyPr wrap="square" lIns="0" tIns="0" rIns="0" bIns="0" anchor="t">
+            <a:noAutofit/>
+          </a:bodyPr>
+          <a:lstStyle/>
+          <a:p>
+            <a:pPr algn="l">
+              <a:lnSpc>
+                <a:spcPct val="120000"/>
+              </a:lnSpc>
+            </a:pPr>
+            <a:r>
+              <a:rPr sz="1000" b="0" i="0">
+                <a:solidFill>
+                  <a:srgbClr val="9C4422"/>
+                </a:solidFill>
+                <a:latin typeface="Consolas"/>
+                <a:ea typeface="Malgun Gothic"/>
+                <a:cs typeface="Consolas"/>
+              </a:rPr>
+              <a:t>Appendix</a:t>
+            </a:r>
+          </a:p>
+        </p:txBody>
+      </p:sp>
+      <p:sp>
+        <p:nvSpPr>
+          <p:cNvPr id="3" name="Title"/>
+          <p:cNvSpPr txBox="1"/>
+          <p:nvPr/>
+        </p:nvSpPr>
+        <p:spPr>
+          <a:xfrm>
+            <a:off x="812800" y="635000"/>
+            <a:ext cx="10566400" cy="431800"/>
+          </a:xfrm>
+          <a:prstGeom prst="rect">
+            <a:avLst/>
+          </a:prstGeom>
+          <a:noFill/>
+        </p:spPr>
+        <p:txBody>
+          <a:bodyPr wrap="square" lIns="0" tIns="0" rIns="0" bIns="0" anchor="t">
+            <a:noAutofit/>
+          </a:bodyPr>
+          <a:lstStyle/>
+          <a:p>
+            <a:pPr algn="l">
+              <a:lnSpc>
+                <a:spcPct val="105000"/>
+              </a:lnSpc>
+            </a:pPr>
+            <a:r>
+              <a:rPr sz="2600" b="0" i="0">
+                <a:solidFill>
+                  <a:srgbClr val="2B2118"/>
+                </a:solidFill>
+                <a:latin typeface="Georgia"/>
+                <a:ea typeface="Malgun Gothic"/>
+                <a:cs typeface="Georgia"/>
+              </a:rPr>
+              <a:t>Each role gets something concrete from the pilot</a:t>
+            </a:r>
+          </a:p>
+        </p:txBody>
+      </p:sp>
+      <p:sp>
+        <p:nvSpPr>
+          <p:cNvPr id="4" name="Card 1"/>
           <p:cNvSpPr/>
           <p:nvPr/>
         </p:nvSpPr>
         <p:spPr>
           <a:xfrm>
-            <a:off x="812800" y="2361691"/>
-            <a:ext cx="38100" cy="1626616"/>
-          </a:xfrm>
-          <a:prstGeom prst="rect">
-            <a:avLst/>
+            <a:off x="812800" y="1422400"/>
+            <a:ext cx="3369733" cy="1199895"/>
+          </a:xfrm>
+          <a:prstGeom prst="roundRect">
+            <a:avLst>
+              <a:gd name="adj" fmla="val 6350"/>
+            </a:avLst>
           </a:prstGeom>
           <a:solidFill>
-            <a:srgbClr val="9C4422"/>
+            <a:srgbClr val="F5EEE4"/>
           </a:solidFill>
           <a:ln>
             <a:noFill/>
@@ -8444,14 +8900,14 @@
       </p:sp>
       <p:sp>
         <p:nvSpPr>
-          <p:cNvPr id="3" name="Quote"/>
-          <p:cNvSpPr txBox="1"/>
-          <p:nvPr/>
-        </p:nvSpPr>
-        <p:spPr>
-          <a:xfrm>
-            <a:off x="1270000" y="2310891"/>
-            <a:ext cx="8453120" cy="1728216"/>
+          <p:cNvPr id="5" name="TextBox 4"/>
+          <p:cNvSpPr txBox="1"/>
+          <p:nvPr/>
+        </p:nvSpPr>
+        <p:spPr>
+          <a:xfrm>
+            <a:off x="990600" y="1600200"/>
+            <a:ext cx="3014133" cy="292608"/>
           </a:xfrm>
           <a:prstGeom prst="rect">
             <a:avLst/>
@@ -8466,33 +8922,33 @@
           <a:p>
             <a:pPr algn="l">
               <a:lnSpc>
-                <a:spcPct val="105000"/>
-              </a:lnSpc>
-            </a:pPr>
-            <a:r>
-              <a:rPr sz="3600" b="0" i="0">
+                <a:spcPct val="120000"/>
+              </a:lnSpc>
+            </a:pPr>
+            <a:r>
+              <a:rPr sz="1600" b="0" i="0">
                 <a:solidFill>
                   <a:srgbClr val="2B2118"/>
                 </a:solidFill>
-                <a:latin typeface="Georgia"/>
-                <a:ea typeface="Malgun Gothic"/>
-                <a:cs typeface="Georgia"/>
-              </a:rPr>
-              <a:t>“We stopped dreading release week once failures arrived one change at a time.”</a:t>
-            </a:r>
-          </a:p>
-        </p:txBody>
-      </p:sp>
-      <p:sp>
-        <p:nvSpPr>
-          <p:cNvPr id="4" name="TextBox 3"/>
-          <p:cNvSpPr txBox="1"/>
-          <p:nvPr/>
-        </p:nvSpPr>
-        <p:spPr>
-          <a:xfrm>
-            <a:off x="1270000" y="4267708"/>
-            <a:ext cx="8453120" cy="264160"/>
+                <a:latin typeface="Arial"/>
+                <a:ea typeface="Malgun Gothic"/>
+                <a:cs typeface="Arial"/>
+              </a:rPr>
+              <a:t>Authors</a:t>
+            </a:r>
+          </a:p>
+        </p:txBody>
+      </p:sp>
+      <p:sp>
+        <p:nvSpPr>
+          <p:cNvPr id="6" name="TextBox 5"/>
+          <p:cNvSpPr txBox="1"/>
+          <p:nvPr/>
+        </p:nvSpPr>
+        <p:spPr>
+          <a:xfrm>
+            <a:off x="990600" y="1969008"/>
+            <a:ext cx="3014133" cy="475488"/>
           </a:xfrm>
           <a:prstGeom prst="rect">
             <a:avLst/>
@@ -8513,13 +8969,323 @@
             <a:r>
               <a:rPr sz="1300" b="0" i="0">
                 <a:solidFill>
+                  <a:srgbClr val="4A3F35"/>
+                </a:solidFill>
+                <a:latin typeface="Arial"/>
+                <a:ea typeface="Malgun Gothic"/>
+                <a:cs typeface="Arial"/>
+              </a:rPr>
+              <a:t>A failing check points at their own change, while it is still fresh</a:t>
+            </a:r>
+          </a:p>
+        </p:txBody>
+      </p:sp>
+      <p:sp>
+        <p:nvSpPr>
+          <p:cNvPr id="7" name="Card 2"/>
+          <p:cNvSpPr/>
+          <p:nvPr/>
+        </p:nvSpPr>
+        <p:spPr>
+          <a:xfrm>
+            <a:off x="4411133" y="1422400"/>
+            <a:ext cx="3369733" cy="1199895"/>
+          </a:xfrm>
+          <a:prstGeom prst="roundRect">
+            <a:avLst>
+              <a:gd name="adj" fmla="val 6350"/>
+            </a:avLst>
+          </a:prstGeom>
+          <a:solidFill>
+            <a:srgbClr val="F5EEE4"/>
+          </a:solidFill>
+          <a:ln>
+            <a:noFill/>
+          </a:ln>
+        </p:spPr>
+        <p:txBody>
+          <a:bodyPr rtlCol="0" anchor="ctr" wrap="square" lIns="76200" tIns="76200" rIns="76200" bIns="76200"/>
+          <a:lstStyle/>
+          <a:p>
+            <a:pPr algn="ctr"/>
+          </a:p>
+        </p:txBody>
+      </p:sp>
+      <p:sp>
+        <p:nvSpPr>
+          <p:cNvPr id="8" name="TextBox 7"/>
+          <p:cNvSpPr txBox="1"/>
+          <p:nvPr/>
+        </p:nvSpPr>
+        <p:spPr>
+          <a:xfrm>
+            <a:off x="4588933" y="1600200"/>
+            <a:ext cx="3014133" cy="292608"/>
+          </a:xfrm>
+          <a:prstGeom prst="rect">
+            <a:avLst/>
+          </a:prstGeom>
+          <a:noFill/>
+        </p:spPr>
+        <p:txBody>
+          <a:bodyPr wrap="square" lIns="0" tIns="0" rIns="0" bIns="0" anchor="t">
+            <a:noAutofit/>
+          </a:bodyPr>
+          <a:lstStyle/>
+          <a:p>
+            <a:pPr algn="l">
+              <a:lnSpc>
+                <a:spcPct val="120000"/>
+              </a:lnSpc>
+            </a:pPr>
+            <a:r>
+              <a:rPr sz="1600" b="0" i="0">
+                <a:solidFill>
+                  <a:srgbClr val="2B2118"/>
+                </a:solidFill>
+                <a:latin typeface="Arial"/>
+                <a:ea typeface="Malgun Gothic"/>
+                <a:cs typeface="Arial"/>
+              </a:rPr>
+              <a:t>Reviewers</a:t>
+            </a:r>
+          </a:p>
+        </p:txBody>
+      </p:sp>
+      <p:sp>
+        <p:nvSpPr>
+          <p:cNvPr id="9" name="TextBox 8"/>
+          <p:cNvSpPr txBox="1"/>
+          <p:nvPr/>
+        </p:nvSpPr>
+        <p:spPr>
+          <a:xfrm>
+            <a:off x="4588933" y="1969008"/>
+            <a:ext cx="3014133" cy="475488"/>
+          </a:xfrm>
+          <a:prstGeom prst="rect">
+            <a:avLst/>
+          </a:prstGeom>
+          <a:noFill/>
+        </p:spPr>
+        <p:txBody>
+          <a:bodyPr wrap="square" lIns="0" tIns="0" rIns="0" bIns="0" anchor="t">
+            <a:noAutofit/>
+          </a:bodyPr>
+          <a:lstStyle/>
+          <a:p>
+            <a:pPr algn="l">
+              <a:lnSpc>
+                <a:spcPct val="120000"/>
+              </a:lnSpc>
+            </a:pPr>
+            <a:r>
+              <a:rPr sz="1300" b="0" i="0">
+                <a:solidFill>
+                  <a:srgbClr val="4A3F35"/>
+                </a:solidFill>
+                <a:latin typeface="Arial"/>
+                <a:ea typeface="Malgun Gothic"/>
+                <a:cs typeface="Arial"/>
+              </a:rPr>
+              <a:t>Reviews start from a change that already builds and migrates</a:t>
+            </a:r>
+          </a:p>
+        </p:txBody>
+      </p:sp>
+      <p:sp>
+        <p:nvSpPr>
+          <p:cNvPr id="10" name="Card 3"/>
+          <p:cNvSpPr/>
+          <p:nvPr/>
+        </p:nvSpPr>
+        <p:spPr>
+          <a:xfrm>
+            <a:off x="8009466" y="1422400"/>
+            <a:ext cx="3369733" cy="1199895"/>
+          </a:xfrm>
+          <a:prstGeom prst="roundRect">
+            <a:avLst>
+              <a:gd name="adj" fmla="val 6350"/>
+            </a:avLst>
+          </a:prstGeom>
+          <a:solidFill>
+            <a:srgbClr val="F7F0ED"/>
+          </a:solidFill>
+          <a:ln w="12700">
+            <a:solidFill>
+              <a:srgbClr val="9C4422"/>
+            </a:solidFill>
+          </a:ln>
+        </p:spPr>
+        <p:txBody>
+          <a:bodyPr rtlCol="0" anchor="ctr" wrap="square" lIns="76200" tIns="76200" rIns="76200" bIns="76200"/>
+          <a:lstStyle/>
+          <a:p>
+            <a:pPr algn="ctr"/>
+          </a:p>
+        </p:txBody>
+      </p:sp>
+      <p:sp>
+        <p:nvSpPr>
+          <p:cNvPr id="11" name="TextBox 10"/>
+          <p:cNvSpPr txBox="1"/>
+          <p:nvPr/>
+        </p:nvSpPr>
+        <p:spPr>
+          <a:xfrm>
+            <a:off x="8187266" y="1600200"/>
+            <a:ext cx="3014133" cy="292608"/>
+          </a:xfrm>
+          <a:prstGeom prst="rect">
+            <a:avLst/>
+          </a:prstGeom>
+          <a:noFill/>
+        </p:spPr>
+        <p:txBody>
+          <a:bodyPr wrap="square" lIns="0" tIns="0" rIns="0" bIns="0" anchor="t">
+            <a:noAutofit/>
+          </a:bodyPr>
+          <a:lstStyle/>
+          <a:p>
+            <a:pPr algn="l">
+              <a:lnSpc>
+                <a:spcPct val="120000"/>
+              </a:lnSpc>
+            </a:pPr>
+            <a:r>
+              <a:rPr sz="1600" b="0" i="0">
+                <a:solidFill>
+                  <a:srgbClr val="2B2118"/>
+                </a:solidFill>
+                <a:latin typeface="Arial"/>
+                <a:ea typeface="Malgun Gothic"/>
+                <a:cs typeface="Arial"/>
+              </a:rPr>
+              <a:t>Release managers</a:t>
+            </a:r>
+          </a:p>
+        </p:txBody>
+      </p:sp>
+      <p:sp>
+        <p:nvSpPr>
+          <p:cNvPr id="12" name="TextBox 11"/>
+          <p:cNvSpPr txBox="1"/>
+          <p:nvPr/>
+        </p:nvSpPr>
+        <p:spPr>
+          <a:xfrm>
+            <a:off x="8187266" y="1969008"/>
+            <a:ext cx="3014133" cy="475488"/>
+          </a:xfrm>
+          <a:prstGeom prst="rect">
+            <a:avLst/>
+          </a:prstGeom>
+          <a:noFill/>
+        </p:spPr>
+        <p:txBody>
+          <a:bodyPr wrap="square" lIns="0" tIns="0" rIns="0" bIns="0" anchor="t">
+            <a:noAutofit/>
+          </a:bodyPr>
+          <a:lstStyle/>
+          <a:p>
+            <a:pPr algn="l">
+              <a:lnSpc>
+                <a:spcPct val="120000"/>
+              </a:lnSpc>
+            </a:pPr>
+            <a:r>
+              <a:rPr sz="1300" b="0" i="0">
+                <a:solidFill>
+                  <a:srgbClr val="4A3F35"/>
+                </a:solidFill>
+                <a:latin typeface="Arial"/>
+                <a:ea typeface="Malgun Gothic"/>
+                <a:cs typeface="Arial"/>
+              </a:rPr>
+              <a:t>Release week stops being the first time the checks run together</a:t>
+            </a:r>
+          </a:p>
+        </p:txBody>
+      </p:sp>
+      <p:sp>
+        <p:nvSpPr>
+          <p:cNvPr id="13" name="Footer"/>
+          <p:cNvSpPr txBox="1"/>
+          <p:nvPr/>
+        </p:nvSpPr>
+        <p:spPr>
+          <a:xfrm>
+            <a:off x="812800" y="6426200"/>
+            <a:ext cx="6604000" cy="190500"/>
+          </a:xfrm>
+          <a:prstGeom prst="rect">
+            <a:avLst/>
+          </a:prstGeom>
+          <a:noFill/>
+        </p:spPr>
+        <p:txBody>
+          <a:bodyPr wrap="square" lIns="0" tIns="0" rIns="0" bIns="0" anchor="t">
+            <a:noAutofit/>
+          </a:bodyPr>
+          <a:lstStyle/>
+          <a:p>
+            <a:pPr algn="l">
+              <a:lnSpc>
+                <a:spcPct val="120000"/>
+              </a:lnSpc>
+            </a:pPr>
+            <a:r>
+              <a:rPr sz="1000" b="0" i="0">
+                <a:solidFill>
                   <a:srgbClr val="6B5E52"/>
                 </a:solidFill>
                 <a:latin typeface="Arial"/>
                 <a:ea typeface="Malgun Gothic"/>
                 <a:cs typeface="Arial"/>
               </a:rPr>
-              <a:t>Team lead · illustrative quote for the sample deck</a:t>
+              <a:t>Example Corp — internal</a:t>
+            </a:r>
+          </a:p>
+        </p:txBody>
+      </p:sp>
+      <p:sp>
+        <p:nvSpPr>
+          <p:cNvPr id="14" name="Page number"/>
+          <p:cNvSpPr txBox="1"/>
+          <p:nvPr/>
+        </p:nvSpPr>
+        <p:spPr>
+          <a:xfrm>
+            <a:off x="10617200" y="6426200"/>
+            <a:ext cx="762000" cy="190500"/>
+          </a:xfrm>
+          <a:prstGeom prst="rect">
+            <a:avLst/>
+          </a:prstGeom>
+          <a:noFill/>
+        </p:spPr>
+        <p:txBody>
+          <a:bodyPr wrap="square" lIns="0" tIns="0" rIns="0" bIns="0" anchor="t">
+            <a:noAutofit/>
+          </a:bodyPr>
+          <a:lstStyle/>
+          <a:p>
+            <a:pPr algn="r">
+              <a:lnSpc>
+                <a:spcPct val="120000"/>
+              </a:lnSpc>
+            </a:pPr>
+            <a:r>
+              <a:rPr sz="1000" b="0" i="0">
+                <a:solidFill>
+                  <a:srgbClr val="6B5E52"/>
+                </a:solidFill>
+                <a:latin typeface="Consolas"/>
+                <a:ea typeface="Malgun Gothic"/>
+                <a:cs typeface="Consolas"/>
+              </a:rPr>
+              <a:t>16</a:t>
             </a:r>
           </a:p>
         </p:txBody>
@@ -8552,14 +9318,84 @@
       <p:grpSpPr/>
       <p:sp>
         <p:nvSpPr>
-          <p:cNvPr id="2" name="TextBox 1"/>
-          <p:cNvSpPr txBox="1"/>
-          <p:nvPr/>
-        </p:nvSpPr>
-        <p:spPr>
-          <a:xfrm>
-            <a:off x="812800" y="2262123"/>
-            <a:ext cx="9087104" cy="177800"/>
+          <p:cNvPr id="2" name="Rectangle 1"/>
+          <p:cNvSpPr/>
+          <p:nvPr/>
+        </p:nvSpPr>
+        <p:spPr>
+          <a:xfrm>
+            <a:off x="812800" y="2361691"/>
+            <a:ext cx="38100" cy="1626616"/>
+          </a:xfrm>
+          <a:prstGeom prst="rect">
+            <a:avLst/>
+          </a:prstGeom>
+          <a:solidFill>
+            <a:srgbClr val="9C4422"/>
+          </a:solidFill>
+          <a:ln>
+            <a:noFill/>
+          </a:ln>
+        </p:spPr>
+        <p:txBody>
+          <a:bodyPr rtlCol="0" anchor="ctr" wrap="square" lIns="76200" tIns="76200" rIns="76200" bIns="76200"/>
+          <a:lstStyle/>
+          <a:p>
+            <a:pPr algn="ctr"/>
+          </a:p>
+        </p:txBody>
+      </p:sp>
+      <p:sp>
+        <p:nvSpPr>
+          <p:cNvPr id="3" name="Quote"/>
+          <p:cNvSpPr txBox="1"/>
+          <p:nvPr/>
+        </p:nvSpPr>
+        <p:spPr>
+          <a:xfrm>
+            <a:off x="1270000" y="1273962"/>
+            <a:ext cx="8453120" cy="2765145"/>
+          </a:xfrm>
+          <a:prstGeom prst="rect">
+            <a:avLst/>
+          </a:prstGeom>
+          <a:noFill/>
+        </p:spPr>
+        <p:txBody>
+          <a:bodyPr wrap="square" lIns="0" tIns="0" rIns="0" bIns="0" anchor="b">
+            <a:noAutofit/>
+          </a:bodyPr>
+          <a:lstStyle/>
+          <a:p>
+            <a:pPr algn="l">
+              <a:lnSpc>
+                <a:spcPct val="105000"/>
+              </a:lnSpc>
+            </a:pPr>
+            <a:r>
+              <a:rPr sz="3600" b="0" i="0">
+                <a:solidFill>
+                  <a:srgbClr val="2B2118"/>
+                </a:solidFill>
+                <a:latin typeface="Georgia"/>
+                <a:ea typeface="Malgun Gothic"/>
+                <a:cs typeface="Georgia"/>
+              </a:rPr>
+              <a:t>“We stopped dreading release week once failures arrived one change at a time.”</a:t>
+            </a:r>
+          </a:p>
+        </p:txBody>
+      </p:sp>
+      <p:sp>
+        <p:nvSpPr>
+          <p:cNvPr id="4" name="TextBox 3"/>
+          <p:cNvSpPr txBox="1"/>
+          <p:nvPr/>
+        </p:nvSpPr>
+        <p:spPr>
+          <a:xfrm>
+            <a:off x="1270000" y="4267708"/>
+            <a:ext cx="8453120" cy="264160"/>
           </a:xfrm>
           <a:prstGeom prst="rect">
             <a:avLst/>
@@ -8578,119 +9414,15 @@
               </a:lnSpc>
             </a:pPr>
             <a:r>
-              <a:rPr sz="1000" b="0" i="0">
-                <a:solidFill>
-                  <a:srgbClr val="9C4422"/>
-                </a:solidFill>
-                <a:latin typeface="Consolas"/>
-                <a:ea typeface="Malgun Gothic"/>
-                <a:cs typeface="Consolas"/>
-              </a:rPr>
-              <a:t>The ask</a:t>
-            </a:r>
-          </a:p>
-        </p:txBody>
-      </p:sp>
-      <p:sp>
-        <p:nvSpPr>
-          <p:cNvPr id="3" name="Statement"/>
-          <p:cNvSpPr txBox="1"/>
-          <p:nvPr/>
-        </p:nvSpPr>
-        <p:spPr>
-          <a:xfrm>
-            <a:off x="812800" y="2592323"/>
-            <a:ext cx="9087104" cy="1152144"/>
-          </a:xfrm>
-          <a:prstGeom prst="rect">
-            <a:avLst/>
-          </a:prstGeom>
-          <a:noFill/>
-        </p:spPr>
-        <p:txBody>
-          <a:bodyPr wrap="square" lIns="0" tIns="0" rIns="0" bIns="0" anchor="t">
-            <a:noAutofit/>
-          </a:bodyPr>
-          <a:lstStyle/>
-          <a:p>
-            <a:pPr algn="l">
-              <a:lnSpc>
-                <a:spcPct val="105000"/>
-              </a:lnSpc>
-            </a:pPr>
-            <a:r>
-              <a:rPr sz="3600" b="0" i="0">
-                <a:solidFill>
-                  <a:srgbClr val="2B2118"/>
-                </a:solidFill>
-                <a:latin typeface="Georgia"/>
-                <a:ea typeface="Malgun Gothic"/>
-                <a:cs typeface="Georgia"/>
-              </a:rPr>
-              <a:t>Approve a </a:t>
-            </a:r>
-            <a:r>
-              <a:rPr sz="3600" b="1" i="0">
-                <a:solidFill>
-                  <a:srgbClr val="9C4422"/>
-                </a:solidFill>
-                <a:latin typeface="Georgia"/>
-                <a:ea typeface="Malgun Gothic"/>
-                <a:cs typeface="Georgia"/>
-              </a:rPr>
-              <a:t>four-week pilot</a:t>
-            </a:r>
-            <a:r>
-              <a:rPr sz="3600" b="0" i="0">
-                <a:solidFill>
-                  <a:srgbClr val="2B2118"/>
-                </a:solidFill>
-                <a:latin typeface="Georgia"/>
-                <a:ea typeface="Malgun Gothic"/>
-                <a:cs typeface="Georgia"/>
-              </a:rPr>
-              <a:t> with two teams.</a:t>
-            </a:r>
-          </a:p>
-        </p:txBody>
-      </p:sp>
-      <p:sp>
-        <p:nvSpPr>
-          <p:cNvPr id="4" name="TextBox 3"/>
-          <p:cNvSpPr txBox="1"/>
-          <p:nvPr/>
-        </p:nvSpPr>
-        <p:spPr>
-          <a:xfrm>
-            <a:off x="812800" y="3973067"/>
-            <a:ext cx="9087104" cy="292608"/>
-          </a:xfrm>
-          <a:prstGeom prst="rect">
-            <a:avLst/>
-          </a:prstGeom>
-          <a:noFill/>
-        </p:spPr>
-        <p:txBody>
-          <a:bodyPr wrap="square" lIns="0" tIns="0" rIns="0" bIns="0" anchor="t">
-            <a:noAutofit/>
-          </a:bodyPr>
-          <a:lstStyle/>
-          <a:p>
-            <a:pPr algn="l">
-              <a:lnSpc>
-                <a:spcPct val="120000"/>
-              </a:lnSpc>
-            </a:pPr>
-            <a:r>
-              <a:rPr sz="1600" b="0" i="0">
-                <a:solidFill>
-                  <a:srgbClr val="4A3F35"/>
+              <a:rPr sz="1300" b="0" i="0">
+                <a:solidFill>
+                  <a:srgbClr val="6B5E52"/>
                 </a:solidFill>
                 <a:latin typeface="Arial"/>
                 <a:ea typeface="Malgun Gothic"/>
                 <a:cs typeface="Arial"/>
               </a:rPr>
-              <a:t>We return with the three measures and a go / no-go recommendation.</a:t>
+              <a:t>Team lead · illustrative quote for the sample deck</a:t>
             </a:r>
           </a:p>
         </p:txBody>
@@ -8704,6 +9436,177 @@
 </file>
 
 <file path=ppt/slides/slide18.xml><?xml version="1.0" encoding="utf-8"?>
+<p:sld xmlns:a="http://schemas.openxmlformats.org/drawingml/2006/main" xmlns:p="http://schemas.openxmlformats.org/presentationml/2006/main" xmlns:r="http://schemas.openxmlformats.org/officeDocument/2006/relationships">
+  <p:cSld>
+    <p:bg>
+      <p:bgPr>
+        <a:solidFill>
+          <a:srgbClr val="FFFCF7"/>
+        </a:solidFill>
+        <a:effectLst/>
+      </p:bgPr>
+    </p:bg>
+    <p:spTree>
+      <p:nvGrpSpPr>
+        <p:cNvPr id="1" name=""/>
+        <p:cNvGrpSpPr/>
+        <p:nvPr/>
+      </p:nvGrpSpPr>
+      <p:grpSpPr/>
+      <p:sp>
+        <p:nvSpPr>
+          <p:cNvPr id="2" name="TextBox 1"/>
+          <p:cNvSpPr txBox="1"/>
+          <p:nvPr/>
+        </p:nvSpPr>
+        <p:spPr>
+          <a:xfrm>
+            <a:off x="812800" y="2262123"/>
+            <a:ext cx="9087104" cy="177800"/>
+          </a:xfrm>
+          <a:prstGeom prst="rect">
+            <a:avLst/>
+          </a:prstGeom>
+          <a:noFill/>
+        </p:spPr>
+        <p:txBody>
+          <a:bodyPr wrap="square" lIns="0" tIns="0" rIns="0" bIns="0" anchor="t">
+            <a:noAutofit/>
+          </a:bodyPr>
+          <a:lstStyle/>
+          <a:p>
+            <a:pPr algn="l">
+              <a:lnSpc>
+                <a:spcPct val="120000"/>
+              </a:lnSpc>
+            </a:pPr>
+            <a:r>
+              <a:rPr sz="1000" b="0" i="0">
+                <a:solidFill>
+                  <a:srgbClr val="9C4422"/>
+                </a:solidFill>
+                <a:latin typeface="Consolas"/>
+                <a:ea typeface="Malgun Gothic"/>
+                <a:cs typeface="Consolas"/>
+              </a:rPr>
+              <a:t>The ask</a:t>
+            </a:r>
+          </a:p>
+        </p:txBody>
+      </p:sp>
+      <p:sp>
+        <p:nvSpPr>
+          <p:cNvPr id="3" name="Statement"/>
+          <p:cNvSpPr txBox="1"/>
+          <p:nvPr/>
+        </p:nvSpPr>
+        <p:spPr>
+          <a:xfrm>
+            <a:off x="812800" y="1901037"/>
+            <a:ext cx="9087104" cy="1843430"/>
+          </a:xfrm>
+          <a:prstGeom prst="rect">
+            <a:avLst/>
+          </a:prstGeom>
+          <a:noFill/>
+        </p:spPr>
+        <p:txBody>
+          <a:bodyPr wrap="square" lIns="0" tIns="0" rIns="0" bIns="0" anchor="b">
+            <a:noAutofit/>
+          </a:bodyPr>
+          <a:lstStyle/>
+          <a:p>
+            <a:pPr algn="l">
+              <a:lnSpc>
+                <a:spcPct val="105000"/>
+              </a:lnSpc>
+            </a:pPr>
+            <a:r>
+              <a:rPr sz="3600" b="0" i="0">
+                <a:solidFill>
+                  <a:srgbClr val="2B2118"/>
+                </a:solidFill>
+                <a:latin typeface="Georgia"/>
+                <a:ea typeface="Malgun Gothic"/>
+                <a:cs typeface="Georgia"/>
+              </a:rPr>
+              <a:t>Approve a </a:t>
+            </a:r>
+            <a:r>
+              <a:rPr sz="3600" b="1" i="0">
+                <a:solidFill>
+                  <a:srgbClr val="9C4422"/>
+                </a:solidFill>
+                <a:latin typeface="Georgia"/>
+                <a:ea typeface="Malgun Gothic"/>
+                <a:cs typeface="Georgia"/>
+              </a:rPr>
+              <a:t>four-week pilot</a:t>
+            </a:r>
+            <a:r>
+              <a:rPr sz="3600" b="0" i="0">
+                <a:solidFill>
+                  <a:srgbClr val="2B2118"/>
+                </a:solidFill>
+                <a:latin typeface="Georgia"/>
+                <a:ea typeface="Malgun Gothic"/>
+                <a:cs typeface="Georgia"/>
+              </a:rPr>
+              <a:t> with two teams.</a:t>
+            </a:r>
+          </a:p>
+        </p:txBody>
+      </p:sp>
+      <p:sp>
+        <p:nvSpPr>
+          <p:cNvPr id="4" name="TextBox 3"/>
+          <p:cNvSpPr txBox="1"/>
+          <p:nvPr/>
+        </p:nvSpPr>
+        <p:spPr>
+          <a:xfrm>
+            <a:off x="812800" y="3973067"/>
+            <a:ext cx="7620000" cy="292608"/>
+          </a:xfrm>
+          <a:prstGeom prst="rect">
+            <a:avLst/>
+          </a:prstGeom>
+          <a:noFill/>
+        </p:spPr>
+        <p:txBody>
+          <a:bodyPr wrap="square" lIns="0" tIns="0" rIns="0" bIns="0" anchor="t">
+            <a:noAutofit/>
+          </a:bodyPr>
+          <a:lstStyle/>
+          <a:p>
+            <a:pPr algn="l">
+              <a:lnSpc>
+                <a:spcPct val="120000"/>
+              </a:lnSpc>
+            </a:pPr>
+            <a:r>
+              <a:rPr sz="1600" b="0" i="0">
+                <a:solidFill>
+                  <a:srgbClr val="4A3F35"/>
+                </a:solidFill>
+                <a:latin typeface="Arial"/>
+                <a:ea typeface="Malgun Gothic"/>
+                <a:cs typeface="Arial"/>
+              </a:rPr>
+              <a:t>We return with the three measures and a go / no-go recommendation.</a:t>
+            </a:r>
+          </a:p>
+        </p:txBody>
+      </p:sp>
+    </p:spTree>
+  </p:cSld>
+  <p:clrMapOvr>
+    <a:masterClrMapping/>
+  </p:clrMapOvr>
+</p:sld>
+</file>
+
+<file path=ppt/slides/slide19.xml><?xml version="1.0" encoding="utf-8"?>
 <p:sld xmlns:a="http://schemas.openxmlformats.org/drawingml/2006/main" xmlns:p="http://schemas.openxmlformats.org/presentationml/2006/main" xmlns:r="http://schemas.openxmlformats.org/officeDocument/2006/relationships">
   <p:cSld>
     <p:bg>
@@ -8729,8 +9632,49 @@
         </p:nvSpPr>
         <p:spPr>
           <a:xfrm>
-            <a:off x="812800" y="2441447"/>
-            <a:ext cx="10566400" cy="877823"/>
+            <a:off x="812800" y="1914753"/>
+            <a:ext cx="10566400" cy="1404518"/>
+          </a:xfrm>
+          <a:prstGeom prst="rect">
+            <a:avLst/>
+          </a:prstGeom>
+          <a:noFill/>
+        </p:spPr>
+        <p:txBody>
+          <a:bodyPr wrap="square" lIns="0" tIns="0" rIns="0" bIns="0" anchor="b">
+            <a:noAutofit/>
+          </a:bodyPr>
+          <a:lstStyle/>
+          <a:p>
+            <a:pPr algn="l">
+              <a:lnSpc>
+                <a:spcPct val="120000"/>
+              </a:lnSpc>
+            </a:pPr>
+            <a:r>
+              <a:rPr sz="4800" b="0" i="0">
+                <a:solidFill>
+                  <a:srgbClr val="FFFFFF"/>
+                </a:solidFill>
+                <a:latin typeface="Georgia"/>
+                <a:ea typeface="Malgun Gothic"/>
+                <a:cs typeface="Georgia"/>
+              </a:rPr>
+              <a:t>Thank you</a:t>
+            </a:r>
+          </a:p>
+        </p:txBody>
+      </p:sp>
+      <p:sp>
+        <p:nvSpPr>
+          <p:cNvPr id="3" name="TextBox 2"/>
+          <p:cNvSpPr txBox="1"/>
+          <p:nvPr/>
+        </p:nvSpPr>
+        <p:spPr>
+          <a:xfrm>
+            <a:off x="812800" y="3547871"/>
+            <a:ext cx="7620000" cy="292608"/>
           </a:xfrm>
           <a:prstGeom prst="rect">
             <a:avLst/>
@@ -8749,47 +9693,6 @@
               </a:lnSpc>
             </a:pPr>
             <a:r>
-              <a:rPr sz="4800" b="0" i="0">
-                <a:solidFill>
-                  <a:srgbClr val="FFFFFF"/>
-                </a:solidFill>
-                <a:latin typeface="Georgia"/>
-                <a:ea typeface="Malgun Gothic"/>
-                <a:cs typeface="Georgia"/>
-              </a:rPr>
-              <a:t>Thank you</a:t>
-            </a:r>
-          </a:p>
-        </p:txBody>
-      </p:sp>
-      <p:sp>
-        <p:nvSpPr>
-          <p:cNvPr id="3" name="TextBox 2"/>
-          <p:cNvSpPr txBox="1"/>
-          <p:nvPr/>
-        </p:nvSpPr>
-        <p:spPr>
-          <a:xfrm>
-            <a:off x="812800" y="3547871"/>
-            <a:ext cx="10566400" cy="292608"/>
-          </a:xfrm>
-          <a:prstGeom prst="rect">
-            <a:avLst/>
-          </a:prstGeom>
-          <a:noFill/>
-        </p:spPr>
-        <p:txBody>
-          <a:bodyPr wrap="square" lIns="0" tIns="0" rIns="0" bIns="0" anchor="t">
-            <a:noAutofit/>
-          </a:bodyPr>
-          <a:lstStyle/>
-          <a:p>
-            <a:pPr algn="l">
-              <a:lnSpc>
-                <a:spcPct val="120000"/>
-              </a:lnSpc>
-            </a:pPr>
-            <a:r>
               <a:rPr sz="1600" b="0" i="0">
                 <a:solidFill>
                   <a:srgbClr val="E3DBD1"/>
@@ -8812,7 +9715,7 @@
         <p:spPr>
           <a:xfrm>
             <a:off x="812800" y="3954779"/>
-            <a:ext cx="10566400" cy="237744"/>
+            <a:ext cx="6191250" cy="237744"/>
           </a:xfrm>
           <a:prstGeom prst="rect">
             <a:avLst/>
@@ -9371,14 +10274,14 @@
       <p:grpSpPr/>
       <p:sp>
         <p:nvSpPr>
-          <p:cNvPr id="2" name="Number"/>
-          <p:cNvSpPr txBox="1"/>
-          <p:nvPr/>
-        </p:nvSpPr>
-        <p:spPr>
-          <a:xfrm>
-            <a:off x="812800" y="2139188"/>
-            <a:ext cx="8453120" cy="609600"/>
+          <p:cNvPr id="2" name="Eyebrow"/>
+          <p:cNvSpPr txBox="1"/>
+          <p:nvPr/>
+        </p:nvSpPr>
+        <p:spPr>
+          <a:xfrm>
+            <a:off x="812800" y="431800"/>
+            <a:ext cx="10566400" cy="177800"/>
           </a:xfrm>
           <a:prstGeom prst="rect">
             <a:avLst/>
@@ -9397,7 +10300,7 @@
               </a:lnSpc>
             </a:pPr>
             <a:r>
-              <a:rPr sz="3200" b="0" i="0">
+              <a:rPr sz="1000" b="0" i="0">
                 <a:solidFill>
                   <a:srgbClr val="9C4422"/>
                 </a:solidFill>
@@ -9405,6 +10308,208 @@
                 <a:ea typeface="Malgun Gothic"/>
                 <a:cs typeface="Consolas"/>
               </a:rPr>
+              <a:t>Executive summary</a:t>
+            </a:r>
+          </a:p>
+        </p:txBody>
+      </p:sp>
+      <p:sp>
+        <p:nvSpPr>
+          <p:cNvPr id="3" name="Title"/>
+          <p:cNvSpPr txBox="1"/>
+          <p:nvPr/>
+        </p:nvSpPr>
+        <p:spPr>
+          <a:xfrm>
+            <a:off x="812800" y="635000"/>
+            <a:ext cx="10566400" cy="431800"/>
+          </a:xfrm>
+          <a:prstGeom prst="rect">
+            <a:avLst/>
+          </a:prstGeom>
+          <a:noFill/>
+        </p:spPr>
+        <p:txBody>
+          <a:bodyPr wrap="square" lIns="0" tIns="0" rIns="0" bIns="0" anchor="t">
+            <a:noAutofit/>
+          </a:bodyPr>
+          <a:lstStyle/>
+          <a:p>
+            <a:pPr algn="l">
+              <a:lnSpc>
+                <a:spcPct val="105000"/>
+              </a:lnSpc>
+            </a:pPr>
+            <a:r>
+              <a:rPr sz="2600" b="0" i="0">
+                <a:solidFill>
+                  <a:srgbClr val="2B2118"/>
+                </a:solidFill>
+                <a:latin typeface="Georgia"/>
+                <a:ea typeface="Malgun Gothic"/>
+                <a:cs typeface="Georgia"/>
+              </a:rPr>
+              <a:t>Checking every pull request finds blockers while they are cheap</a:t>
+            </a:r>
+          </a:p>
+        </p:txBody>
+      </p:sp>
+      <p:sp>
+        <p:nvSpPr>
+          <p:cNvPr id="4" name="So what"/>
+          <p:cNvSpPr/>
+          <p:nvPr/>
+        </p:nvSpPr>
+        <p:spPr>
+          <a:xfrm>
+            <a:off x="812800" y="5320792"/>
+            <a:ext cx="10566400" cy="597408"/>
+          </a:xfrm>
+          <a:prstGeom prst="rect">
+            <a:avLst/>
+          </a:prstGeom>
+          <a:solidFill>
+            <a:srgbClr val="F5EEE4"/>
+          </a:solidFill>
+          <a:ln>
+            <a:noFill/>
+          </a:ln>
+        </p:spPr>
+        <p:txBody>
+          <a:bodyPr rtlCol="0" anchor="ctr" wrap="square" lIns="76200" tIns="76200" rIns="76200" bIns="76200"/>
+          <a:lstStyle/>
+          <a:p>
+            <a:pPr algn="ctr"/>
+          </a:p>
+        </p:txBody>
+      </p:sp>
+      <p:sp>
+        <p:nvSpPr>
+          <p:cNvPr id="5" name="So what rule"/>
+          <p:cNvSpPr/>
+          <p:nvPr/>
+        </p:nvSpPr>
+        <p:spPr>
+          <a:xfrm>
+            <a:off x="812800" y="5320792"/>
+            <a:ext cx="25400" cy="597408"/>
+          </a:xfrm>
+          <a:prstGeom prst="rect">
+            <a:avLst/>
+          </a:prstGeom>
+          <a:solidFill>
+            <a:srgbClr val="9C4422"/>
+          </a:solidFill>
+          <a:ln>
+            <a:noFill/>
+          </a:ln>
+        </p:spPr>
+        <p:txBody>
+          <a:bodyPr rtlCol="0" anchor="ctr" wrap="square" lIns="76200" tIns="76200" rIns="76200" bIns="76200"/>
+          <a:lstStyle/>
+          <a:p>
+            <a:pPr algn="ctr"/>
+          </a:p>
+        </p:txBody>
+      </p:sp>
+      <p:sp>
+        <p:nvSpPr>
+          <p:cNvPr id="6" name="So what text"/>
+          <p:cNvSpPr txBox="1"/>
+          <p:nvPr/>
+        </p:nvSpPr>
+        <p:spPr>
+          <a:xfrm>
+            <a:off x="990600" y="5473192"/>
+            <a:ext cx="7620000" cy="292608"/>
+          </a:xfrm>
+          <a:prstGeom prst="rect">
+            <a:avLst/>
+          </a:prstGeom>
+          <a:noFill/>
+        </p:spPr>
+        <p:txBody>
+          <a:bodyPr wrap="square" lIns="0" tIns="0" rIns="0" bIns="0" anchor="t">
+            <a:noAutofit/>
+          </a:bodyPr>
+          <a:lstStyle/>
+          <a:p>
+            <a:pPr algn="l">
+              <a:lnSpc>
+                <a:spcPct val="120000"/>
+              </a:lnSpc>
+            </a:pPr>
+            <a:r>
+              <a:rPr sz="1600" b="0" i="0">
+                <a:solidFill>
+                  <a:srgbClr val="2B2118"/>
+                </a:solidFill>
+                <a:latin typeface="Arial"/>
+                <a:ea typeface="Malgun Gothic"/>
+                <a:cs typeface="Arial"/>
+              </a:rPr>
+              <a:t>Approve a four-week pilot with two teams</a:t>
+            </a:r>
+          </a:p>
+        </p:txBody>
+      </p:sp>
+      <p:cxnSp>
+        <p:nvCxnSpPr>
+          <p:cNvPr id="7" name="Connector 6"/>
+          <p:cNvCxnSpPr/>
+          <p:nvPr/>
+        </p:nvCxnSpPr>
+        <p:spPr>
+          <a:xfrm>
+            <a:off x="812800" y="1422400"/>
+            <a:ext cx="3369733" cy="0"/>
+          </a:xfrm>
+          <a:prstGeom prst="line">
+            <a:avLst/>
+          </a:prstGeom>
+          <a:ln w="9525">
+            <a:solidFill>
+              <a:srgbClr val="E3DBD1"/>
+            </a:solidFill>
+          </a:ln>
+        </p:spPr>
+      </p:cxnSp>
+      <p:sp>
+        <p:nvSpPr>
+          <p:cNvPr id="8" name="Summary 01"/>
+          <p:cNvSpPr txBox="1"/>
+          <p:nvPr/>
+        </p:nvSpPr>
+        <p:spPr>
+          <a:xfrm>
+            <a:off x="812800" y="1549400"/>
+            <a:ext cx="3369733" cy="190500"/>
+          </a:xfrm>
+          <a:prstGeom prst="rect">
+            <a:avLst/>
+          </a:prstGeom>
+          <a:noFill/>
+        </p:spPr>
+        <p:txBody>
+          <a:bodyPr wrap="square" lIns="0" tIns="0" rIns="0" bIns="0" anchor="t">
+            <a:noAutofit/>
+          </a:bodyPr>
+          <a:lstStyle/>
+          <a:p>
+            <a:pPr algn="l">
+              <a:lnSpc>
+                <a:spcPct val="120000"/>
+              </a:lnSpc>
+            </a:pPr>
+            <a:r>
+              <a:rPr sz="1000" b="0" i="0">
+                <a:solidFill>
+                  <a:srgbClr val="9C4422"/>
+                </a:solidFill>
+                <a:latin typeface="Consolas"/>
+                <a:ea typeface="Malgun Gothic"/>
+                <a:cs typeface="Consolas"/>
+              </a:rPr>
               <a:t>01</a:t>
             </a:r>
           </a:p>
@@ -9412,14 +10517,14 @@
       </p:sp>
       <p:sp>
         <p:nvSpPr>
-          <p:cNvPr id="3" name="Title"/>
-          <p:cNvSpPr txBox="1"/>
-          <p:nvPr/>
-        </p:nvSpPr>
-        <p:spPr>
-          <a:xfrm>
-            <a:off x="812800" y="2830068"/>
-            <a:ext cx="8453120" cy="512064"/>
+          <p:cNvPr id="9" name="TextBox 8"/>
+          <p:cNvSpPr txBox="1"/>
+          <p:nvPr/>
+        </p:nvSpPr>
+        <p:spPr>
+          <a:xfrm>
+            <a:off x="812800" y="1790700"/>
+            <a:ext cx="3369733" cy="292608"/>
           </a:xfrm>
           <a:prstGeom prst="rect">
             <a:avLst/>
@@ -9434,19 +10539,517 @@
           <a:p>
             <a:pPr algn="l">
               <a:lnSpc>
-                <a:spcPct val="105000"/>
-              </a:lnSpc>
-            </a:pPr>
-            <a:r>
-              <a:rPr sz="3200" b="0" i="0">
+                <a:spcPct val="120000"/>
+              </a:lnSpc>
+            </a:pPr>
+            <a:r>
+              <a:rPr sz="1600" b="0" i="0">
                 <a:solidFill>
                   <a:srgbClr val="2B2118"/>
                 </a:solidFill>
-                <a:latin typeface="Georgia"/>
-                <a:ea typeface="Malgun Gothic"/>
-                <a:cs typeface="Georgia"/>
+                <a:latin typeface="Arial"/>
+                <a:ea typeface="Malgun Gothic"/>
+                <a:cs typeface="Arial"/>
               </a:rPr>
               <a:t>Where blockers are found today</a:t>
+            </a:r>
+          </a:p>
+        </p:txBody>
+      </p:sp>
+      <p:sp>
+        <p:nvSpPr>
+          <p:cNvPr id="10" name="Bullets"/>
+          <p:cNvSpPr txBox="1"/>
+          <p:nvPr/>
+        </p:nvSpPr>
+        <p:spPr>
+          <a:xfrm>
+            <a:off x="812800" y="2159508"/>
+            <a:ext cx="3369733" cy="1050036"/>
+          </a:xfrm>
+          <a:prstGeom prst="rect">
+            <a:avLst/>
+          </a:prstGeom>
+          <a:noFill/>
+        </p:spPr>
+        <p:txBody>
+          <a:bodyPr wrap="square" lIns="0" tIns="0" rIns="0" bIns="0">
+            <a:noAutofit/>
+          </a:bodyPr>
+          <a:lstStyle/>
+          <a:p>
+            <a:pPr algn="l" marL="181610" indent="-181610">
+              <a:lnSpc>
+                <a:spcPct val="120000"/>
+              </a:lnSpc>
+              <a:buClr>
+                <a:srgbClr val="9C4422"/>
+              </a:buClr>
+              <a:buChar char="•"/>
+            </a:pPr>
+            <a:r>
+              <a:rPr sz="1300" b="0" i="0">
+                <a:solidFill>
+                  <a:srgbClr val="4A3F35"/>
+                </a:solidFill>
+                <a:latin typeface="Arial"/>
+                <a:ea typeface="Malgun Gothic"/>
+                <a:cs typeface="Arial"/>
+              </a:rPr>
+              <a:t>Most blockers surface only after the branch is cut</a:t>
+            </a:r>
+          </a:p>
+          <a:p>
+            <a:pPr algn="l" marL="181610" indent="-181610">
+              <a:lnSpc>
+                <a:spcPct val="120000"/>
+              </a:lnSpc>
+              <a:spcBef>
+                <a:spcPts val="780"/>
+              </a:spcBef>
+              <a:buClr>
+                <a:srgbClr val="9C4422"/>
+              </a:buClr>
+              <a:buChar char="•"/>
+            </a:pPr>
+            <a:r>
+              <a:rPr sz="1300" b="0" i="0">
+                <a:solidFill>
+                  <a:srgbClr val="4A3F35"/>
+                </a:solidFill>
+                <a:latin typeface="Arial"/>
+                <a:ea typeface="Malgun Gothic"/>
+                <a:cs typeface="Arial"/>
+              </a:rPr>
+              <a:t>A blocker found on the release branch takes about 10x longer to fix</a:t>
+            </a:r>
+          </a:p>
+        </p:txBody>
+      </p:sp>
+      <p:cxnSp>
+        <p:nvCxnSpPr>
+          <p:cNvPr id="11" name="Connector 10"/>
+          <p:cNvCxnSpPr/>
+          <p:nvPr/>
+        </p:nvCxnSpPr>
+        <p:spPr>
+          <a:xfrm>
+            <a:off x="4411133" y="1422400"/>
+            <a:ext cx="3369733" cy="0"/>
+          </a:xfrm>
+          <a:prstGeom prst="line">
+            <a:avLst/>
+          </a:prstGeom>
+          <a:ln w="9525">
+            <a:solidFill>
+              <a:srgbClr val="E3DBD1"/>
+            </a:solidFill>
+          </a:ln>
+        </p:spPr>
+      </p:cxnSp>
+      <p:sp>
+        <p:nvSpPr>
+          <p:cNvPr id="12" name="Summary 02"/>
+          <p:cNvSpPr txBox="1"/>
+          <p:nvPr/>
+        </p:nvSpPr>
+        <p:spPr>
+          <a:xfrm>
+            <a:off x="4411133" y="1549400"/>
+            <a:ext cx="3369733" cy="190500"/>
+          </a:xfrm>
+          <a:prstGeom prst="rect">
+            <a:avLst/>
+          </a:prstGeom>
+          <a:noFill/>
+        </p:spPr>
+        <p:txBody>
+          <a:bodyPr wrap="square" lIns="0" tIns="0" rIns="0" bIns="0" anchor="t">
+            <a:noAutofit/>
+          </a:bodyPr>
+          <a:lstStyle/>
+          <a:p>
+            <a:pPr algn="l">
+              <a:lnSpc>
+                <a:spcPct val="120000"/>
+              </a:lnSpc>
+            </a:pPr>
+            <a:r>
+              <a:rPr sz="1000" b="0" i="0">
+                <a:solidFill>
+                  <a:srgbClr val="9C4422"/>
+                </a:solidFill>
+                <a:latin typeface="Consolas"/>
+                <a:ea typeface="Malgun Gothic"/>
+                <a:cs typeface="Consolas"/>
+              </a:rPr>
+              <a:t>02</a:t>
+            </a:r>
+          </a:p>
+        </p:txBody>
+      </p:sp>
+      <p:sp>
+        <p:nvSpPr>
+          <p:cNvPr id="13" name="TextBox 12"/>
+          <p:cNvSpPr txBox="1"/>
+          <p:nvPr/>
+        </p:nvSpPr>
+        <p:spPr>
+          <a:xfrm>
+            <a:off x="4411133" y="1790700"/>
+            <a:ext cx="3369733" cy="292608"/>
+          </a:xfrm>
+          <a:prstGeom prst="rect">
+            <a:avLst/>
+          </a:prstGeom>
+          <a:noFill/>
+        </p:spPr>
+        <p:txBody>
+          <a:bodyPr wrap="square" lIns="0" tIns="0" rIns="0" bIns="0" anchor="t">
+            <a:noAutofit/>
+          </a:bodyPr>
+          <a:lstStyle/>
+          <a:p>
+            <a:pPr algn="l">
+              <a:lnSpc>
+                <a:spcPct val="120000"/>
+              </a:lnSpc>
+            </a:pPr>
+            <a:r>
+              <a:rPr sz="1600" b="0" i="0">
+                <a:solidFill>
+                  <a:srgbClr val="2B2118"/>
+                </a:solidFill>
+                <a:latin typeface="Arial"/>
+                <a:ea typeface="Malgun Gothic"/>
+                <a:cs typeface="Arial"/>
+              </a:rPr>
+              <a:t>What changes per pull request</a:t>
+            </a:r>
+          </a:p>
+        </p:txBody>
+      </p:sp>
+      <p:sp>
+        <p:nvSpPr>
+          <p:cNvPr id="14" name="Bullets"/>
+          <p:cNvSpPr txBox="1"/>
+          <p:nvPr/>
+        </p:nvSpPr>
+        <p:spPr>
+          <a:xfrm>
+            <a:off x="4411133" y="2159508"/>
+            <a:ext cx="3369733" cy="1050036"/>
+          </a:xfrm>
+          <a:prstGeom prst="rect">
+            <a:avLst/>
+          </a:prstGeom>
+          <a:noFill/>
+        </p:spPr>
+        <p:txBody>
+          <a:bodyPr wrap="square" lIns="0" tIns="0" rIns="0" bIns="0">
+            <a:noAutofit/>
+          </a:bodyPr>
+          <a:lstStyle/>
+          <a:p>
+            <a:pPr algn="l" marL="181610" indent="-181610">
+              <a:lnSpc>
+                <a:spcPct val="120000"/>
+              </a:lnSpc>
+              <a:buClr>
+                <a:srgbClr val="9C4422"/>
+              </a:buClr>
+              <a:buChar char="•"/>
+            </a:pPr>
+            <a:r>
+              <a:rPr sz="1300" b="0" i="0">
+                <a:solidFill>
+                  <a:srgbClr val="4A3F35"/>
+                </a:solidFill>
+                <a:latin typeface="Arial"/>
+                <a:ea typeface="Malgun Gothic"/>
+                <a:cs typeface="Arial"/>
+              </a:rPr>
+              <a:t>The same checks run earlier, on one change at a time</a:t>
+            </a:r>
+          </a:p>
+          <a:p>
+            <a:pPr algn="l" marL="181610" indent="-181610">
+              <a:lnSpc>
+                <a:spcPct val="120000"/>
+              </a:lnSpc>
+              <a:spcBef>
+                <a:spcPts val="780"/>
+              </a:spcBef>
+              <a:buClr>
+                <a:srgbClr val="9C4422"/>
+              </a:buClr>
+              <a:buChar char="•"/>
+            </a:pPr>
+            <a:r>
+              <a:rPr sz="1300" b="0" i="0">
+                <a:solidFill>
+                  <a:srgbClr val="4A3F35"/>
+                </a:solidFill>
+                <a:latin typeface="Arial"/>
+                <a:ea typeface="Malgun Gothic"/>
+                <a:cs typeface="Arial"/>
+              </a:rPr>
+              <a:t>Checks run in an isolated runner and never touch production</a:t>
+            </a:r>
+          </a:p>
+        </p:txBody>
+      </p:sp>
+      <p:cxnSp>
+        <p:nvCxnSpPr>
+          <p:cNvPr id="15" name="Connector 14"/>
+          <p:cNvCxnSpPr/>
+          <p:nvPr/>
+        </p:nvCxnSpPr>
+        <p:spPr>
+          <a:xfrm>
+            <a:off x="8009466" y="1422400"/>
+            <a:ext cx="3369734" cy="0"/>
+          </a:xfrm>
+          <a:prstGeom prst="line">
+            <a:avLst/>
+          </a:prstGeom>
+          <a:ln w="9525">
+            <a:solidFill>
+              <a:srgbClr val="E3DBD1"/>
+            </a:solidFill>
+          </a:ln>
+        </p:spPr>
+      </p:cxnSp>
+      <p:sp>
+        <p:nvSpPr>
+          <p:cNvPr id="16" name="Summary 03"/>
+          <p:cNvSpPr txBox="1"/>
+          <p:nvPr/>
+        </p:nvSpPr>
+        <p:spPr>
+          <a:xfrm>
+            <a:off x="8009466" y="1549400"/>
+            <a:ext cx="3369733" cy="190500"/>
+          </a:xfrm>
+          <a:prstGeom prst="rect">
+            <a:avLst/>
+          </a:prstGeom>
+          <a:noFill/>
+        </p:spPr>
+        <p:txBody>
+          <a:bodyPr wrap="square" lIns="0" tIns="0" rIns="0" bIns="0" anchor="t">
+            <a:noAutofit/>
+          </a:bodyPr>
+          <a:lstStyle/>
+          <a:p>
+            <a:pPr algn="l">
+              <a:lnSpc>
+                <a:spcPct val="120000"/>
+              </a:lnSpc>
+            </a:pPr>
+            <a:r>
+              <a:rPr sz="1000" b="0" i="0">
+                <a:solidFill>
+                  <a:srgbClr val="9C4422"/>
+                </a:solidFill>
+                <a:latin typeface="Consolas"/>
+                <a:ea typeface="Malgun Gothic"/>
+                <a:cs typeface="Consolas"/>
+              </a:rPr>
+              <a:t>03</a:t>
+            </a:r>
+          </a:p>
+        </p:txBody>
+      </p:sp>
+      <p:sp>
+        <p:nvSpPr>
+          <p:cNvPr id="17" name="TextBox 16"/>
+          <p:cNvSpPr txBox="1"/>
+          <p:nvPr/>
+        </p:nvSpPr>
+        <p:spPr>
+          <a:xfrm>
+            <a:off x="8009466" y="1790700"/>
+            <a:ext cx="3369733" cy="292608"/>
+          </a:xfrm>
+          <a:prstGeom prst="rect">
+            <a:avLst/>
+          </a:prstGeom>
+          <a:noFill/>
+        </p:spPr>
+        <p:txBody>
+          <a:bodyPr wrap="square" lIns="0" tIns="0" rIns="0" bIns="0" anchor="t">
+            <a:noAutofit/>
+          </a:bodyPr>
+          <a:lstStyle/>
+          <a:p>
+            <a:pPr algn="l">
+              <a:lnSpc>
+                <a:spcPct val="120000"/>
+              </a:lnSpc>
+            </a:pPr>
+            <a:r>
+              <a:rPr sz="1600" b="0" i="0">
+                <a:solidFill>
+                  <a:srgbClr val="2B2118"/>
+                </a:solidFill>
+                <a:latin typeface="Arial"/>
+                <a:ea typeface="Malgun Gothic"/>
+                <a:cs typeface="Arial"/>
+              </a:rPr>
+              <a:t>What the pilot costs</a:t>
+            </a:r>
+          </a:p>
+        </p:txBody>
+      </p:sp>
+      <p:sp>
+        <p:nvSpPr>
+          <p:cNvPr id="18" name="Bullets"/>
+          <p:cNvSpPr txBox="1"/>
+          <p:nvPr/>
+        </p:nvSpPr>
+        <p:spPr>
+          <a:xfrm>
+            <a:off x="8009466" y="2159508"/>
+            <a:ext cx="3369733" cy="1050036"/>
+          </a:xfrm>
+          <a:prstGeom prst="rect">
+            <a:avLst/>
+          </a:prstGeom>
+          <a:noFill/>
+        </p:spPr>
+        <p:txBody>
+          <a:bodyPr wrap="square" lIns="0" tIns="0" rIns="0" bIns="0">
+            <a:noAutofit/>
+          </a:bodyPr>
+          <a:lstStyle/>
+          <a:p>
+            <a:pPr algn="l" marL="181610" indent="-181610">
+              <a:lnSpc>
+                <a:spcPct val="120000"/>
+              </a:lnSpc>
+              <a:buClr>
+                <a:srgbClr val="9C4422"/>
+              </a:buClr>
+              <a:buChar char="•"/>
+            </a:pPr>
+            <a:r>
+              <a:rPr sz="1300" b="0" i="0">
+                <a:solidFill>
+                  <a:srgbClr val="4A3F35"/>
+                </a:solidFill>
+                <a:latin typeface="Arial"/>
+                <a:ea typeface="Malgun Gothic"/>
+                <a:cs typeface="Arial"/>
+              </a:rPr>
+              <a:t>One shared runner pool and two weeks of setup</a:t>
+            </a:r>
+          </a:p>
+          <a:p>
+            <a:pPr algn="l" marL="181610" indent="-181610">
+              <a:lnSpc>
+                <a:spcPct val="120000"/>
+              </a:lnSpc>
+              <a:spcBef>
+                <a:spcPts val="780"/>
+              </a:spcBef>
+              <a:buClr>
+                <a:srgbClr val="9C4422"/>
+              </a:buClr>
+              <a:buChar char="•"/>
+            </a:pPr>
+            <a:r>
+              <a:rPr sz="1300" b="0" i="0">
+                <a:solidFill>
+                  <a:srgbClr val="4A3F35"/>
+                </a:solidFill>
+                <a:latin typeface="Arial"/>
+                <a:ea typeface="Malgun Gothic"/>
+                <a:cs typeface="Arial"/>
+              </a:rPr>
+              <a:t>A go / no-go decision after four weeks, on measures agreed now</a:t>
+            </a:r>
+          </a:p>
+        </p:txBody>
+      </p:sp>
+      <p:sp>
+        <p:nvSpPr>
+          <p:cNvPr id="19" name="Footer"/>
+          <p:cNvSpPr txBox="1"/>
+          <p:nvPr/>
+        </p:nvSpPr>
+        <p:spPr>
+          <a:xfrm>
+            <a:off x="812800" y="6426200"/>
+            <a:ext cx="6604000" cy="190500"/>
+          </a:xfrm>
+          <a:prstGeom prst="rect">
+            <a:avLst/>
+          </a:prstGeom>
+          <a:noFill/>
+        </p:spPr>
+        <p:txBody>
+          <a:bodyPr wrap="square" lIns="0" tIns="0" rIns="0" bIns="0" anchor="t">
+            <a:noAutofit/>
+          </a:bodyPr>
+          <a:lstStyle/>
+          <a:p>
+            <a:pPr algn="l">
+              <a:lnSpc>
+                <a:spcPct val="120000"/>
+              </a:lnSpc>
+            </a:pPr>
+            <a:r>
+              <a:rPr sz="1000" b="0" i="0">
+                <a:solidFill>
+                  <a:srgbClr val="6B5E52"/>
+                </a:solidFill>
+                <a:latin typeface="Arial"/>
+                <a:ea typeface="Malgun Gothic"/>
+                <a:cs typeface="Arial"/>
+              </a:rPr>
+              <a:t>Example Corp — internal</a:t>
+            </a:r>
+          </a:p>
+        </p:txBody>
+      </p:sp>
+      <p:sp>
+        <p:nvSpPr>
+          <p:cNvPr id="20" name="Page number"/>
+          <p:cNvSpPr txBox="1"/>
+          <p:nvPr/>
+        </p:nvSpPr>
+        <p:spPr>
+          <a:xfrm>
+            <a:off x="10617200" y="6426200"/>
+            <a:ext cx="762000" cy="190500"/>
+          </a:xfrm>
+          <a:prstGeom prst="rect">
+            <a:avLst/>
+          </a:prstGeom>
+          <a:noFill/>
+        </p:spPr>
+        <p:txBody>
+          <a:bodyPr wrap="square" lIns="0" tIns="0" rIns="0" bIns="0" anchor="t">
+            <a:noAutofit/>
+          </a:bodyPr>
+          <a:lstStyle/>
+          <a:p>
+            <a:pPr algn="r">
+              <a:lnSpc>
+                <a:spcPct val="120000"/>
+              </a:lnSpc>
+            </a:pPr>
+            <a:r>
+              <a:rPr sz="1000" b="0" i="0">
+                <a:solidFill>
+                  <a:srgbClr val="6B5E52"/>
+                </a:solidFill>
+                <a:latin typeface="Consolas"/>
+                <a:ea typeface="Malgun Gothic"/>
+                <a:cs typeface="Consolas"/>
+              </a:rPr>
+              <a:t>3</a:t>
             </a:r>
           </a:p>
         </p:txBody>
@@ -9479,14 +11082,14 @@
       <p:grpSpPr/>
       <p:sp>
         <p:nvSpPr>
-          <p:cNvPr id="2" name="Eyebrow"/>
-          <p:cNvSpPr txBox="1"/>
-          <p:nvPr/>
-        </p:nvSpPr>
-        <p:spPr>
-          <a:xfrm>
-            <a:off x="812800" y="431800"/>
-            <a:ext cx="10566400" cy="177800"/>
+          <p:cNvPr id="2" name="Number"/>
+          <p:cNvSpPr txBox="1"/>
+          <p:nvPr/>
+        </p:nvSpPr>
+        <p:spPr>
+          <a:xfrm>
+            <a:off x="812800" y="2139188"/>
+            <a:ext cx="8453120" cy="609600"/>
           </a:xfrm>
           <a:prstGeom prst="rect">
             <a:avLst/>
@@ -9505,7 +11108,7 @@
               </a:lnSpc>
             </a:pPr>
             <a:r>
-              <a:rPr sz="1000" b="0" i="0">
+              <a:rPr sz="3200" b="0" i="0">
                 <a:solidFill>
                   <a:srgbClr val="9C4422"/>
                 </a:solidFill>
@@ -9513,7 +11116,7 @@
                 <a:ea typeface="Malgun Gothic"/>
                 <a:cs typeface="Consolas"/>
               </a:rPr>
-              <a:t>Current state</a:t>
+              <a:t>01</a:t>
             </a:r>
           </a:p>
         </p:txBody>
@@ -9526,16 +11129,16 @@
         </p:nvSpPr>
         <p:spPr>
           <a:xfrm>
-            <a:off x="812800" y="635000"/>
-            <a:ext cx="10566400" cy="431800"/>
-          </a:xfrm>
-          <a:prstGeom prst="rect">
-            <a:avLst/>
-          </a:prstGeom>
-          <a:noFill/>
-        </p:spPr>
-        <p:txBody>
-          <a:bodyPr wrap="square" lIns="0" tIns="0" rIns="0" bIns="0" anchor="t">
+            <a:off x="812800" y="2522829"/>
+            <a:ext cx="8453120" cy="819302"/>
+          </a:xfrm>
+          <a:prstGeom prst="rect">
+            <a:avLst/>
+          </a:prstGeom>
+          <a:noFill/>
+        </p:spPr>
+        <p:txBody>
+          <a:bodyPr wrap="square" lIns="0" tIns="0" rIns="0" bIns="0" anchor="b">
             <a:noAutofit/>
           </a:bodyPr>
           <a:lstStyle/>
@@ -9546,7 +11149,7 @@
               </a:lnSpc>
             </a:pPr>
             <a:r>
-              <a:rPr sz="2600" b="0" i="0">
+              <a:rPr sz="3200" b="0" i="0">
                 <a:solidFill>
                   <a:srgbClr val="2B2118"/>
                 </a:solidFill>
@@ -9554,562 +11157,7 @@
                 <a:ea typeface="Malgun Gothic"/>
                 <a:cs typeface="Georgia"/>
               </a:rPr>
-              <a:t>Most blockers surface only after the branch is cut</a:t>
-            </a:r>
-          </a:p>
-        </p:txBody>
-      </p:sp>
-      <p:sp>
-        <p:nvSpPr>
-          <p:cNvPr id="4" name="Source"/>
-          <p:cNvSpPr txBox="1"/>
-          <p:nvPr/>
-        </p:nvSpPr>
-        <p:spPr>
-          <a:xfrm>
-            <a:off x="812800" y="5708650"/>
-            <a:ext cx="10566400" cy="209550"/>
-          </a:xfrm>
-          <a:prstGeom prst="rect">
-            <a:avLst/>
-          </a:prstGeom>
-          <a:noFill/>
-        </p:spPr>
-        <p:txBody>
-          <a:bodyPr wrap="square" lIns="0" tIns="0" rIns="0" bIns="0" anchor="b">
-            <a:noAutofit/>
-          </a:bodyPr>
-          <a:lstStyle/>
-          <a:p>
-            <a:pPr algn="l">
-              <a:lnSpc>
-                <a:spcPct val="120000"/>
-              </a:lnSpc>
-            </a:pPr>
-            <a:r>
-              <a:rPr sz="1100" b="0" i="0">
-                <a:solidFill>
-                  <a:srgbClr val="6B5E52"/>
-                </a:solidFill>
-                <a:latin typeface="Arial"/>
-                <a:ea typeface="Malgun Gothic"/>
-                <a:cs typeface="Arial"/>
-              </a:rPr>
-              <a:t>Source: Illustrative data, sample deck</a:t>
-            </a:r>
-          </a:p>
-        </p:txBody>
-      </p:sp>
-      <p:sp>
-        <p:nvSpPr>
-          <p:cNvPr id="5" name="Stat 1"/>
-          <p:cNvSpPr txBox="1"/>
-          <p:nvPr/>
-        </p:nvSpPr>
-        <p:spPr>
-          <a:xfrm>
-            <a:off x="812800" y="1422400"/>
-            <a:ext cx="3369733" cy="594360"/>
-          </a:xfrm>
-          <a:prstGeom prst="rect">
-            <a:avLst/>
-          </a:prstGeom>
-          <a:noFill/>
-        </p:spPr>
-        <p:txBody>
-          <a:bodyPr wrap="square" lIns="0" tIns="0" rIns="0" bIns="0" anchor="t">
-            <a:noAutofit/>
-          </a:bodyPr>
-          <a:lstStyle/>
-          <a:p>
-            <a:pPr algn="l">
-              <a:lnSpc>
-                <a:spcPct val="120000"/>
-              </a:lnSpc>
-            </a:pPr>
-            <a:r>
-              <a:rPr sz="3600" b="0" i="0">
-                <a:solidFill>
-                  <a:srgbClr val="9C4422"/>
-                </a:solidFill>
-                <a:latin typeface="Georgia"/>
-                <a:ea typeface="Malgun Gothic"/>
-                <a:cs typeface="Georgia"/>
-              </a:rPr>
-              <a:t>71%</a:t>
-            </a:r>
-          </a:p>
-        </p:txBody>
-      </p:sp>
-      <p:cxnSp>
-        <p:nvCxnSpPr>
-          <p:cNvPr id="6" name="Connector 5"/>
-          <p:cNvCxnSpPr/>
-          <p:nvPr/>
-        </p:nvCxnSpPr>
-        <p:spPr>
-          <a:xfrm>
-            <a:off x="812800" y="2067560"/>
-            <a:ext cx="3369733" cy="0"/>
-          </a:xfrm>
-          <a:prstGeom prst="line">
-            <a:avLst/>
-          </a:prstGeom>
-          <a:ln w="9525">
-            <a:solidFill>
-              <a:srgbClr val="E3DBD1"/>
-            </a:solidFill>
-          </a:ln>
-        </p:spPr>
-      </p:cxnSp>
-      <p:sp>
-        <p:nvSpPr>
-          <p:cNvPr id="7" name="TextBox 6"/>
-          <p:cNvSpPr txBox="1"/>
-          <p:nvPr/>
-        </p:nvSpPr>
-        <p:spPr>
-          <a:xfrm>
-            <a:off x="812800" y="2194560"/>
-            <a:ext cx="3369733" cy="292608"/>
-          </a:xfrm>
-          <a:prstGeom prst="rect">
-            <a:avLst/>
-          </a:prstGeom>
-          <a:noFill/>
-        </p:spPr>
-        <p:txBody>
-          <a:bodyPr wrap="square" lIns="0" tIns="0" rIns="0" bIns="0" anchor="t">
-            <a:noAutofit/>
-          </a:bodyPr>
-          <a:lstStyle/>
-          <a:p>
-            <a:pPr algn="l">
-              <a:lnSpc>
-                <a:spcPct val="120000"/>
-              </a:lnSpc>
-            </a:pPr>
-            <a:r>
-              <a:rPr sz="1600" b="0" i="0">
-                <a:solidFill>
-                  <a:srgbClr val="2B2118"/>
-                </a:solidFill>
-                <a:latin typeface="Arial"/>
-                <a:ea typeface="Malgun Gothic"/>
-                <a:cs typeface="Arial"/>
-              </a:rPr>
-              <a:t>found on the release branch</a:t>
-            </a:r>
-          </a:p>
-        </p:txBody>
-      </p:sp>
-      <p:sp>
-        <p:nvSpPr>
-          <p:cNvPr id="8" name="TextBox 7"/>
-          <p:cNvSpPr txBox="1"/>
-          <p:nvPr/>
-        </p:nvSpPr>
-        <p:spPr>
-          <a:xfrm>
-            <a:off x="812800" y="2537968"/>
-            <a:ext cx="3369733" cy="237744"/>
-          </a:xfrm>
-          <a:prstGeom prst="rect">
-            <a:avLst/>
-          </a:prstGeom>
-          <a:noFill/>
-        </p:spPr>
-        <p:txBody>
-          <a:bodyPr wrap="square" lIns="0" tIns="0" rIns="0" bIns="0" anchor="t">
-            <a:noAutofit/>
-          </a:bodyPr>
-          <a:lstStyle/>
-          <a:p>
-            <a:pPr algn="l">
-              <a:lnSpc>
-                <a:spcPct val="120000"/>
-              </a:lnSpc>
-            </a:pPr>
-            <a:r>
-              <a:rPr sz="1300" b="0" i="0">
-                <a:solidFill>
-                  <a:srgbClr val="6B5E52"/>
-                </a:solidFill>
-                <a:latin typeface="Arial"/>
-                <a:ea typeface="Malgun Gothic"/>
-                <a:cs typeface="Arial"/>
-              </a:rPr>
-              <a:t>Illustrative figure for the sample deck</a:t>
-            </a:r>
-          </a:p>
-        </p:txBody>
-      </p:sp>
-      <p:sp>
-        <p:nvSpPr>
-          <p:cNvPr id="9" name="Stat 2"/>
-          <p:cNvSpPr txBox="1"/>
-          <p:nvPr/>
-        </p:nvSpPr>
-        <p:spPr>
-          <a:xfrm>
-            <a:off x="4411133" y="1422400"/>
-            <a:ext cx="3369733" cy="594360"/>
-          </a:xfrm>
-          <a:prstGeom prst="rect">
-            <a:avLst/>
-          </a:prstGeom>
-          <a:noFill/>
-        </p:spPr>
-        <p:txBody>
-          <a:bodyPr wrap="square" lIns="0" tIns="0" rIns="0" bIns="0" anchor="t">
-            <a:noAutofit/>
-          </a:bodyPr>
-          <a:lstStyle/>
-          <a:p>
-            <a:pPr algn="l">
-              <a:lnSpc>
-                <a:spcPct val="120000"/>
-              </a:lnSpc>
-            </a:pPr>
-            <a:r>
-              <a:rPr sz="3600" b="0" i="0">
-                <a:solidFill>
-                  <a:srgbClr val="2B2118"/>
-                </a:solidFill>
-                <a:latin typeface="Georgia"/>
-                <a:ea typeface="Malgun Gothic"/>
-                <a:cs typeface="Georgia"/>
-              </a:rPr>
-              <a:t>2.4 days</a:t>
-            </a:r>
-          </a:p>
-        </p:txBody>
-      </p:sp>
-      <p:cxnSp>
-        <p:nvCxnSpPr>
-          <p:cNvPr id="10" name="Connector 9"/>
-          <p:cNvCxnSpPr/>
-          <p:nvPr/>
-        </p:nvCxnSpPr>
-        <p:spPr>
-          <a:xfrm>
-            <a:off x="4411133" y="2067560"/>
-            <a:ext cx="3369733" cy="0"/>
-          </a:xfrm>
-          <a:prstGeom prst="line">
-            <a:avLst/>
-          </a:prstGeom>
-          <a:ln w="9525">
-            <a:solidFill>
-              <a:srgbClr val="E3DBD1"/>
-            </a:solidFill>
-          </a:ln>
-        </p:spPr>
-      </p:cxnSp>
-      <p:sp>
-        <p:nvSpPr>
-          <p:cNvPr id="11" name="TextBox 10"/>
-          <p:cNvSpPr txBox="1"/>
-          <p:nvPr/>
-        </p:nvSpPr>
-        <p:spPr>
-          <a:xfrm>
-            <a:off x="4411133" y="2194560"/>
-            <a:ext cx="3369733" cy="292608"/>
-          </a:xfrm>
-          <a:prstGeom prst="rect">
-            <a:avLst/>
-          </a:prstGeom>
-          <a:noFill/>
-        </p:spPr>
-        <p:txBody>
-          <a:bodyPr wrap="square" lIns="0" tIns="0" rIns="0" bIns="0" anchor="t">
-            <a:noAutofit/>
-          </a:bodyPr>
-          <a:lstStyle/>
-          <a:p>
-            <a:pPr algn="l">
-              <a:lnSpc>
-                <a:spcPct val="120000"/>
-              </a:lnSpc>
-            </a:pPr>
-            <a:r>
-              <a:rPr sz="1600" b="0" i="0">
-                <a:solidFill>
-                  <a:srgbClr val="2B2118"/>
-                </a:solidFill>
-                <a:latin typeface="Arial"/>
-                <a:ea typeface="Malgun Gothic"/>
-                <a:cs typeface="Arial"/>
-              </a:rPr>
-              <a:t>median delay per blocker</a:t>
-            </a:r>
-          </a:p>
-        </p:txBody>
-      </p:sp>
-      <p:sp>
-        <p:nvSpPr>
-          <p:cNvPr id="12" name="TextBox 11"/>
-          <p:cNvSpPr txBox="1"/>
-          <p:nvPr/>
-        </p:nvSpPr>
-        <p:spPr>
-          <a:xfrm>
-            <a:off x="4411133" y="2537968"/>
-            <a:ext cx="3369733" cy="237744"/>
-          </a:xfrm>
-          <a:prstGeom prst="rect">
-            <a:avLst/>
-          </a:prstGeom>
-          <a:noFill/>
-        </p:spPr>
-        <p:txBody>
-          <a:bodyPr wrap="square" lIns="0" tIns="0" rIns="0" bIns="0" anchor="t">
-            <a:noAutofit/>
-          </a:bodyPr>
-          <a:lstStyle/>
-          <a:p>
-            <a:pPr algn="l">
-              <a:lnSpc>
-                <a:spcPct val="120000"/>
-              </a:lnSpc>
-            </a:pPr>
-            <a:r>
-              <a:rPr sz="1300" b="0" i="0">
-                <a:solidFill>
-                  <a:srgbClr val="6B5E52"/>
-                </a:solidFill>
-                <a:latin typeface="Arial"/>
-                <a:ea typeface="Malgun Gothic"/>
-                <a:cs typeface="Arial"/>
-              </a:rPr>
-              <a:t>From detection to merged fix</a:t>
-            </a:r>
-          </a:p>
-        </p:txBody>
-      </p:sp>
-      <p:sp>
-        <p:nvSpPr>
-          <p:cNvPr id="13" name="Stat 3"/>
-          <p:cNvSpPr txBox="1"/>
-          <p:nvPr/>
-        </p:nvSpPr>
-        <p:spPr>
-          <a:xfrm>
-            <a:off x="8009466" y="1422400"/>
-            <a:ext cx="3369733" cy="594360"/>
-          </a:xfrm>
-          <a:prstGeom prst="rect">
-            <a:avLst/>
-          </a:prstGeom>
-          <a:noFill/>
-        </p:spPr>
-        <p:txBody>
-          <a:bodyPr wrap="square" lIns="0" tIns="0" rIns="0" bIns="0" anchor="t">
-            <a:noAutofit/>
-          </a:bodyPr>
-          <a:lstStyle/>
-          <a:p>
-            <a:pPr algn="l">
-              <a:lnSpc>
-                <a:spcPct val="120000"/>
-              </a:lnSpc>
-            </a:pPr>
-            <a:r>
-              <a:rPr sz="3600" b="0" i="0">
-                <a:solidFill>
-                  <a:srgbClr val="2B2118"/>
-                </a:solidFill>
-                <a:latin typeface="Georgia"/>
-                <a:ea typeface="Malgun Gothic"/>
-                <a:cs typeface="Georgia"/>
-              </a:rPr>
-              <a:t>3 of 4</a:t>
-            </a:r>
-          </a:p>
-        </p:txBody>
-      </p:sp>
-      <p:cxnSp>
-        <p:nvCxnSpPr>
-          <p:cNvPr id="14" name="Connector 13"/>
-          <p:cNvCxnSpPr/>
-          <p:nvPr/>
-        </p:nvCxnSpPr>
-        <p:spPr>
-          <a:xfrm>
-            <a:off x="8009466" y="2067560"/>
-            <a:ext cx="3369734" cy="0"/>
-          </a:xfrm>
-          <a:prstGeom prst="line">
-            <a:avLst/>
-          </a:prstGeom>
-          <a:ln w="9525">
-            <a:solidFill>
-              <a:srgbClr val="E3DBD1"/>
-            </a:solidFill>
-          </a:ln>
-        </p:spPr>
-      </p:cxnSp>
-      <p:sp>
-        <p:nvSpPr>
-          <p:cNvPr id="15" name="TextBox 14"/>
-          <p:cNvSpPr txBox="1"/>
-          <p:nvPr/>
-        </p:nvSpPr>
-        <p:spPr>
-          <a:xfrm>
-            <a:off x="8009466" y="2194560"/>
-            <a:ext cx="3369733" cy="292608"/>
-          </a:xfrm>
-          <a:prstGeom prst="rect">
-            <a:avLst/>
-          </a:prstGeom>
-          <a:noFill/>
-        </p:spPr>
-        <p:txBody>
-          <a:bodyPr wrap="square" lIns="0" tIns="0" rIns="0" bIns="0" anchor="t">
-            <a:noAutofit/>
-          </a:bodyPr>
-          <a:lstStyle/>
-          <a:p>
-            <a:pPr algn="l">
-              <a:lnSpc>
-                <a:spcPct val="120000"/>
-              </a:lnSpc>
-            </a:pPr>
-            <a:r>
-              <a:rPr sz="1600" b="0" i="0">
-                <a:solidFill>
-                  <a:srgbClr val="2B2118"/>
-                </a:solidFill>
-                <a:latin typeface="Arial"/>
-                <a:ea typeface="Malgun Gothic"/>
-                <a:cs typeface="Arial"/>
-              </a:rPr>
-              <a:t>blockers trace to one change</a:t>
-            </a:r>
-          </a:p>
-        </p:txBody>
-      </p:sp>
-      <p:sp>
-        <p:nvSpPr>
-          <p:cNvPr id="16" name="TextBox 15"/>
-          <p:cNvSpPr txBox="1"/>
-          <p:nvPr/>
-        </p:nvSpPr>
-        <p:spPr>
-          <a:xfrm>
-            <a:off x="8009466" y="2537968"/>
-            <a:ext cx="3369733" cy="237744"/>
-          </a:xfrm>
-          <a:prstGeom prst="rect">
-            <a:avLst/>
-          </a:prstGeom>
-          <a:noFill/>
-        </p:spPr>
-        <p:txBody>
-          <a:bodyPr wrap="square" lIns="0" tIns="0" rIns="0" bIns="0" anchor="t">
-            <a:noAutofit/>
-          </a:bodyPr>
-          <a:lstStyle/>
-          <a:p>
-            <a:pPr algn="l">
-              <a:lnSpc>
-                <a:spcPct val="120000"/>
-              </a:lnSpc>
-            </a:pPr>
-            <a:r>
-              <a:rPr sz="1300" b="0" i="0">
-                <a:solidFill>
-                  <a:srgbClr val="6B5E52"/>
-                </a:solidFill>
-                <a:latin typeface="Arial"/>
-                <a:ea typeface="Malgun Gothic"/>
-                <a:cs typeface="Arial"/>
-              </a:rPr>
-              <a:t>The rest combine two or more changes</a:t>
-            </a:r>
-          </a:p>
-        </p:txBody>
-      </p:sp>
-      <p:sp>
-        <p:nvSpPr>
-          <p:cNvPr id="17" name="Footer"/>
-          <p:cNvSpPr txBox="1"/>
-          <p:nvPr/>
-        </p:nvSpPr>
-        <p:spPr>
-          <a:xfrm>
-            <a:off x="812800" y="6426200"/>
-            <a:ext cx="6604000" cy="190500"/>
-          </a:xfrm>
-          <a:prstGeom prst="rect">
-            <a:avLst/>
-          </a:prstGeom>
-          <a:noFill/>
-        </p:spPr>
-        <p:txBody>
-          <a:bodyPr wrap="square" lIns="0" tIns="0" rIns="0" bIns="0" anchor="t">
-            <a:noAutofit/>
-          </a:bodyPr>
-          <a:lstStyle/>
-          <a:p>
-            <a:pPr algn="l">
-              <a:lnSpc>
-                <a:spcPct val="120000"/>
-              </a:lnSpc>
-            </a:pPr>
-            <a:r>
-              <a:rPr sz="1000" b="0" i="0">
-                <a:solidFill>
-                  <a:srgbClr val="6B5E52"/>
-                </a:solidFill>
-                <a:latin typeface="Arial"/>
-                <a:ea typeface="Malgun Gothic"/>
-                <a:cs typeface="Arial"/>
-              </a:rPr>
-              <a:t>Example Corp — internal</a:t>
-            </a:r>
-          </a:p>
-        </p:txBody>
-      </p:sp>
-      <p:sp>
-        <p:nvSpPr>
-          <p:cNvPr id="18" name="Page number"/>
-          <p:cNvSpPr txBox="1"/>
-          <p:nvPr/>
-        </p:nvSpPr>
-        <p:spPr>
-          <a:xfrm>
-            <a:off x="10617200" y="6426200"/>
-            <a:ext cx="762000" cy="190500"/>
-          </a:xfrm>
-          <a:prstGeom prst="rect">
-            <a:avLst/>
-          </a:prstGeom>
-          <a:noFill/>
-        </p:spPr>
-        <p:txBody>
-          <a:bodyPr wrap="square" lIns="0" tIns="0" rIns="0" bIns="0" anchor="t">
-            <a:noAutofit/>
-          </a:bodyPr>
-          <a:lstStyle/>
-          <a:p>
-            <a:pPr algn="r">
-              <a:lnSpc>
-                <a:spcPct val="120000"/>
-              </a:lnSpc>
-            </a:pPr>
-            <a:r>
-              <a:rPr sz="1000" b="0" i="0">
-                <a:solidFill>
-                  <a:srgbClr val="6B5E52"/>
-                </a:solidFill>
-                <a:latin typeface="Consolas"/>
-                <a:ea typeface="Malgun Gothic"/>
-                <a:cs typeface="Consolas"/>
-              </a:rPr>
-              <a:t>4</a:t>
+              <a:t>Where blockers are found today</a:t>
             </a:r>
           </a:p>
         </p:txBody>
@@ -10217,7 +11265,7 @@
                 <a:ea typeface="Malgun Gothic"/>
                 <a:cs typeface="Georgia"/>
               </a:rPr>
-              <a:t>The later a blocker is found, the longer the fix takes</a:t>
+              <a:t>Most blockers surface only after the branch is cut</a:t>
             </a:r>
           </a:p>
         </p:txBody>
@@ -10265,43 +11313,364 @@
       </p:sp>
       <p:sp>
         <p:nvSpPr>
-          <p:cNvPr id="5" name="Rectangle 4"/>
-          <p:cNvSpPr/>
+          <p:cNvPr id="5" name="Stat 1"/>
+          <p:cNvSpPr txBox="1"/>
+          <p:nvPr/>
+        </p:nvSpPr>
+        <p:spPr>
+          <a:xfrm>
+            <a:off x="812800" y="1422400"/>
+            <a:ext cx="3369733" cy="594360"/>
+          </a:xfrm>
+          <a:prstGeom prst="rect">
+            <a:avLst/>
+          </a:prstGeom>
+          <a:noFill/>
+        </p:spPr>
+        <p:txBody>
+          <a:bodyPr wrap="square" lIns="0" tIns="0" rIns="0" bIns="0" anchor="t">
+            <a:noAutofit/>
+          </a:bodyPr>
+          <a:lstStyle/>
+          <a:p>
+            <a:pPr algn="l">
+              <a:lnSpc>
+                <a:spcPct val="120000"/>
+              </a:lnSpc>
+            </a:pPr>
+            <a:r>
+              <a:rPr sz="3600" b="0" i="0">
+                <a:solidFill>
+                  <a:srgbClr val="9C4422"/>
+                </a:solidFill>
+                <a:latin typeface="Georgia"/>
+                <a:ea typeface="Malgun Gothic"/>
+                <a:cs typeface="Georgia"/>
+              </a:rPr>
+              <a:t>71%</a:t>
+            </a:r>
+          </a:p>
+        </p:txBody>
+      </p:sp>
+      <p:cxnSp>
+        <p:nvCxnSpPr>
+          <p:cNvPr id="6" name="Connector 5"/>
+          <p:cNvCxnSpPr/>
+          <p:nvPr/>
+        </p:nvCxnSpPr>
+        <p:spPr>
+          <a:xfrm>
+            <a:off x="812800" y="2067560"/>
+            <a:ext cx="3369733" cy="0"/>
+          </a:xfrm>
+          <a:prstGeom prst="line">
+            <a:avLst/>
+          </a:prstGeom>
+          <a:ln w="9525">
+            <a:solidFill>
+              <a:srgbClr val="E3DBD1"/>
+            </a:solidFill>
+          </a:ln>
+        </p:spPr>
+      </p:cxnSp>
+      <p:sp>
+        <p:nvSpPr>
+          <p:cNvPr id="7" name="TextBox 6"/>
+          <p:cNvSpPr txBox="1"/>
+          <p:nvPr/>
+        </p:nvSpPr>
+        <p:spPr>
+          <a:xfrm>
+            <a:off x="812800" y="2194560"/>
+            <a:ext cx="3369733" cy="292608"/>
+          </a:xfrm>
+          <a:prstGeom prst="rect">
+            <a:avLst/>
+          </a:prstGeom>
+          <a:noFill/>
+        </p:spPr>
+        <p:txBody>
+          <a:bodyPr wrap="square" lIns="0" tIns="0" rIns="0" bIns="0" anchor="t">
+            <a:noAutofit/>
+          </a:bodyPr>
+          <a:lstStyle/>
+          <a:p>
+            <a:pPr algn="l">
+              <a:lnSpc>
+                <a:spcPct val="120000"/>
+              </a:lnSpc>
+            </a:pPr>
+            <a:r>
+              <a:rPr sz="1600" b="0" i="0">
+                <a:solidFill>
+                  <a:srgbClr val="2B2118"/>
+                </a:solidFill>
+                <a:latin typeface="Arial"/>
+                <a:ea typeface="Malgun Gothic"/>
+                <a:cs typeface="Arial"/>
+              </a:rPr>
+              <a:t>found on the release branch</a:t>
+            </a:r>
+          </a:p>
+        </p:txBody>
+      </p:sp>
+      <p:sp>
+        <p:nvSpPr>
+          <p:cNvPr id="8" name="TextBox 7"/>
+          <p:cNvSpPr txBox="1"/>
+          <p:nvPr/>
+        </p:nvSpPr>
+        <p:spPr>
+          <a:xfrm>
+            <a:off x="812800" y="2537968"/>
+            <a:ext cx="3369733" cy="237744"/>
+          </a:xfrm>
+          <a:prstGeom prst="rect">
+            <a:avLst/>
+          </a:prstGeom>
+          <a:noFill/>
+        </p:spPr>
+        <p:txBody>
+          <a:bodyPr wrap="square" lIns="0" tIns="0" rIns="0" bIns="0" anchor="t">
+            <a:noAutofit/>
+          </a:bodyPr>
+          <a:lstStyle/>
+          <a:p>
+            <a:pPr algn="l">
+              <a:lnSpc>
+                <a:spcPct val="120000"/>
+              </a:lnSpc>
+            </a:pPr>
+            <a:r>
+              <a:rPr sz="1300" b="0" i="0">
+                <a:solidFill>
+                  <a:srgbClr val="6B5E52"/>
+                </a:solidFill>
+                <a:latin typeface="Arial"/>
+                <a:ea typeface="Malgun Gothic"/>
+                <a:cs typeface="Arial"/>
+              </a:rPr>
+              <a:t>Illustrative figure for the sample deck</a:t>
+            </a:r>
+          </a:p>
+        </p:txBody>
+      </p:sp>
+      <p:sp>
+        <p:nvSpPr>
+          <p:cNvPr id="9" name="Stat 2"/>
+          <p:cNvSpPr txBox="1"/>
+          <p:nvPr/>
+        </p:nvSpPr>
+        <p:spPr>
+          <a:xfrm>
+            <a:off x="4411133" y="1422400"/>
+            <a:ext cx="3369733" cy="594360"/>
+          </a:xfrm>
+          <a:prstGeom prst="rect">
+            <a:avLst/>
+          </a:prstGeom>
+          <a:noFill/>
+        </p:spPr>
+        <p:txBody>
+          <a:bodyPr wrap="square" lIns="0" tIns="0" rIns="0" bIns="0" anchor="t">
+            <a:noAutofit/>
+          </a:bodyPr>
+          <a:lstStyle/>
+          <a:p>
+            <a:pPr algn="l">
+              <a:lnSpc>
+                <a:spcPct val="120000"/>
+              </a:lnSpc>
+            </a:pPr>
+            <a:r>
+              <a:rPr sz="3600" b="0" i="0">
+                <a:solidFill>
+                  <a:srgbClr val="2B2118"/>
+                </a:solidFill>
+                <a:latin typeface="Georgia"/>
+                <a:ea typeface="Malgun Gothic"/>
+                <a:cs typeface="Georgia"/>
+              </a:rPr>
+              <a:t>2.4 days</a:t>
+            </a:r>
+          </a:p>
+        </p:txBody>
+      </p:sp>
+      <p:cxnSp>
+        <p:nvCxnSpPr>
+          <p:cNvPr id="10" name="Connector 9"/>
+          <p:cNvCxnSpPr/>
+          <p:nvPr/>
+        </p:nvCxnSpPr>
+        <p:spPr>
+          <a:xfrm>
+            <a:off x="4411133" y="2067560"/>
+            <a:ext cx="3369733" cy="0"/>
+          </a:xfrm>
+          <a:prstGeom prst="line">
+            <a:avLst/>
+          </a:prstGeom>
+          <a:ln w="9525">
+            <a:solidFill>
+              <a:srgbClr val="E3DBD1"/>
+            </a:solidFill>
+          </a:ln>
+        </p:spPr>
+      </p:cxnSp>
+      <p:sp>
+        <p:nvSpPr>
+          <p:cNvPr id="11" name="TextBox 10"/>
+          <p:cNvSpPr txBox="1"/>
+          <p:nvPr/>
+        </p:nvSpPr>
+        <p:spPr>
+          <a:xfrm>
+            <a:off x="4411133" y="2194560"/>
+            <a:ext cx="3369733" cy="292608"/>
+          </a:xfrm>
+          <a:prstGeom prst="rect">
+            <a:avLst/>
+          </a:prstGeom>
+          <a:noFill/>
+        </p:spPr>
+        <p:txBody>
+          <a:bodyPr wrap="square" lIns="0" tIns="0" rIns="0" bIns="0" anchor="t">
+            <a:noAutofit/>
+          </a:bodyPr>
+          <a:lstStyle/>
+          <a:p>
+            <a:pPr algn="l">
+              <a:lnSpc>
+                <a:spcPct val="120000"/>
+              </a:lnSpc>
+            </a:pPr>
+            <a:r>
+              <a:rPr sz="1600" b="0" i="0">
+                <a:solidFill>
+                  <a:srgbClr val="2B2118"/>
+                </a:solidFill>
+                <a:latin typeface="Arial"/>
+                <a:ea typeface="Malgun Gothic"/>
+                <a:cs typeface="Arial"/>
+              </a:rPr>
+              <a:t>median delay per blocker</a:t>
+            </a:r>
+          </a:p>
+        </p:txBody>
+      </p:sp>
+      <p:sp>
+        <p:nvSpPr>
+          <p:cNvPr id="12" name="TextBox 11"/>
+          <p:cNvSpPr txBox="1"/>
+          <p:nvPr/>
+        </p:nvSpPr>
+        <p:spPr>
+          <a:xfrm>
+            <a:off x="4411133" y="2537968"/>
+            <a:ext cx="3369733" cy="237744"/>
+          </a:xfrm>
+          <a:prstGeom prst="rect">
+            <a:avLst/>
+          </a:prstGeom>
+          <a:noFill/>
+        </p:spPr>
+        <p:txBody>
+          <a:bodyPr wrap="square" lIns="0" tIns="0" rIns="0" bIns="0" anchor="t">
+            <a:noAutofit/>
+          </a:bodyPr>
+          <a:lstStyle/>
+          <a:p>
+            <a:pPr algn="l">
+              <a:lnSpc>
+                <a:spcPct val="120000"/>
+              </a:lnSpc>
+            </a:pPr>
+            <a:r>
+              <a:rPr sz="1300" b="0" i="0">
+                <a:solidFill>
+                  <a:srgbClr val="6B5E52"/>
+                </a:solidFill>
+                <a:latin typeface="Arial"/>
+                <a:ea typeface="Malgun Gothic"/>
+                <a:cs typeface="Arial"/>
+              </a:rPr>
+              <a:t>From detection to merged fix</a:t>
+            </a:r>
+          </a:p>
+        </p:txBody>
+      </p:sp>
+      <p:sp>
+        <p:nvSpPr>
+          <p:cNvPr id="13" name="Stat 3"/>
+          <p:cNvSpPr txBox="1"/>
           <p:nvPr/>
         </p:nvSpPr>
         <p:spPr>
           <a:xfrm>
             <a:off x="8009466" y="1422400"/>
-            <a:ext cx="25400" cy="877823"/>
-          </a:xfrm>
-          <a:prstGeom prst="rect">
-            <a:avLst/>
-          </a:prstGeom>
-          <a:solidFill>
-            <a:srgbClr val="9C4422"/>
-          </a:solidFill>
-          <a:ln>
-            <a:noFill/>
+            <a:ext cx="3369733" cy="594360"/>
+          </a:xfrm>
+          <a:prstGeom prst="rect">
+            <a:avLst/>
+          </a:prstGeom>
+          <a:noFill/>
+        </p:spPr>
+        <p:txBody>
+          <a:bodyPr wrap="square" lIns="0" tIns="0" rIns="0" bIns="0" anchor="t">
+            <a:noAutofit/>
+          </a:bodyPr>
+          <a:lstStyle/>
+          <a:p>
+            <a:pPr algn="l">
+              <a:lnSpc>
+                <a:spcPct val="120000"/>
+              </a:lnSpc>
+            </a:pPr>
+            <a:r>
+              <a:rPr sz="3600" b="0" i="0">
+                <a:solidFill>
+                  <a:srgbClr val="2B2118"/>
+                </a:solidFill>
+                <a:latin typeface="Georgia"/>
+                <a:ea typeface="Malgun Gothic"/>
+                <a:cs typeface="Georgia"/>
+              </a:rPr>
+              <a:t>3 of 4</a:t>
+            </a:r>
+          </a:p>
+        </p:txBody>
+      </p:sp>
+      <p:cxnSp>
+        <p:nvCxnSpPr>
+          <p:cNvPr id="14" name="Connector 13"/>
+          <p:cNvCxnSpPr/>
+          <p:nvPr/>
+        </p:nvCxnSpPr>
+        <p:spPr>
+          <a:xfrm>
+            <a:off x="8009466" y="2067560"/>
+            <a:ext cx="3369734" cy="0"/>
+          </a:xfrm>
+          <a:prstGeom prst="line">
+            <a:avLst/>
+          </a:prstGeom>
+          <a:ln w="9525">
+            <a:solidFill>
+              <a:srgbClr val="E3DBD1"/>
+            </a:solidFill>
           </a:ln>
         </p:spPr>
-        <p:txBody>
-          <a:bodyPr rtlCol="0" anchor="ctr" wrap="square" lIns="76200" tIns="76200" rIns="76200" bIns="76200"/>
-          <a:lstStyle/>
-          <a:p>
-            <a:pPr algn="ctr"/>
-          </a:p>
-        </p:txBody>
-      </p:sp>
-      <p:sp>
-        <p:nvSpPr>
-          <p:cNvPr id="6" name="TextBox 5"/>
-          <p:cNvSpPr txBox="1"/>
-          <p:nvPr/>
-        </p:nvSpPr>
-        <p:spPr>
-          <a:xfrm>
-            <a:off x="8161866" y="1422400"/>
-            <a:ext cx="3217333" cy="877823"/>
+      </p:cxnSp>
+      <p:sp>
+        <p:nvSpPr>
+          <p:cNvPr id="15" name="TextBox 14"/>
+          <p:cNvSpPr txBox="1"/>
+          <p:nvPr/>
+        </p:nvSpPr>
+        <p:spPr>
+          <a:xfrm>
+            <a:off x="8009466" y="2194560"/>
+            <a:ext cx="3369733" cy="292608"/>
           </a:xfrm>
           <a:prstGeom prst="rect">
             <a:avLst/>
@@ -10328,95 +11697,55 @@
                 <a:ea typeface="Malgun Gothic"/>
                 <a:cs typeface="Arial"/>
               </a:rPr>
-              <a:t>Fixing on the release branch takes </a:t>
-            </a:r>
-            <a:r>
-              <a:rPr sz="1600" b="1" i="0">
-                <a:solidFill>
-                  <a:srgbClr val="9C4422"/>
+              <a:t>blockers trace to one change</a:t>
+            </a:r>
+          </a:p>
+        </p:txBody>
+      </p:sp>
+      <p:sp>
+        <p:nvSpPr>
+          <p:cNvPr id="16" name="TextBox 15"/>
+          <p:cNvSpPr txBox="1"/>
+          <p:nvPr/>
+        </p:nvSpPr>
+        <p:spPr>
+          <a:xfrm>
+            <a:off x="8009466" y="2537968"/>
+            <a:ext cx="3369733" cy="237744"/>
+          </a:xfrm>
+          <a:prstGeom prst="rect">
+            <a:avLst/>
+          </a:prstGeom>
+          <a:noFill/>
+        </p:spPr>
+        <p:txBody>
+          <a:bodyPr wrap="square" lIns="0" tIns="0" rIns="0" bIns="0" anchor="t">
+            <a:noAutofit/>
+          </a:bodyPr>
+          <a:lstStyle/>
+          <a:p>
+            <a:pPr algn="l">
+              <a:lnSpc>
+                <a:spcPct val="120000"/>
+              </a:lnSpc>
+            </a:pPr>
+            <a:r>
+              <a:rPr sz="1300" b="0" i="0">
+                <a:solidFill>
+                  <a:srgbClr val="6B5E52"/>
                 </a:solidFill>
                 <a:latin typeface="Arial"/>
                 <a:ea typeface="Malgun Gothic"/>
                 <a:cs typeface="Arial"/>
               </a:rPr>
-              <a:t>10x longer</a:t>
-            </a:r>
-            <a:r>
-              <a:rPr sz="1600" b="0" i="0">
-                <a:solidFill>
-                  <a:srgbClr val="2B2118"/>
-                </a:solidFill>
-                <a:latin typeface="Arial"/>
-                <a:ea typeface="Malgun Gothic"/>
-                <a:cs typeface="Arial"/>
-              </a:rPr>
-              <a:t> than fixing in the pull request.</a:t>
-            </a:r>
-          </a:p>
-        </p:txBody>
-      </p:sp>
-      <p:sp>
-        <p:nvSpPr>
-          <p:cNvPr id="7" name="TextBox 6"/>
-          <p:cNvSpPr txBox="1"/>
-          <p:nvPr/>
-        </p:nvSpPr>
-        <p:spPr>
-          <a:xfrm>
-            <a:off x="812800" y="1422400"/>
-            <a:ext cx="6968066" cy="209550"/>
-          </a:xfrm>
-          <a:prstGeom prst="rect">
-            <a:avLst/>
-          </a:prstGeom>
-          <a:noFill/>
-        </p:spPr>
-        <p:txBody>
-          <a:bodyPr wrap="square" lIns="0" tIns="0" rIns="0" bIns="0" anchor="t">
-            <a:noAutofit/>
-          </a:bodyPr>
-          <a:lstStyle/>
-          <a:p>
-            <a:pPr algn="l">
-              <a:lnSpc>
-                <a:spcPct val="120000"/>
-              </a:lnSpc>
-            </a:pPr>
-            <a:r>
-              <a:rPr sz="1100" b="0" i="0">
-                <a:solidFill>
-                  <a:srgbClr val="6B5E52"/>
-                </a:solidFill>
-                <a:latin typeface="Arial"/>
-                <a:ea typeface="Malgun Gothic"/>
-                <a:cs typeface="Arial"/>
-              </a:rPr>
-              <a:t>Median hours to fix</a:t>
-            </a:r>
-          </a:p>
-        </p:txBody>
-      </p:sp>
-      <p:graphicFrame>
-        <p:nvGraphicFramePr>
-          <p:cNvPr id="8" name="Chart"/>
-          <p:cNvGraphicFramePr>
-            <a:graphicFrameLocks noGrp="1"/>
-          </p:cNvGraphicFramePr>
-          <p:nvPr/>
-        </p:nvGraphicFramePr>
-        <p:xfrm>
-          <a:off x="812800" y="1673860"/>
-          <a:ext cx="6968066" cy="3920490"/>
-        </p:xfrm>
-        <a:graphic>
-          <a:graphicData uri="http://schemas.openxmlformats.org/drawingml/2006/chart">
-            <c:chart xmlns:c="http://schemas.openxmlformats.org/drawingml/2006/chart" r:id="rId2"/>
-          </a:graphicData>
-        </a:graphic>
-      </p:graphicFrame>
-      <p:sp>
-        <p:nvSpPr>
-          <p:cNvPr id="9" name="Footer"/>
+              <a:t>The rest combine two or more changes</a:t>
+            </a:r>
+          </a:p>
+        </p:txBody>
+      </p:sp>
+      <p:sp>
+        <p:nvSpPr>
+          <p:cNvPr id="17" name="Footer"/>
           <p:cNvSpPr txBox="1"/>
           <p:nvPr/>
         </p:nvSpPr>
@@ -10457,7 +11786,7 @@
       </p:sp>
       <p:sp>
         <p:nvSpPr>
-          <p:cNvPr id="10" name="Page number"/>
+          <p:cNvPr id="18" name="Page number"/>
           <p:cNvSpPr txBox="1"/>
           <p:nvPr/>
         </p:nvSpPr>
@@ -10524,14 +11853,14 @@
       <p:grpSpPr/>
       <p:sp>
         <p:nvSpPr>
-          <p:cNvPr id="2" name="Number"/>
-          <p:cNvSpPr txBox="1"/>
-          <p:nvPr/>
-        </p:nvSpPr>
-        <p:spPr>
-          <a:xfrm>
-            <a:off x="812800" y="2139188"/>
-            <a:ext cx="8453120" cy="609600"/>
+          <p:cNvPr id="2" name="Eyebrow"/>
+          <p:cNvSpPr txBox="1"/>
+          <p:nvPr/>
+        </p:nvSpPr>
+        <p:spPr>
+          <a:xfrm>
+            <a:off x="812800" y="431800"/>
+            <a:ext cx="10566400" cy="177800"/>
           </a:xfrm>
           <a:prstGeom prst="rect">
             <a:avLst/>
@@ -10550,7 +11879,7 @@
               </a:lnSpc>
             </a:pPr>
             <a:r>
-              <a:rPr sz="3200" b="0" i="0">
+              <a:rPr sz="1000" b="0" i="0">
                 <a:solidFill>
                   <a:srgbClr val="9C4422"/>
                 </a:solidFill>
@@ -10558,7 +11887,7 @@
                 <a:ea typeface="Malgun Gothic"/>
                 <a:cs typeface="Consolas"/>
               </a:rPr>
-              <a:t>02</a:t>
+              <a:t>Current state</a:t>
             </a:r>
           </a:p>
         </p:txBody>
@@ -10571,8 +11900,8 @@
         </p:nvSpPr>
         <p:spPr>
           <a:xfrm>
-            <a:off x="812800" y="2830068"/>
-            <a:ext cx="8453120" cy="512064"/>
+            <a:off x="812800" y="635000"/>
+            <a:ext cx="10566400" cy="431800"/>
           </a:xfrm>
           <a:prstGeom prst="rect">
             <a:avLst/>
@@ -10591,7 +11920,7 @@
               </a:lnSpc>
             </a:pPr>
             <a:r>
-              <a:rPr sz="3200" b="0" i="0">
+              <a:rPr sz="2600" b="0" i="0">
                 <a:solidFill>
                   <a:srgbClr val="2B2118"/>
                 </a:solidFill>
@@ -10599,7 +11928,281 @@
                 <a:ea typeface="Malgun Gothic"/>
                 <a:cs typeface="Georgia"/>
               </a:rPr>
-              <a:t>What changes per pull request</a:t>
+              <a:t>The later a blocker is found, the longer the fix takes</a:t>
+            </a:r>
+          </a:p>
+        </p:txBody>
+      </p:sp>
+      <p:sp>
+        <p:nvSpPr>
+          <p:cNvPr id="4" name="Source"/>
+          <p:cNvSpPr txBox="1"/>
+          <p:nvPr/>
+        </p:nvSpPr>
+        <p:spPr>
+          <a:xfrm>
+            <a:off x="812800" y="5708650"/>
+            <a:ext cx="10566400" cy="209550"/>
+          </a:xfrm>
+          <a:prstGeom prst="rect">
+            <a:avLst/>
+          </a:prstGeom>
+          <a:noFill/>
+        </p:spPr>
+        <p:txBody>
+          <a:bodyPr wrap="square" lIns="0" tIns="0" rIns="0" bIns="0" anchor="b">
+            <a:noAutofit/>
+          </a:bodyPr>
+          <a:lstStyle/>
+          <a:p>
+            <a:pPr algn="l">
+              <a:lnSpc>
+                <a:spcPct val="120000"/>
+              </a:lnSpc>
+            </a:pPr>
+            <a:r>
+              <a:rPr sz="1100" b="0" i="0">
+                <a:solidFill>
+                  <a:srgbClr val="6B5E52"/>
+                </a:solidFill>
+                <a:latin typeface="Arial"/>
+                <a:ea typeface="Malgun Gothic"/>
+                <a:cs typeface="Arial"/>
+              </a:rPr>
+              <a:t>Source: Illustrative data, sample deck</a:t>
+            </a:r>
+          </a:p>
+        </p:txBody>
+      </p:sp>
+      <p:sp>
+        <p:nvSpPr>
+          <p:cNvPr id="5" name="Commentary"/>
+          <p:cNvSpPr txBox="1"/>
+          <p:nvPr/>
+        </p:nvSpPr>
+        <p:spPr>
+          <a:xfrm>
+            <a:off x="8161866" y="1422400"/>
+            <a:ext cx="3217333" cy="877823"/>
+          </a:xfrm>
+          <a:prstGeom prst="rect">
+            <a:avLst/>
+          </a:prstGeom>
+          <a:noFill/>
+        </p:spPr>
+        <p:txBody>
+          <a:bodyPr wrap="square" lIns="0" tIns="0" rIns="0" bIns="0" anchor="t">
+            <a:noAutofit/>
+          </a:bodyPr>
+          <a:lstStyle/>
+          <a:p>
+            <a:pPr algn="l">
+              <a:lnSpc>
+                <a:spcPct val="120000"/>
+              </a:lnSpc>
+            </a:pPr>
+            <a:r>
+              <a:rPr sz="1600" b="0" i="0">
+                <a:solidFill>
+                  <a:srgbClr val="2B2118"/>
+                </a:solidFill>
+                <a:latin typeface="Arial"/>
+                <a:ea typeface="Malgun Gothic"/>
+                <a:cs typeface="Arial"/>
+              </a:rPr>
+              <a:t>Fixing on the release branch takes </a:t>
+            </a:r>
+            <a:r>
+              <a:rPr sz="1600" b="1" i="0">
+                <a:solidFill>
+                  <a:srgbClr val="9C4422"/>
+                </a:solidFill>
+                <a:latin typeface="Arial"/>
+                <a:ea typeface="Malgun Gothic"/>
+                <a:cs typeface="Arial"/>
+              </a:rPr>
+              <a:t>10x longer</a:t>
+            </a:r>
+            <a:r>
+              <a:rPr sz="1600" b="0" i="0">
+                <a:solidFill>
+                  <a:srgbClr val="2B2118"/>
+                </a:solidFill>
+                <a:latin typeface="Arial"/>
+                <a:ea typeface="Malgun Gothic"/>
+                <a:cs typeface="Arial"/>
+              </a:rPr>
+              <a:t> than fixing in the pull request.</a:t>
+            </a:r>
+          </a:p>
+        </p:txBody>
+      </p:sp>
+      <p:sp>
+        <p:nvSpPr>
+          <p:cNvPr id="6" name="Commentary rule"/>
+          <p:cNvSpPr/>
+          <p:nvPr/>
+        </p:nvSpPr>
+        <p:spPr>
+          <a:xfrm>
+            <a:off x="8009466" y="1422400"/>
+            <a:ext cx="25400" cy="877824"/>
+          </a:xfrm>
+          <a:prstGeom prst="rect">
+            <a:avLst/>
+          </a:prstGeom>
+          <a:solidFill>
+            <a:srgbClr val="9C4422"/>
+          </a:solidFill>
+          <a:ln>
+            <a:noFill/>
+          </a:ln>
+        </p:spPr>
+        <p:txBody>
+          <a:bodyPr rtlCol="0" anchor="ctr" wrap="square" lIns="76200" tIns="76200" rIns="76200" bIns="76200"/>
+          <a:lstStyle/>
+          <a:p>
+            <a:pPr algn="ctr"/>
+          </a:p>
+        </p:txBody>
+      </p:sp>
+      <p:sp>
+        <p:nvSpPr>
+          <p:cNvPr id="7" name="TextBox 6"/>
+          <p:cNvSpPr txBox="1"/>
+          <p:nvPr/>
+        </p:nvSpPr>
+        <p:spPr>
+          <a:xfrm>
+            <a:off x="812800" y="1422400"/>
+            <a:ext cx="6968066" cy="209550"/>
+          </a:xfrm>
+          <a:prstGeom prst="rect">
+            <a:avLst/>
+          </a:prstGeom>
+          <a:noFill/>
+        </p:spPr>
+        <p:txBody>
+          <a:bodyPr wrap="square" lIns="0" tIns="0" rIns="0" bIns="0" anchor="t">
+            <a:noAutofit/>
+          </a:bodyPr>
+          <a:lstStyle/>
+          <a:p>
+            <a:pPr algn="l">
+              <a:lnSpc>
+                <a:spcPct val="120000"/>
+              </a:lnSpc>
+            </a:pPr>
+            <a:r>
+              <a:rPr sz="1100" b="0" i="0">
+                <a:solidFill>
+                  <a:srgbClr val="6B5E52"/>
+                </a:solidFill>
+                <a:latin typeface="Arial"/>
+                <a:ea typeface="Malgun Gothic"/>
+                <a:cs typeface="Arial"/>
+              </a:rPr>
+              <a:t>Median hours to fix</a:t>
+            </a:r>
+          </a:p>
+        </p:txBody>
+      </p:sp>
+      <p:graphicFrame>
+        <p:nvGraphicFramePr>
+          <p:cNvPr id="8" name="Chart"/>
+          <p:cNvGraphicFramePr>
+            <a:graphicFrameLocks noGrp="1"/>
+          </p:cNvGraphicFramePr>
+          <p:nvPr/>
+        </p:nvGraphicFramePr>
+        <p:xfrm>
+          <a:off x="812800" y="1673860"/>
+          <a:ext cx="6968066" cy="3920490"/>
+        </p:xfrm>
+        <a:graphic>
+          <a:graphicData uri="http://schemas.openxmlformats.org/drawingml/2006/chart">
+            <c:chart xmlns:c="http://schemas.openxmlformats.org/drawingml/2006/chart" r:id="rId2"/>
+          </a:graphicData>
+        </a:graphic>
+      </p:graphicFrame>
+      <p:sp>
+        <p:nvSpPr>
+          <p:cNvPr id="9" name="Footer"/>
+          <p:cNvSpPr txBox="1"/>
+          <p:nvPr/>
+        </p:nvSpPr>
+        <p:spPr>
+          <a:xfrm>
+            <a:off x="812800" y="6426200"/>
+            <a:ext cx="6604000" cy="190500"/>
+          </a:xfrm>
+          <a:prstGeom prst="rect">
+            <a:avLst/>
+          </a:prstGeom>
+          <a:noFill/>
+        </p:spPr>
+        <p:txBody>
+          <a:bodyPr wrap="square" lIns="0" tIns="0" rIns="0" bIns="0" anchor="t">
+            <a:noAutofit/>
+          </a:bodyPr>
+          <a:lstStyle/>
+          <a:p>
+            <a:pPr algn="l">
+              <a:lnSpc>
+                <a:spcPct val="120000"/>
+              </a:lnSpc>
+            </a:pPr>
+            <a:r>
+              <a:rPr sz="1000" b="0" i="0">
+                <a:solidFill>
+                  <a:srgbClr val="6B5E52"/>
+                </a:solidFill>
+                <a:latin typeface="Arial"/>
+                <a:ea typeface="Malgun Gothic"/>
+                <a:cs typeface="Arial"/>
+              </a:rPr>
+              <a:t>Example Corp — internal</a:t>
+            </a:r>
+          </a:p>
+        </p:txBody>
+      </p:sp>
+      <p:sp>
+        <p:nvSpPr>
+          <p:cNvPr id="10" name="Page number"/>
+          <p:cNvSpPr txBox="1"/>
+          <p:nvPr/>
+        </p:nvSpPr>
+        <p:spPr>
+          <a:xfrm>
+            <a:off x="10617200" y="6426200"/>
+            <a:ext cx="762000" cy="190500"/>
+          </a:xfrm>
+          <a:prstGeom prst="rect">
+            <a:avLst/>
+          </a:prstGeom>
+          <a:noFill/>
+        </p:spPr>
+        <p:txBody>
+          <a:bodyPr wrap="square" lIns="0" tIns="0" rIns="0" bIns="0" anchor="t">
+            <a:noAutofit/>
+          </a:bodyPr>
+          <a:lstStyle/>
+          <a:p>
+            <a:pPr algn="r">
+              <a:lnSpc>
+                <a:spcPct val="120000"/>
+              </a:lnSpc>
+            </a:pPr>
+            <a:r>
+              <a:rPr sz="1000" b="0" i="0">
+                <a:solidFill>
+                  <a:srgbClr val="6B5E52"/>
+                </a:solidFill>
+                <a:latin typeface="Consolas"/>
+                <a:ea typeface="Malgun Gothic"/>
+                <a:cs typeface="Consolas"/>
+              </a:rPr>
+              <a:t>6</a:t>
             </a:r>
           </a:p>
         </p:txBody>
@@ -10632,14 +12235,14 @@
       <p:grpSpPr/>
       <p:sp>
         <p:nvSpPr>
-          <p:cNvPr id="2" name="Eyebrow"/>
-          <p:cNvSpPr txBox="1"/>
-          <p:nvPr/>
-        </p:nvSpPr>
-        <p:spPr>
-          <a:xfrm>
-            <a:off x="812800" y="431800"/>
-            <a:ext cx="10566400" cy="177800"/>
+          <p:cNvPr id="2" name="Number"/>
+          <p:cNvSpPr txBox="1"/>
+          <p:nvPr/>
+        </p:nvSpPr>
+        <p:spPr>
+          <a:xfrm>
+            <a:off x="812800" y="2139188"/>
+            <a:ext cx="8453120" cy="609600"/>
           </a:xfrm>
           <a:prstGeom prst="rect">
             <a:avLst/>
@@ -10658,7 +12261,7 @@
               </a:lnSpc>
             </a:pPr>
             <a:r>
-              <a:rPr sz="1000" b="0" i="0">
+              <a:rPr sz="3200" b="0" i="0">
                 <a:solidFill>
                   <a:srgbClr val="9C4422"/>
                 </a:solidFill>
@@ -10666,7 +12269,7 @@
                 <a:ea typeface="Malgun Gothic"/>
                 <a:cs typeface="Consolas"/>
               </a:rPr>
-              <a:t>Proposal</a:t>
+              <a:t>02</a:t>
             </a:r>
           </a:p>
         </p:txBody>
@@ -10679,16 +12282,16 @@
         </p:nvSpPr>
         <p:spPr>
           <a:xfrm>
-            <a:off x="812800" y="635000"/>
-            <a:ext cx="10566400" cy="431800"/>
-          </a:xfrm>
-          <a:prstGeom prst="rect">
-            <a:avLst/>
-          </a:prstGeom>
-          <a:noFill/>
-        </p:spPr>
-        <p:txBody>
-          <a:bodyPr wrap="square" lIns="0" tIns="0" rIns="0" bIns="0" anchor="t">
+            <a:off x="812800" y="2522829"/>
+            <a:ext cx="8453120" cy="819302"/>
+          </a:xfrm>
+          <a:prstGeom prst="rect">
+            <a:avLst/>
+          </a:prstGeom>
+          <a:noFill/>
+        </p:spPr>
+        <p:txBody>
+          <a:bodyPr wrap="square" lIns="0" tIns="0" rIns="0" bIns="0" anchor="b">
             <a:noAutofit/>
           </a:bodyPr>
           <a:lstStyle/>
@@ -10699,7 +12302,7 @@
               </a:lnSpc>
             </a:pPr>
             <a:r>
-              <a:rPr sz="2600" b="0" i="0">
+              <a:rPr sz="3200" b="0" i="0">
                 <a:solidFill>
                   <a:srgbClr val="2B2118"/>
                 </a:solidFill>
@@ -10707,482 +12310,7 @@
                 <a:ea typeface="Malgun Gothic"/>
                 <a:cs typeface="Georgia"/>
               </a:rPr>
-              <a:t>The same checks run earlier, on a smaller change</a:t>
-            </a:r>
-          </a:p>
-        </p:txBody>
-      </p:sp>
-      <p:sp>
-        <p:nvSpPr>
-          <p:cNvPr id="4" name="TextBox 3"/>
-          <p:cNvSpPr txBox="1"/>
-          <p:nvPr/>
-        </p:nvSpPr>
-        <p:spPr>
-          <a:xfrm>
-            <a:off x="812800" y="1422400"/>
-            <a:ext cx="4940300" cy="292608"/>
-          </a:xfrm>
-          <a:prstGeom prst="rect">
-            <a:avLst/>
-          </a:prstGeom>
-          <a:noFill/>
-        </p:spPr>
-        <p:txBody>
-          <a:bodyPr wrap="square" lIns="0" tIns="0" rIns="0" bIns="0" anchor="t">
-            <a:noAutofit/>
-          </a:bodyPr>
-          <a:lstStyle/>
-          <a:p>
-            <a:pPr algn="l">
-              <a:lnSpc>
-                <a:spcPct val="120000"/>
-              </a:lnSpc>
-            </a:pPr>
-            <a:r>
-              <a:rPr sz="1600" b="1" i="0">
-                <a:solidFill>
-                  <a:srgbClr val="2B2118"/>
-                </a:solidFill>
-                <a:latin typeface="Arial"/>
-                <a:ea typeface="Malgun Gothic"/>
-                <a:cs typeface="Arial"/>
-              </a:rPr>
-              <a:t>Today</a:t>
-            </a:r>
-          </a:p>
-        </p:txBody>
-      </p:sp>
-      <p:sp>
-        <p:nvSpPr>
-          <p:cNvPr id="5" name="TextBox 4"/>
-          <p:cNvSpPr txBox="1"/>
-          <p:nvPr/>
-        </p:nvSpPr>
-        <p:spPr>
-          <a:xfrm>
-            <a:off x="812800" y="1816608"/>
-            <a:ext cx="4940300" cy="237744"/>
-          </a:xfrm>
-          <a:prstGeom prst="rect">
-            <a:avLst/>
-          </a:prstGeom>
-          <a:noFill/>
-        </p:spPr>
-        <p:txBody>
-          <a:bodyPr wrap="square" lIns="0" tIns="0" rIns="0" bIns="0" anchor="t">
-            <a:noAutofit/>
-          </a:bodyPr>
-          <a:lstStyle/>
-          <a:p>
-            <a:pPr algn="l" marL="181610" indent="-181610">
-              <a:lnSpc>
-                <a:spcPct val="120000"/>
-              </a:lnSpc>
-              <a:buClr>
-                <a:srgbClr val="9C4422"/>
-              </a:buClr>
-              <a:buChar char="•"/>
-            </a:pPr>
-            <a:r>
-              <a:rPr sz="1300" b="0" i="0">
-                <a:solidFill>
-                  <a:srgbClr val="4A3F35"/>
-                </a:solidFill>
-                <a:latin typeface="Arial"/>
-                <a:ea typeface="Malgun Gothic"/>
-                <a:cs typeface="Arial"/>
-              </a:rPr>
-              <a:t>Checks run once, on the release branch</a:t>
-            </a:r>
-          </a:p>
-        </p:txBody>
-      </p:sp>
-      <p:sp>
-        <p:nvSpPr>
-          <p:cNvPr id="6" name="TextBox 5"/>
-          <p:cNvSpPr txBox="1"/>
-          <p:nvPr/>
-        </p:nvSpPr>
-        <p:spPr>
-          <a:xfrm>
-            <a:off x="812800" y="2153412"/>
-            <a:ext cx="4940300" cy="237744"/>
-          </a:xfrm>
-          <a:prstGeom prst="rect">
-            <a:avLst/>
-          </a:prstGeom>
-          <a:noFill/>
-        </p:spPr>
-        <p:txBody>
-          <a:bodyPr wrap="square" lIns="0" tIns="0" rIns="0" bIns="0" anchor="t">
-            <a:noAutofit/>
-          </a:bodyPr>
-          <a:lstStyle/>
-          <a:p>
-            <a:pPr algn="l" marL="181610" indent="-181610">
-              <a:lnSpc>
-                <a:spcPct val="120000"/>
-              </a:lnSpc>
-              <a:buClr>
-                <a:srgbClr val="9C4422"/>
-              </a:buClr>
-              <a:buChar char="•"/>
-            </a:pPr>
-            <a:r>
-              <a:rPr sz="1300" b="0" i="0">
-                <a:solidFill>
-                  <a:srgbClr val="4A3F35"/>
-                </a:solidFill>
-                <a:latin typeface="Arial"/>
-                <a:ea typeface="Malgun Gothic"/>
-                <a:cs typeface="Arial"/>
-              </a:rPr>
-              <a:t>A failure blocks every change in the release</a:t>
-            </a:r>
-          </a:p>
-        </p:txBody>
-      </p:sp>
-      <p:sp>
-        <p:nvSpPr>
-          <p:cNvPr id="7" name="TextBox 6"/>
-          <p:cNvSpPr txBox="1"/>
-          <p:nvPr/>
-        </p:nvSpPr>
-        <p:spPr>
-          <a:xfrm>
-            <a:off x="812800" y="2490216"/>
-            <a:ext cx="4940300" cy="237744"/>
-          </a:xfrm>
-          <a:prstGeom prst="rect">
-            <a:avLst/>
-          </a:prstGeom>
-          <a:noFill/>
-        </p:spPr>
-        <p:txBody>
-          <a:bodyPr wrap="square" lIns="0" tIns="0" rIns="0" bIns="0" anchor="t">
-            <a:noAutofit/>
-          </a:bodyPr>
-          <a:lstStyle/>
-          <a:p>
-            <a:pPr algn="l" marL="181610" indent="-181610">
-              <a:lnSpc>
-                <a:spcPct val="120000"/>
-              </a:lnSpc>
-              <a:buClr>
-                <a:srgbClr val="9C4422"/>
-              </a:buClr>
-              <a:buChar char="•"/>
-            </a:pPr>
-            <a:r>
-              <a:rPr sz="1300" b="0" i="0">
-                <a:solidFill>
-                  <a:srgbClr val="4A3F35"/>
-                </a:solidFill>
-                <a:latin typeface="Arial"/>
-                <a:ea typeface="Malgun Gothic"/>
-                <a:cs typeface="Arial"/>
-              </a:rPr>
-              <a:t>The author has moved on to other work</a:t>
-            </a:r>
-          </a:p>
-        </p:txBody>
-      </p:sp>
-      <p:sp>
-        <p:nvSpPr>
-          <p:cNvPr id="8" name="TextBox 7"/>
-          <p:cNvSpPr txBox="1"/>
-          <p:nvPr/>
-        </p:nvSpPr>
-        <p:spPr>
-          <a:xfrm>
-            <a:off x="6438900" y="1422400"/>
-            <a:ext cx="4940300" cy="292608"/>
-          </a:xfrm>
-          <a:prstGeom prst="rect">
-            <a:avLst/>
-          </a:prstGeom>
-          <a:noFill/>
-        </p:spPr>
-        <p:txBody>
-          <a:bodyPr wrap="square" lIns="0" tIns="0" rIns="0" bIns="0" anchor="t">
-            <a:noAutofit/>
-          </a:bodyPr>
-          <a:lstStyle/>
-          <a:p>
-            <a:pPr algn="l">
-              <a:lnSpc>
-                <a:spcPct val="120000"/>
-              </a:lnSpc>
-            </a:pPr>
-            <a:r>
-              <a:rPr sz="1600" b="1" i="0">
-                <a:solidFill>
-                  <a:srgbClr val="2B2118"/>
-                </a:solidFill>
-                <a:latin typeface="Arial"/>
-                <a:ea typeface="Malgun Gothic"/>
-                <a:cs typeface="Arial"/>
-              </a:rPr>
-              <a:t>Proposed</a:t>
-            </a:r>
-          </a:p>
-        </p:txBody>
-      </p:sp>
-      <p:sp>
-        <p:nvSpPr>
-          <p:cNvPr id="9" name="TextBox 8"/>
-          <p:cNvSpPr txBox="1"/>
-          <p:nvPr/>
-        </p:nvSpPr>
-        <p:spPr>
-          <a:xfrm>
-            <a:off x="6438900" y="1816608"/>
-            <a:ext cx="4940300" cy="237744"/>
-          </a:xfrm>
-          <a:prstGeom prst="rect">
-            <a:avLst/>
-          </a:prstGeom>
-          <a:noFill/>
-        </p:spPr>
-        <p:txBody>
-          <a:bodyPr wrap="square" lIns="0" tIns="0" rIns="0" bIns="0" anchor="t">
-            <a:noAutofit/>
-          </a:bodyPr>
-          <a:lstStyle/>
-          <a:p>
-            <a:pPr algn="l" marL="181610" indent="-181610">
-              <a:lnSpc>
-                <a:spcPct val="120000"/>
-              </a:lnSpc>
-              <a:buClr>
-                <a:srgbClr val="9C4422"/>
-              </a:buClr>
-              <a:buChar char="•"/>
-            </a:pPr>
-            <a:r>
-              <a:rPr sz="1300" b="0" i="0">
-                <a:solidFill>
-                  <a:srgbClr val="4A3F35"/>
-                </a:solidFill>
-                <a:latin typeface="Arial"/>
-                <a:ea typeface="Malgun Gothic"/>
-                <a:cs typeface="Arial"/>
-              </a:rPr>
-              <a:t>Checks run on every pull request</a:t>
-            </a:r>
-          </a:p>
-        </p:txBody>
-      </p:sp>
-      <p:sp>
-        <p:nvSpPr>
-          <p:cNvPr id="10" name="TextBox 9"/>
-          <p:cNvSpPr txBox="1"/>
-          <p:nvPr/>
-        </p:nvSpPr>
-        <p:spPr>
-          <a:xfrm>
-            <a:off x="6438900" y="2153412"/>
-            <a:ext cx="4940300" cy="237744"/>
-          </a:xfrm>
-          <a:prstGeom prst="rect">
-            <a:avLst/>
-          </a:prstGeom>
-          <a:noFill/>
-        </p:spPr>
-        <p:txBody>
-          <a:bodyPr wrap="square" lIns="0" tIns="0" rIns="0" bIns="0" anchor="t">
-            <a:noAutofit/>
-          </a:bodyPr>
-          <a:lstStyle/>
-          <a:p>
-            <a:pPr algn="l" marL="181610" indent="-181610">
-              <a:lnSpc>
-                <a:spcPct val="120000"/>
-              </a:lnSpc>
-              <a:buClr>
-                <a:srgbClr val="9C4422"/>
-              </a:buClr>
-              <a:buChar char="•"/>
-            </a:pPr>
-            <a:r>
-              <a:rPr sz="1300" b="0" i="0">
-                <a:solidFill>
-                  <a:srgbClr val="4A3F35"/>
-                </a:solidFill>
-                <a:latin typeface="Arial"/>
-                <a:ea typeface="Malgun Gothic"/>
-                <a:cs typeface="Arial"/>
-              </a:rPr>
-              <a:t>A failure blocks only that change</a:t>
-            </a:r>
-          </a:p>
-        </p:txBody>
-      </p:sp>
-      <p:sp>
-        <p:nvSpPr>
-          <p:cNvPr id="11" name="TextBox 10"/>
-          <p:cNvSpPr txBox="1"/>
-          <p:nvPr/>
-        </p:nvSpPr>
-        <p:spPr>
-          <a:xfrm>
-            <a:off x="6438900" y="2490216"/>
-            <a:ext cx="4940300" cy="237744"/>
-          </a:xfrm>
-          <a:prstGeom prst="rect">
-            <a:avLst/>
-          </a:prstGeom>
-          <a:noFill/>
-        </p:spPr>
-        <p:txBody>
-          <a:bodyPr wrap="square" lIns="0" tIns="0" rIns="0" bIns="0" anchor="t">
-            <a:noAutofit/>
-          </a:bodyPr>
-          <a:lstStyle/>
-          <a:p>
-            <a:pPr algn="l" marL="181610" indent="-181610">
-              <a:lnSpc>
-                <a:spcPct val="120000"/>
-              </a:lnSpc>
-              <a:buClr>
-                <a:srgbClr val="9C4422"/>
-              </a:buClr>
-              <a:buChar char="•"/>
-            </a:pPr>
-            <a:r>
-              <a:rPr sz="1300" b="0" i="0">
-                <a:solidFill>
-                  <a:srgbClr val="4A3F35"/>
-                </a:solidFill>
-                <a:latin typeface="Arial"/>
-                <a:ea typeface="Malgun Gothic"/>
-                <a:cs typeface="Arial"/>
-              </a:rPr>
-              <a:t>The author fixes it while the context is fresh</a:t>
-            </a:r>
-          </a:p>
-        </p:txBody>
-      </p:sp>
-      <p:sp>
-        <p:nvSpPr>
-          <p:cNvPr id="12" name="TextBox 11"/>
-          <p:cNvSpPr txBox="1"/>
-          <p:nvPr/>
-        </p:nvSpPr>
-        <p:spPr>
-          <a:xfrm>
-            <a:off x="5753100" y="1422400"/>
-            <a:ext cx="685800" cy="1305560"/>
-          </a:xfrm>
-          <a:prstGeom prst="rect">
-            <a:avLst/>
-          </a:prstGeom>
-          <a:noFill/>
-        </p:spPr>
-        <p:txBody>
-          <a:bodyPr wrap="square" lIns="0" tIns="0" rIns="0" bIns="0" anchor="ctr">
-            <a:noAutofit/>
-          </a:bodyPr>
-          <a:lstStyle/>
-          <a:p>
-            <a:pPr algn="ctr">
-              <a:lnSpc>
-                <a:spcPct val="120000"/>
-              </a:lnSpc>
-            </a:pPr>
-            <a:r>
-              <a:rPr sz="1600" b="0" i="0">
-                <a:solidFill>
-                  <a:srgbClr val="9C4422"/>
-                </a:solidFill>
-                <a:latin typeface="Arial"/>
-                <a:ea typeface="Malgun Gothic"/>
-                <a:cs typeface="Arial"/>
-              </a:rPr>
-              <a:t>→</a:t>
-            </a:r>
-          </a:p>
-        </p:txBody>
-      </p:sp>
-      <p:sp>
-        <p:nvSpPr>
-          <p:cNvPr id="13" name="Footer"/>
-          <p:cNvSpPr txBox="1"/>
-          <p:nvPr/>
-        </p:nvSpPr>
-        <p:spPr>
-          <a:xfrm>
-            <a:off x="812800" y="6426200"/>
-            <a:ext cx="6604000" cy="190500"/>
-          </a:xfrm>
-          <a:prstGeom prst="rect">
-            <a:avLst/>
-          </a:prstGeom>
-          <a:noFill/>
-        </p:spPr>
-        <p:txBody>
-          <a:bodyPr wrap="square" lIns="0" tIns="0" rIns="0" bIns="0" anchor="t">
-            <a:noAutofit/>
-          </a:bodyPr>
-          <a:lstStyle/>
-          <a:p>
-            <a:pPr algn="l">
-              <a:lnSpc>
-                <a:spcPct val="120000"/>
-              </a:lnSpc>
-            </a:pPr>
-            <a:r>
-              <a:rPr sz="1000" b="0" i="0">
-                <a:solidFill>
-                  <a:srgbClr val="6B5E52"/>
-                </a:solidFill>
-                <a:latin typeface="Arial"/>
-                <a:ea typeface="Malgun Gothic"/>
-                <a:cs typeface="Arial"/>
-              </a:rPr>
-              <a:t>Example Corp — internal</a:t>
-            </a:r>
-          </a:p>
-        </p:txBody>
-      </p:sp>
-      <p:sp>
-        <p:nvSpPr>
-          <p:cNvPr id="14" name="Page number"/>
-          <p:cNvSpPr txBox="1"/>
-          <p:nvPr/>
-        </p:nvSpPr>
-        <p:spPr>
-          <a:xfrm>
-            <a:off x="10617200" y="6426200"/>
-            <a:ext cx="762000" cy="190500"/>
-          </a:xfrm>
-          <a:prstGeom prst="rect">
-            <a:avLst/>
-          </a:prstGeom>
-          <a:noFill/>
-        </p:spPr>
-        <p:txBody>
-          <a:bodyPr wrap="square" lIns="0" tIns="0" rIns="0" bIns="0" anchor="t">
-            <a:noAutofit/>
-          </a:bodyPr>
-          <a:lstStyle/>
-          <a:p>
-            <a:pPr algn="r">
-              <a:lnSpc>
-                <a:spcPct val="120000"/>
-              </a:lnSpc>
-            </a:pPr>
-            <a:r>
-              <a:rPr sz="1000" b="0" i="0">
-                <a:solidFill>
-                  <a:srgbClr val="6B5E52"/>
-                </a:solidFill>
-                <a:latin typeface="Consolas"/>
-                <a:ea typeface="Malgun Gothic"/>
-                <a:cs typeface="Consolas"/>
-              </a:rPr>
-              <a:t>7</a:t>
+              <a:t>What changes per pull request</a:t>
             </a:r>
           </a:p>
         </p:txBody>
@@ -11290,50 +12418,21 @@
                 <a:ea typeface="Malgun Gothic"/>
                 <a:cs typeface="Georgia"/>
               </a:rPr>
-              <a:t>A pull request passes four gates before merge</a:t>
-            </a:r>
-          </a:p>
-        </p:txBody>
-      </p:sp>
-      <p:sp>
-        <p:nvSpPr>
-          <p:cNvPr id="4" name="Rectangle 3"/>
-          <p:cNvSpPr/>
+              <a:t>The same checks run earlier, on a smaller change</a:t>
+            </a:r>
+          </a:p>
+        </p:txBody>
+      </p:sp>
+      <p:sp>
+        <p:nvSpPr>
+          <p:cNvPr id="4" name="TextBox 3"/>
+          <p:cNvSpPr txBox="1"/>
           <p:nvPr/>
         </p:nvSpPr>
         <p:spPr>
           <a:xfrm>
             <a:off x="812800" y="1422400"/>
-            <a:ext cx="2298700" cy="38100"/>
-          </a:xfrm>
-          <a:prstGeom prst="rect">
-            <a:avLst/>
-          </a:prstGeom>
-          <a:solidFill>
-            <a:srgbClr val="E3DBD1"/>
-          </a:solidFill>
-          <a:ln>
-            <a:noFill/>
-          </a:ln>
-        </p:spPr>
-        <p:txBody>
-          <a:bodyPr rtlCol="0" anchor="ctr" wrap="square" lIns="76200" tIns="76200" rIns="76200" bIns="76200"/>
-          <a:lstStyle/>
-          <a:p>
-            <a:pPr algn="ctr"/>
-          </a:p>
-        </p:txBody>
-      </p:sp>
-      <p:sp>
-        <p:nvSpPr>
-          <p:cNvPr id="5" name="TextBox 4"/>
-          <p:cNvSpPr txBox="1"/>
-          <p:nvPr/>
-        </p:nvSpPr>
-        <p:spPr>
-          <a:xfrm>
-            <a:off x="812800" y="1600200"/>
-            <a:ext cx="2298700" cy="190500"/>
+            <a:ext cx="4940300" cy="292608"/>
           </a:xfrm>
           <a:prstGeom prst="rect">
             <a:avLst/>
@@ -11352,15 +12451,110 @@
               </a:lnSpc>
             </a:pPr>
             <a:r>
-              <a:rPr sz="1000" b="0" i="0">
-                <a:solidFill>
-                  <a:srgbClr val="6B5E52"/>
-                </a:solidFill>
-                <a:latin typeface="Consolas"/>
-                <a:ea typeface="Malgun Gothic"/>
-                <a:cs typeface="Consolas"/>
-              </a:rPr>
-              <a:t>01</a:t>
+              <a:rPr sz="1600" b="1" i="0">
+                <a:solidFill>
+                  <a:srgbClr val="2B2118"/>
+                </a:solidFill>
+                <a:latin typeface="Arial"/>
+                <a:ea typeface="Malgun Gothic"/>
+                <a:cs typeface="Arial"/>
+              </a:rPr>
+              <a:t>Today</a:t>
+            </a:r>
+          </a:p>
+        </p:txBody>
+      </p:sp>
+      <p:sp>
+        <p:nvSpPr>
+          <p:cNvPr id="5" name="Bullets"/>
+          <p:cNvSpPr txBox="1"/>
+          <p:nvPr/>
+        </p:nvSpPr>
+        <p:spPr>
+          <a:xfrm>
+            <a:off x="812800" y="1816608"/>
+            <a:ext cx="4940300" cy="911351"/>
+          </a:xfrm>
+          <a:prstGeom prst="rect">
+            <a:avLst/>
+          </a:prstGeom>
+          <a:noFill/>
+        </p:spPr>
+        <p:txBody>
+          <a:bodyPr wrap="square" lIns="0" tIns="0" rIns="0" bIns="0">
+            <a:noAutofit/>
+          </a:bodyPr>
+          <a:lstStyle/>
+          <a:p>
+            <a:pPr algn="l" marL="181610" indent="-181610">
+              <a:lnSpc>
+                <a:spcPct val="120000"/>
+              </a:lnSpc>
+              <a:buClr>
+                <a:srgbClr val="9C4422"/>
+              </a:buClr>
+              <a:buChar char="•"/>
+            </a:pPr>
+            <a:r>
+              <a:rPr sz="1300" b="0" i="0">
+                <a:solidFill>
+                  <a:srgbClr val="4A3F35"/>
+                </a:solidFill>
+                <a:latin typeface="Arial"/>
+                <a:ea typeface="Malgun Gothic"/>
+                <a:cs typeface="Arial"/>
+              </a:rPr>
+              <a:t>Checks run once, on the release branch</a:t>
+            </a:r>
+          </a:p>
+          <a:p>
+            <a:pPr algn="l" marL="181610" indent="-181610">
+              <a:lnSpc>
+                <a:spcPct val="120000"/>
+              </a:lnSpc>
+              <a:spcBef>
+                <a:spcPts val="780"/>
+              </a:spcBef>
+              <a:buClr>
+                <a:srgbClr val="9C4422"/>
+              </a:buClr>
+              <a:buChar char="•"/>
+            </a:pPr>
+            <a:r>
+              <a:rPr sz="1300" b="0" i="0">
+                <a:solidFill>
+                  <a:srgbClr val="4A3F35"/>
+                </a:solidFill>
+                <a:latin typeface="Arial"/>
+                <a:ea typeface="Malgun Gothic"/>
+                <a:cs typeface="Arial"/>
+              </a:rPr>
+              <a:t>A failure blocks every change in the release</a:t>
+            </a:r>
+          </a:p>
+          <a:p>
+            <a:pPr algn="l" marL="181610" indent="-181610">
+              <a:lnSpc>
+                <a:spcPct val="120000"/>
+              </a:lnSpc>
+              <a:spcBef>
+                <a:spcPts val="780"/>
+              </a:spcBef>
+              <a:buClr>
+                <a:srgbClr val="9C4422"/>
+              </a:buClr>
+              <a:buChar char="•"/>
+            </a:pPr>
+            <a:r>
+              <a:rPr sz="1300" b="0" i="0">
+                <a:solidFill>
+                  <a:srgbClr val="4A3F35"/>
+                </a:solidFill>
+                <a:latin typeface="Arial"/>
+                <a:ea typeface="Malgun Gothic"/>
+                <a:cs typeface="Arial"/>
+              </a:rPr>
+              <a:t>The author has moved on to other work</a:t>
             </a:r>
           </a:p>
         </p:txBody>
@@ -11373,8 +12567,8 @@
         </p:nvSpPr>
         <p:spPr>
           <a:xfrm>
-            <a:off x="812800" y="1866900"/>
-            <a:ext cx="2298700" cy="292608"/>
+            <a:off x="6438900" y="1422400"/>
+            <a:ext cx="4940300" cy="292608"/>
           </a:xfrm>
           <a:prstGeom prst="rect">
             <a:avLst/>
@@ -11393,585 +12587,158 @@
               </a:lnSpc>
             </a:pPr>
             <a:r>
+              <a:rPr sz="1600" b="1" i="0">
+                <a:solidFill>
+                  <a:srgbClr val="2B2118"/>
+                </a:solidFill>
+                <a:latin typeface="Arial"/>
+                <a:ea typeface="Malgun Gothic"/>
+                <a:cs typeface="Arial"/>
+              </a:rPr>
+              <a:t>Proposed</a:t>
+            </a:r>
+          </a:p>
+        </p:txBody>
+      </p:sp>
+      <p:sp>
+        <p:nvSpPr>
+          <p:cNvPr id="7" name="Bullets"/>
+          <p:cNvSpPr txBox="1"/>
+          <p:nvPr/>
+        </p:nvSpPr>
+        <p:spPr>
+          <a:xfrm>
+            <a:off x="6438900" y="1816608"/>
+            <a:ext cx="4940300" cy="911351"/>
+          </a:xfrm>
+          <a:prstGeom prst="rect">
+            <a:avLst/>
+          </a:prstGeom>
+          <a:noFill/>
+        </p:spPr>
+        <p:txBody>
+          <a:bodyPr wrap="square" lIns="0" tIns="0" rIns="0" bIns="0">
+            <a:noAutofit/>
+          </a:bodyPr>
+          <a:lstStyle/>
+          <a:p>
+            <a:pPr algn="l" marL="181610" indent="-181610">
+              <a:lnSpc>
+                <a:spcPct val="120000"/>
+              </a:lnSpc>
+              <a:buClr>
+                <a:srgbClr val="9C4422"/>
+              </a:buClr>
+              <a:buChar char="•"/>
+            </a:pPr>
+            <a:r>
+              <a:rPr sz="1300" b="0" i="0">
+                <a:solidFill>
+                  <a:srgbClr val="4A3F35"/>
+                </a:solidFill>
+                <a:latin typeface="Arial"/>
+                <a:ea typeface="Malgun Gothic"/>
+                <a:cs typeface="Arial"/>
+              </a:rPr>
+              <a:t>Checks run on every pull request</a:t>
+            </a:r>
+          </a:p>
+          <a:p>
+            <a:pPr algn="l" marL="181610" indent="-181610">
+              <a:lnSpc>
+                <a:spcPct val="120000"/>
+              </a:lnSpc>
+              <a:spcBef>
+                <a:spcPts val="780"/>
+              </a:spcBef>
+              <a:buClr>
+                <a:srgbClr val="9C4422"/>
+              </a:buClr>
+              <a:buChar char="•"/>
+            </a:pPr>
+            <a:r>
+              <a:rPr sz="1300" b="0" i="0">
+                <a:solidFill>
+                  <a:srgbClr val="4A3F35"/>
+                </a:solidFill>
+                <a:latin typeface="Arial"/>
+                <a:ea typeface="Malgun Gothic"/>
+                <a:cs typeface="Arial"/>
+              </a:rPr>
+              <a:t>A failure blocks only that change</a:t>
+            </a:r>
+          </a:p>
+          <a:p>
+            <a:pPr algn="l" marL="181610" indent="-181610">
+              <a:lnSpc>
+                <a:spcPct val="120000"/>
+              </a:lnSpc>
+              <a:spcBef>
+                <a:spcPts val="780"/>
+              </a:spcBef>
+              <a:buClr>
+                <a:srgbClr val="9C4422"/>
+              </a:buClr>
+              <a:buChar char="•"/>
+            </a:pPr>
+            <a:r>
+              <a:rPr sz="1300" b="0" i="0">
+                <a:solidFill>
+                  <a:srgbClr val="4A3F35"/>
+                </a:solidFill>
+                <a:latin typeface="Arial"/>
+                <a:ea typeface="Malgun Gothic"/>
+                <a:cs typeface="Arial"/>
+              </a:rPr>
+              <a:t>The author fixes it while the context is fresh</a:t>
+            </a:r>
+          </a:p>
+        </p:txBody>
+      </p:sp>
+      <p:sp>
+        <p:nvSpPr>
+          <p:cNvPr id="8" name="TextBox 7"/>
+          <p:cNvSpPr txBox="1"/>
+          <p:nvPr/>
+        </p:nvSpPr>
+        <p:spPr>
+          <a:xfrm>
+            <a:off x="5753100" y="1422400"/>
+            <a:ext cx="685800" cy="1305559"/>
+          </a:xfrm>
+          <a:prstGeom prst="rect">
+            <a:avLst/>
+          </a:prstGeom>
+          <a:noFill/>
+        </p:spPr>
+        <p:txBody>
+          <a:bodyPr wrap="square" lIns="0" tIns="0" rIns="0" bIns="0" anchor="ctr">
+            <a:noAutofit/>
+          </a:bodyPr>
+          <a:lstStyle/>
+          <a:p>
+            <a:pPr algn="ctr">
+              <a:lnSpc>
+                <a:spcPct val="120000"/>
+              </a:lnSpc>
+            </a:pPr>
+            <a:r>
               <a:rPr sz="1600" b="0" i="0">
                 <a:solidFill>
-                  <a:srgbClr val="6B5E52"/>
+                  <a:srgbClr val="9C4422"/>
                 </a:solidFill>
                 <a:latin typeface="Arial"/>
                 <a:ea typeface="Malgun Gothic"/>
                 <a:cs typeface="Arial"/>
               </a:rPr>
-              <a:t>Build</a:t>
-            </a:r>
-          </a:p>
-        </p:txBody>
-      </p:sp>
-      <p:sp>
-        <p:nvSpPr>
-          <p:cNvPr id="7" name="TextBox 6"/>
-          <p:cNvSpPr txBox="1"/>
-          <p:nvPr/>
-        </p:nvSpPr>
-        <p:spPr>
-          <a:xfrm>
-            <a:off x="812800" y="2235708"/>
-            <a:ext cx="2298700" cy="475488"/>
-          </a:xfrm>
-          <a:prstGeom prst="rect">
-            <a:avLst/>
-          </a:prstGeom>
-          <a:noFill/>
-        </p:spPr>
-        <p:txBody>
-          <a:bodyPr wrap="square" lIns="0" tIns="0" rIns="0" bIns="0" anchor="t">
-            <a:noAutofit/>
-          </a:bodyPr>
-          <a:lstStyle/>
-          <a:p>
-            <a:pPr algn="l">
-              <a:lnSpc>
-                <a:spcPct val="120000"/>
-              </a:lnSpc>
-            </a:pPr>
-            <a:r>
-              <a:rPr sz="1300" b="0" i="0">
-                <a:solidFill>
-                  <a:srgbClr val="6B5E52"/>
-                </a:solidFill>
-                <a:latin typeface="Arial"/>
-                <a:ea typeface="Malgun Gothic"/>
-                <a:cs typeface="Arial"/>
-              </a:rPr>
-              <a:t>Compile and package exactly as the release does</a:t>
-            </a:r>
-          </a:p>
-        </p:txBody>
-      </p:sp>
-      <p:cxnSp>
-        <p:nvCxnSpPr>
-          <p:cNvPr id="8" name="Connector 7"/>
-          <p:cNvCxnSpPr/>
-          <p:nvPr/>
-        </p:nvCxnSpPr>
-        <p:spPr>
-          <a:xfrm>
-            <a:off x="3225800" y="1441450"/>
-            <a:ext cx="228600" cy="0"/>
-          </a:xfrm>
-          <a:prstGeom prst="line">
-            <a:avLst/>
-          </a:prstGeom>
-          <a:ln w="12700">
-            <a:solidFill>
-              <a:srgbClr val="6B5E52"/>
-            </a:solidFill>
-            <a:tailEnd type="triangle" w="med" len="med"/>
-          </a:ln>
-        </p:spPr>
-      </p:cxnSp>
-      <p:sp>
-        <p:nvSpPr>
-          <p:cNvPr id="9" name="Rectangle 8"/>
-          <p:cNvSpPr/>
-          <p:nvPr/>
-        </p:nvSpPr>
-        <p:spPr>
-          <a:xfrm>
-            <a:off x="3568700" y="1422400"/>
-            <a:ext cx="2298700" cy="38100"/>
-          </a:xfrm>
-          <a:prstGeom prst="rect">
-            <a:avLst/>
-          </a:prstGeom>
-          <a:solidFill>
-            <a:srgbClr val="E3DBD1"/>
-          </a:solidFill>
-          <a:ln>
-            <a:noFill/>
-          </a:ln>
-        </p:spPr>
-        <p:txBody>
-          <a:bodyPr rtlCol="0" anchor="ctr" wrap="square" lIns="76200" tIns="76200" rIns="76200" bIns="76200"/>
-          <a:lstStyle/>
-          <a:p>
-            <a:pPr algn="ctr"/>
-          </a:p>
-        </p:txBody>
-      </p:sp>
-      <p:sp>
-        <p:nvSpPr>
-          <p:cNvPr id="10" name="TextBox 9"/>
-          <p:cNvSpPr txBox="1"/>
-          <p:nvPr/>
-        </p:nvSpPr>
-        <p:spPr>
-          <a:xfrm>
-            <a:off x="3568700" y="1600200"/>
-            <a:ext cx="2298700" cy="190500"/>
-          </a:xfrm>
-          <a:prstGeom prst="rect">
-            <a:avLst/>
-          </a:prstGeom>
-          <a:noFill/>
-        </p:spPr>
-        <p:txBody>
-          <a:bodyPr wrap="square" lIns="0" tIns="0" rIns="0" bIns="0" anchor="t">
-            <a:noAutofit/>
-          </a:bodyPr>
-          <a:lstStyle/>
-          <a:p>
-            <a:pPr algn="l">
-              <a:lnSpc>
-                <a:spcPct val="120000"/>
-              </a:lnSpc>
-            </a:pPr>
-            <a:r>
-              <a:rPr sz="1000" b="0" i="0">
-                <a:solidFill>
-                  <a:srgbClr val="6B5E52"/>
-                </a:solidFill>
-                <a:latin typeface="Consolas"/>
-                <a:ea typeface="Malgun Gothic"/>
-                <a:cs typeface="Consolas"/>
-              </a:rPr>
-              <a:t>02</a:t>
-            </a:r>
-          </a:p>
-        </p:txBody>
-      </p:sp>
-      <p:sp>
-        <p:nvSpPr>
-          <p:cNvPr id="11" name="TextBox 10"/>
-          <p:cNvSpPr txBox="1"/>
-          <p:nvPr/>
-        </p:nvSpPr>
-        <p:spPr>
-          <a:xfrm>
-            <a:off x="3568700" y="1866900"/>
-            <a:ext cx="2298700" cy="292608"/>
-          </a:xfrm>
-          <a:prstGeom prst="rect">
-            <a:avLst/>
-          </a:prstGeom>
-          <a:noFill/>
-        </p:spPr>
-        <p:txBody>
-          <a:bodyPr wrap="square" lIns="0" tIns="0" rIns="0" bIns="0" anchor="t">
-            <a:noAutofit/>
-          </a:bodyPr>
-          <a:lstStyle/>
-          <a:p>
-            <a:pPr algn="l">
-              <a:lnSpc>
-                <a:spcPct val="120000"/>
-              </a:lnSpc>
-            </a:pPr>
-            <a:r>
-              <a:rPr sz="1600" b="0" i="0">
-                <a:solidFill>
-                  <a:srgbClr val="6B5E52"/>
-                </a:solidFill>
-                <a:latin typeface="Arial"/>
-                <a:ea typeface="Malgun Gothic"/>
-                <a:cs typeface="Arial"/>
-              </a:rPr>
-              <a:t>Contract tests</a:t>
-            </a:r>
-          </a:p>
-        </p:txBody>
-      </p:sp>
-      <p:sp>
-        <p:nvSpPr>
-          <p:cNvPr id="12" name="TextBox 11"/>
-          <p:cNvSpPr txBox="1"/>
-          <p:nvPr/>
-        </p:nvSpPr>
-        <p:spPr>
-          <a:xfrm>
-            <a:off x="3568700" y="2235708"/>
-            <a:ext cx="2298700" cy="475488"/>
-          </a:xfrm>
-          <a:prstGeom prst="rect">
-            <a:avLst/>
-          </a:prstGeom>
-          <a:noFill/>
-        </p:spPr>
-        <p:txBody>
-          <a:bodyPr wrap="square" lIns="0" tIns="0" rIns="0" bIns="0" anchor="t">
-            <a:noAutofit/>
-          </a:bodyPr>
-          <a:lstStyle/>
-          <a:p>
-            <a:pPr algn="l">
-              <a:lnSpc>
-                <a:spcPct val="120000"/>
-              </a:lnSpc>
-            </a:pPr>
-            <a:r>
-              <a:rPr sz="1300" b="0" i="0">
-                <a:solidFill>
-                  <a:srgbClr val="6B5E52"/>
-                </a:solidFill>
-                <a:latin typeface="Arial"/>
-                <a:ea typeface="Malgun Gothic"/>
-                <a:cs typeface="Arial"/>
-              </a:rPr>
-              <a:t>Verify public interfaces against consumers</a:t>
-            </a:r>
-          </a:p>
-        </p:txBody>
-      </p:sp>
-      <p:cxnSp>
-        <p:nvCxnSpPr>
-          <p:cNvPr id="13" name="Connector 12"/>
-          <p:cNvCxnSpPr/>
-          <p:nvPr/>
-        </p:nvCxnSpPr>
-        <p:spPr>
-          <a:xfrm>
-            <a:off x="5981700" y="1441450"/>
-            <a:ext cx="228600" cy="0"/>
-          </a:xfrm>
-          <a:prstGeom prst="line">
-            <a:avLst/>
-          </a:prstGeom>
-          <a:ln w="12700">
-            <a:solidFill>
-              <a:srgbClr val="6B5E52"/>
-            </a:solidFill>
-            <a:tailEnd type="triangle" w="med" len="med"/>
-          </a:ln>
-        </p:spPr>
-      </p:cxnSp>
-      <p:sp>
-        <p:nvSpPr>
-          <p:cNvPr id="14" name="Rectangle 13"/>
-          <p:cNvSpPr/>
-          <p:nvPr/>
-        </p:nvSpPr>
-        <p:spPr>
-          <a:xfrm>
-            <a:off x="6324600" y="1422400"/>
-            <a:ext cx="2298700" cy="38100"/>
-          </a:xfrm>
-          <a:prstGeom prst="rect">
-            <a:avLst/>
-          </a:prstGeom>
-          <a:solidFill>
-            <a:srgbClr val="9C4422"/>
-          </a:solidFill>
-          <a:ln>
-            <a:noFill/>
-          </a:ln>
-        </p:spPr>
-        <p:txBody>
-          <a:bodyPr rtlCol="0" anchor="ctr" wrap="square" lIns="76200" tIns="76200" rIns="76200" bIns="76200"/>
-          <a:lstStyle/>
-          <a:p>
-            <a:pPr algn="ctr"/>
-          </a:p>
-        </p:txBody>
-      </p:sp>
-      <p:sp>
-        <p:nvSpPr>
-          <p:cNvPr id="15" name="TextBox 14"/>
-          <p:cNvSpPr txBox="1"/>
-          <p:nvPr/>
-        </p:nvSpPr>
-        <p:spPr>
-          <a:xfrm>
-            <a:off x="6324600" y="1600200"/>
-            <a:ext cx="2298700" cy="190500"/>
-          </a:xfrm>
-          <a:prstGeom prst="rect">
-            <a:avLst/>
-          </a:prstGeom>
-          <a:noFill/>
-        </p:spPr>
-        <p:txBody>
-          <a:bodyPr wrap="square" lIns="0" tIns="0" rIns="0" bIns="0" anchor="t">
-            <a:noAutofit/>
-          </a:bodyPr>
-          <a:lstStyle/>
-          <a:p>
-            <a:pPr algn="l">
-              <a:lnSpc>
-                <a:spcPct val="120000"/>
-              </a:lnSpc>
-            </a:pPr>
-            <a:r>
-              <a:rPr sz="1000" b="0" i="0">
-                <a:solidFill>
-                  <a:srgbClr val="9C4422"/>
-                </a:solidFill>
-                <a:latin typeface="Consolas"/>
-                <a:ea typeface="Malgun Gothic"/>
-                <a:cs typeface="Consolas"/>
-              </a:rPr>
-              <a:t>03</a:t>
-            </a:r>
-          </a:p>
-        </p:txBody>
-      </p:sp>
-      <p:sp>
-        <p:nvSpPr>
-          <p:cNvPr id="16" name="TextBox 15"/>
-          <p:cNvSpPr txBox="1"/>
-          <p:nvPr/>
-        </p:nvSpPr>
-        <p:spPr>
-          <a:xfrm>
-            <a:off x="6324600" y="1866900"/>
-            <a:ext cx="2298700" cy="292608"/>
-          </a:xfrm>
-          <a:prstGeom prst="rect">
-            <a:avLst/>
-          </a:prstGeom>
-          <a:noFill/>
-        </p:spPr>
-        <p:txBody>
-          <a:bodyPr wrap="square" lIns="0" tIns="0" rIns="0" bIns="0" anchor="t">
-            <a:noAutofit/>
-          </a:bodyPr>
-          <a:lstStyle/>
-          <a:p>
-            <a:pPr algn="l">
-              <a:lnSpc>
-                <a:spcPct val="120000"/>
-              </a:lnSpc>
-            </a:pPr>
-            <a:r>
-              <a:rPr sz="1600" b="0" i="0">
-                <a:solidFill>
-                  <a:srgbClr val="2B2118"/>
-                </a:solidFill>
-                <a:latin typeface="Arial"/>
-                <a:ea typeface="Malgun Gothic"/>
-                <a:cs typeface="Arial"/>
-              </a:rPr>
-              <a:t>Migration dry run</a:t>
-            </a:r>
-          </a:p>
-        </p:txBody>
-      </p:sp>
-      <p:sp>
-        <p:nvSpPr>
-          <p:cNvPr id="17" name="TextBox 16"/>
-          <p:cNvSpPr txBox="1"/>
-          <p:nvPr/>
-        </p:nvSpPr>
-        <p:spPr>
-          <a:xfrm>
-            <a:off x="6324600" y="2235708"/>
-            <a:ext cx="2298700" cy="475488"/>
-          </a:xfrm>
-          <a:prstGeom prst="rect">
-            <a:avLst/>
-          </a:prstGeom>
-          <a:noFill/>
-        </p:spPr>
-        <p:txBody>
-          <a:bodyPr wrap="square" lIns="0" tIns="0" rIns="0" bIns="0" anchor="t">
-            <a:noAutofit/>
-          </a:bodyPr>
-          <a:lstStyle/>
-          <a:p>
-            <a:pPr algn="l">
-              <a:lnSpc>
-                <a:spcPct val="120000"/>
-              </a:lnSpc>
-            </a:pPr>
-            <a:r>
-              <a:rPr sz="1300" b="0" i="0">
-                <a:solidFill>
-                  <a:srgbClr val="4A3F35"/>
-                </a:solidFill>
-                <a:latin typeface="Arial"/>
-                <a:ea typeface="Malgun Gothic"/>
-                <a:cs typeface="Arial"/>
-              </a:rPr>
-              <a:t>Apply schema changes to a production snapshot</a:t>
-            </a:r>
-          </a:p>
-        </p:txBody>
-      </p:sp>
-      <p:cxnSp>
-        <p:nvCxnSpPr>
-          <p:cNvPr id="18" name="Connector 17"/>
-          <p:cNvCxnSpPr/>
-          <p:nvPr/>
-        </p:nvCxnSpPr>
-        <p:spPr>
-          <a:xfrm>
-            <a:off x="8737600" y="1441450"/>
-            <a:ext cx="228600" cy="0"/>
-          </a:xfrm>
-          <a:prstGeom prst="line">
-            <a:avLst/>
-          </a:prstGeom>
-          <a:ln w="12700">
-            <a:solidFill>
-              <a:srgbClr val="6B5E52"/>
-            </a:solidFill>
-            <a:tailEnd type="triangle" w="med" len="med"/>
-          </a:ln>
-        </p:spPr>
-      </p:cxnSp>
-      <p:sp>
-        <p:nvSpPr>
-          <p:cNvPr id="19" name="Rectangle 18"/>
-          <p:cNvSpPr/>
-          <p:nvPr/>
-        </p:nvSpPr>
-        <p:spPr>
-          <a:xfrm>
-            <a:off x="9080500" y="1422400"/>
-            <a:ext cx="2298700" cy="38100"/>
-          </a:xfrm>
-          <a:prstGeom prst="rect">
-            <a:avLst/>
-          </a:prstGeom>
-          <a:solidFill>
-            <a:srgbClr val="E3DBD1"/>
-          </a:solidFill>
-          <a:ln>
-            <a:noFill/>
-          </a:ln>
-        </p:spPr>
-        <p:txBody>
-          <a:bodyPr rtlCol="0" anchor="ctr" wrap="square" lIns="76200" tIns="76200" rIns="76200" bIns="76200"/>
-          <a:lstStyle/>
-          <a:p>
-            <a:pPr algn="ctr"/>
-          </a:p>
-        </p:txBody>
-      </p:sp>
-      <p:sp>
-        <p:nvSpPr>
-          <p:cNvPr id="20" name="TextBox 19"/>
-          <p:cNvSpPr txBox="1"/>
-          <p:nvPr/>
-        </p:nvSpPr>
-        <p:spPr>
-          <a:xfrm>
-            <a:off x="9080500" y="1600200"/>
-            <a:ext cx="2298700" cy="190500"/>
-          </a:xfrm>
-          <a:prstGeom prst="rect">
-            <a:avLst/>
-          </a:prstGeom>
-          <a:noFill/>
-        </p:spPr>
-        <p:txBody>
-          <a:bodyPr wrap="square" lIns="0" tIns="0" rIns="0" bIns="0" anchor="t">
-            <a:noAutofit/>
-          </a:bodyPr>
-          <a:lstStyle/>
-          <a:p>
-            <a:pPr algn="l">
-              <a:lnSpc>
-                <a:spcPct val="120000"/>
-              </a:lnSpc>
-            </a:pPr>
-            <a:r>
-              <a:rPr sz="1000" b="0" i="0">
-                <a:solidFill>
-                  <a:srgbClr val="6B5E52"/>
-                </a:solidFill>
-                <a:latin typeface="Consolas"/>
-                <a:ea typeface="Malgun Gothic"/>
-                <a:cs typeface="Consolas"/>
-              </a:rPr>
-              <a:t>04</a:t>
-            </a:r>
-          </a:p>
-        </p:txBody>
-      </p:sp>
-      <p:sp>
-        <p:nvSpPr>
-          <p:cNvPr id="21" name="TextBox 20"/>
-          <p:cNvSpPr txBox="1"/>
-          <p:nvPr/>
-        </p:nvSpPr>
-        <p:spPr>
-          <a:xfrm>
-            <a:off x="9080500" y="1866900"/>
-            <a:ext cx="2298700" cy="292608"/>
-          </a:xfrm>
-          <a:prstGeom prst="rect">
-            <a:avLst/>
-          </a:prstGeom>
-          <a:noFill/>
-        </p:spPr>
-        <p:txBody>
-          <a:bodyPr wrap="square" lIns="0" tIns="0" rIns="0" bIns="0" anchor="t">
-            <a:noAutofit/>
-          </a:bodyPr>
-          <a:lstStyle/>
-          <a:p>
-            <a:pPr algn="l">
-              <a:lnSpc>
-                <a:spcPct val="120000"/>
-              </a:lnSpc>
-            </a:pPr>
-            <a:r>
-              <a:rPr sz="1600" b="0" i="0">
-                <a:solidFill>
-                  <a:srgbClr val="6B5E52"/>
-                </a:solidFill>
-                <a:latin typeface="Arial"/>
-                <a:ea typeface="Malgun Gothic"/>
-                <a:cs typeface="Arial"/>
-              </a:rPr>
-              <a:t>Review</a:t>
-            </a:r>
-          </a:p>
-        </p:txBody>
-      </p:sp>
-      <p:sp>
-        <p:nvSpPr>
-          <p:cNvPr id="22" name="TextBox 21"/>
-          <p:cNvSpPr txBox="1"/>
-          <p:nvPr/>
-        </p:nvSpPr>
-        <p:spPr>
-          <a:xfrm>
-            <a:off x="9080500" y="2235708"/>
-            <a:ext cx="2298700" cy="475488"/>
-          </a:xfrm>
-          <a:prstGeom prst="rect">
-            <a:avLst/>
-          </a:prstGeom>
-          <a:noFill/>
-        </p:spPr>
-        <p:txBody>
-          <a:bodyPr wrap="square" lIns="0" tIns="0" rIns="0" bIns="0" anchor="t">
-            <a:noAutofit/>
-          </a:bodyPr>
-          <a:lstStyle/>
-          <a:p>
-            <a:pPr algn="l">
-              <a:lnSpc>
-                <a:spcPct val="120000"/>
-              </a:lnSpc>
-            </a:pPr>
-            <a:r>
-              <a:rPr sz="1300" b="0" i="0">
-                <a:solidFill>
-                  <a:srgbClr val="6B5E52"/>
-                </a:solidFill>
-                <a:latin typeface="Arial"/>
-                <a:ea typeface="Malgun Gothic"/>
-                <a:cs typeface="Arial"/>
-              </a:rPr>
-              <a:t>Merge only when all three checks pass</a:t>
-            </a:r>
-          </a:p>
-        </p:txBody>
-      </p:sp>
-      <p:sp>
-        <p:nvSpPr>
-          <p:cNvPr id="23" name="Footer"/>
+              <a:t>→</a:t>
+            </a:r>
+          </a:p>
+        </p:txBody>
+      </p:sp>
+      <p:sp>
+        <p:nvSpPr>
+          <p:cNvPr id="9" name="Footer"/>
           <p:cNvSpPr txBox="1"/>
           <p:nvPr/>
         </p:nvSpPr>
@@ -12012,7 +12779,7 @@
       </p:sp>
       <p:sp>
         <p:nvSpPr>
-          <p:cNvPr id="24" name="Page number"/>
+          <p:cNvPr id="10" name="Page number"/>
           <p:cNvSpPr txBox="1"/>
           <p:nvPr/>
         </p:nvSpPr>
@@ -12154,21 +12921,50 @@
                 <a:ea typeface="Malgun Gothic"/>
                 <a:cs typeface="Georgia"/>
               </a:rPr>
-              <a:t>Checks run in an isolated runner, never against production</a:t>
-            </a:r>
-          </a:p>
-        </p:txBody>
-      </p:sp>
-      <p:sp>
-        <p:nvSpPr>
-          <p:cNvPr id="4" name="TextBox 3"/>
-          <p:cNvSpPr txBox="1"/>
-          <p:nvPr/>
-        </p:nvSpPr>
-        <p:spPr>
-          <a:xfrm>
-            <a:off x="812800" y="5680456"/>
-            <a:ext cx="10566400" cy="237744"/>
+              <a:t>A pull request passes four gates before merge</a:t>
+            </a:r>
+          </a:p>
+        </p:txBody>
+      </p:sp>
+      <p:sp>
+        <p:nvSpPr>
+          <p:cNvPr id="4" name="Rectangle 3"/>
+          <p:cNvSpPr/>
+          <p:nvPr/>
+        </p:nvSpPr>
+        <p:spPr>
+          <a:xfrm>
+            <a:off x="812800" y="1422400"/>
+            <a:ext cx="2298700" cy="38100"/>
+          </a:xfrm>
+          <a:prstGeom prst="rect">
+            <a:avLst/>
+          </a:prstGeom>
+          <a:solidFill>
+            <a:srgbClr val="E3DBD1"/>
+          </a:solidFill>
+          <a:ln>
+            <a:noFill/>
+          </a:ln>
+        </p:spPr>
+        <p:txBody>
+          <a:bodyPr rtlCol="0" anchor="ctr" wrap="square" lIns="76200" tIns="76200" rIns="76200" bIns="76200"/>
+          <a:lstStyle/>
+          <a:p>
+            <a:pPr algn="ctr"/>
+          </a:p>
+        </p:txBody>
+      </p:sp>
+      <p:sp>
+        <p:nvSpPr>
+          <p:cNvPr id="5" name="TextBox 4"/>
+          <p:cNvSpPr txBox="1"/>
+          <p:nvPr/>
+        </p:nvSpPr>
+        <p:spPr>
+          <a:xfrm>
+            <a:off x="812800" y="1600200"/>
+            <a:ext cx="2298700" cy="190500"/>
           </a:xfrm>
           <a:prstGeom prst="rect">
             <a:avLst/>
@@ -12187,6 +12983,88 @@
               </a:lnSpc>
             </a:pPr>
             <a:r>
+              <a:rPr sz="1000" b="0" i="0">
+                <a:solidFill>
+                  <a:srgbClr val="6B5E52"/>
+                </a:solidFill>
+                <a:latin typeface="Consolas"/>
+                <a:ea typeface="Malgun Gothic"/>
+                <a:cs typeface="Consolas"/>
+              </a:rPr>
+              <a:t>01</a:t>
+            </a:r>
+          </a:p>
+        </p:txBody>
+      </p:sp>
+      <p:sp>
+        <p:nvSpPr>
+          <p:cNvPr id="6" name="TextBox 5"/>
+          <p:cNvSpPr txBox="1"/>
+          <p:nvPr/>
+        </p:nvSpPr>
+        <p:spPr>
+          <a:xfrm>
+            <a:off x="812800" y="1866900"/>
+            <a:ext cx="2298700" cy="292608"/>
+          </a:xfrm>
+          <a:prstGeom prst="rect">
+            <a:avLst/>
+          </a:prstGeom>
+          <a:noFill/>
+        </p:spPr>
+        <p:txBody>
+          <a:bodyPr wrap="square" lIns="0" tIns="0" rIns="0" bIns="0" anchor="t">
+            <a:noAutofit/>
+          </a:bodyPr>
+          <a:lstStyle/>
+          <a:p>
+            <a:pPr algn="l">
+              <a:lnSpc>
+                <a:spcPct val="120000"/>
+              </a:lnSpc>
+            </a:pPr>
+            <a:r>
+              <a:rPr sz="1600" b="0" i="0">
+                <a:solidFill>
+                  <a:srgbClr val="6B5E52"/>
+                </a:solidFill>
+                <a:latin typeface="Arial"/>
+                <a:ea typeface="Malgun Gothic"/>
+                <a:cs typeface="Arial"/>
+              </a:rPr>
+              <a:t>Build</a:t>
+            </a:r>
+          </a:p>
+        </p:txBody>
+      </p:sp>
+      <p:sp>
+        <p:nvSpPr>
+          <p:cNvPr id="7" name="TextBox 6"/>
+          <p:cNvSpPr txBox="1"/>
+          <p:nvPr/>
+        </p:nvSpPr>
+        <p:spPr>
+          <a:xfrm>
+            <a:off x="812800" y="2235708"/>
+            <a:ext cx="2298700" cy="475488"/>
+          </a:xfrm>
+          <a:prstGeom prst="rect">
+            <a:avLst/>
+          </a:prstGeom>
+          <a:noFill/>
+        </p:spPr>
+        <p:txBody>
+          <a:bodyPr wrap="square" lIns="0" tIns="0" rIns="0" bIns="0" anchor="t">
+            <a:noAutofit/>
+          </a:bodyPr>
+          <a:lstStyle/>
+          <a:p>
+            <a:pPr algn="l">
+              <a:lnSpc>
+                <a:spcPct val="120000"/>
+              </a:lnSpc>
+            </a:pPr>
+            <a:r>
               <a:rPr sz="1300" b="0" i="0">
                 <a:solidFill>
                   <a:srgbClr val="6B5E52"/>
@@ -12195,569 +13073,21 @@
                 <a:ea typeface="Malgun Gothic"/>
                 <a:cs typeface="Arial"/>
               </a:rPr>
-              <a:t>The runner reads a masked snapshot; it holds no production credentials.</a:t>
-            </a:r>
-          </a:p>
-        </p:txBody>
-      </p:sp>
-      <p:sp>
-        <p:nvSpPr>
-          <p:cNvPr id="5" name="Group CI environment"/>
-          <p:cNvSpPr/>
-          <p:nvPr/>
-        </p:nvSpPr>
-        <p:spPr>
-          <a:xfrm>
-            <a:off x="3505200" y="1473200"/>
-            <a:ext cx="5181600" cy="3505200"/>
-          </a:xfrm>
-          <a:prstGeom prst="roundRect">
-            <a:avLst>
-              <a:gd name="adj" fmla="val 2173"/>
-            </a:avLst>
-          </a:prstGeom>
-          <a:noFill/>
-          <a:ln w="9525">
-            <a:solidFill>
-              <a:srgbClr val="9C8F82"/>
-            </a:solidFill>
-          </a:ln>
-        </p:spPr>
-        <p:txBody>
-          <a:bodyPr rtlCol="0" anchor="ctr" wrap="square" lIns="76200" tIns="76200" rIns="76200" bIns="76200"/>
-          <a:lstStyle/>
-          <a:p>
-            <a:pPr algn="ctr"/>
-          </a:p>
-        </p:txBody>
-      </p:sp>
-      <p:sp>
-        <p:nvSpPr>
-          <p:cNvPr id="6" name="TextBox 5"/>
-          <p:cNvSpPr txBox="1"/>
-          <p:nvPr/>
-        </p:nvSpPr>
-        <p:spPr>
-          <a:xfrm>
-            <a:off x="3606800" y="1536700"/>
-            <a:ext cx="4978400" cy="190500"/>
-          </a:xfrm>
-          <a:prstGeom prst="rect">
-            <a:avLst/>
-          </a:prstGeom>
-          <a:noFill/>
-        </p:spPr>
-        <p:txBody>
-          <a:bodyPr wrap="square" lIns="0" tIns="0" rIns="0" bIns="0" anchor="t">
-            <a:noAutofit/>
-          </a:bodyPr>
-          <a:lstStyle/>
-          <a:p>
-            <a:pPr algn="l">
-              <a:lnSpc>
-                <a:spcPct val="120000"/>
-              </a:lnSpc>
-            </a:pPr>
-            <a:r>
-              <a:rPr sz="1000" b="0" i="0">
-                <a:solidFill>
-                  <a:srgbClr val="6B5E52"/>
-                </a:solidFill>
-                <a:latin typeface="Consolas"/>
-                <a:ea typeface="Malgun Gothic"/>
-                <a:cs typeface="Consolas"/>
-              </a:rPr>
-              <a:t>CI environment</a:t>
-            </a:r>
-          </a:p>
-        </p:txBody>
-      </p:sp>
-      <p:sp>
-        <p:nvSpPr>
-          <p:cNvPr id="7" name="Node pr"/>
-          <p:cNvSpPr/>
-          <p:nvPr/>
-        </p:nvSpPr>
-        <p:spPr>
-          <a:xfrm>
-            <a:off x="1288288" y="1955800"/>
-            <a:ext cx="1690624" cy="736600"/>
-          </a:xfrm>
-          <a:prstGeom prst="roundRect">
-            <a:avLst>
-              <a:gd name="adj" fmla="val 10344"/>
-            </a:avLst>
-          </a:prstGeom>
-          <a:solidFill>
-            <a:srgbClr val="FFFCF7"/>
-          </a:solidFill>
-          <a:ln w="9525">
-            <a:solidFill>
-              <a:srgbClr val="6B5E52"/>
-            </a:solidFill>
-            <a:prstDash val="dash"/>
-          </a:ln>
-        </p:spPr>
-        <p:txBody>
-          <a:bodyPr rtlCol="0" anchor="ctr" wrap="square" lIns="76200" tIns="76200" rIns="76200" bIns="76200"/>
-          <a:lstStyle/>
-          <a:p>
-            <a:pPr algn="ctr"/>
-          </a:p>
-        </p:txBody>
-      </p:sp>
-      <p:sp>
-        <p:nvSpPr>
-          <p:cNvPr id="8" name="Label pr"/>
-          <p:cNvSpPr txBox="1"/>
-          <p:nvPr/>
-        </p:nvSpPr>
-        <p:spPr>
-          <a:xfrm>
-            <a:off x="1389888" y="1955800"/>
-            <a:ext cx="1487424" cy="736600"/>
-          </a:xfrm>
-          <a:prstGeom prst="rect">
-            <a:avLst/>
-          </a:prstGeom>
-          <a:noFill/>
-        </p:spPr>
-        <p:txBody>
-          <a:bodyPr wrap="square" lIns="0" tIns="0" rIns="0" bIns="0" anchor="ctr">
-            <a:noAutofit/>
-          </a:bodyPr>
-          <a:lstStyle/>
-          <a:p>
-            <a:pPr algn="ctr">
-              <a:lnSpc>
-                <a:spcPct val="120000"/>
-              </a:lnSpc>
-            </a:pPr>
-            <a:r>
-              <a:rPr sz="1300" b="0" i="0">
-                <a:solidFill>
-                  <a:srgbClr val="2B2118"/>
-                </a:solidFill>
-                <a:latin typeface="Arial"/>
-                <a:ea typeface="Malgun Gothic"/>
-                <a:cs typeface="Arial"/>
-              </a:rPr>
-              <a:t>Pull request</a:t>
-            </a:r>
-          </a:p>
-        </p:txBody>
-      </p:sp>
-      <p:sp>
-        <p:nvSpPr>
-          <p:cNvPr id="9" name="Node runner"/>
-          <p:cNvSpPr/>
-          <p:nvPr/>
-        </p:nvSpPr>
-        <p:spPr>
-          <a:xfrm>
-            <a:off x="3929888" y="1955800"/>
-            <a:ext cx="1690624" cy="736600"/>
-          </a:xfrm>
-          <a:prstGeom prst="roundRect">
-            <a:avLst>
-              <a:gd name="adj" fmla="val 10344"/>
-            </a:avLst>
-          </a:prstGeom>
-          <a:solidFill>
-            <a:srgbClr val="F5ECE9"/>
-          </a:solidFill>
-          <a:ln w="15875">
-            <a:solidFill>
-              <a:srgbClr val="9C4422"/>
-            </a:solidFill>
-          </a:ln>
-        </p:spPr>
-        <p:txBody>
-          <a:bodyPr rtlCol="0" anchor="ctr" wrap="square" lIns="76200" tIns="76200" rIns="76200" bIns="76200"/>
-          <a:lstStyle/>
-          <a:p>
-            <a:pPr algn="ctr"/>
-          </a:p>
-        </p:txBody>
-      </p:sp>
-      <p:sp>
-        <p:nvSpPr>
-          <p:cNvPr id="10" name="Label runner"/>
-          <p:cNvSpPr txBox="1"/>
-          <p:nvPr/>
-        </p:nvSpPr>
-        <p:spPr>
-          <a:xfrm>
-            <a:off x="4031488" y="1955800"/>
-            <a:ext cx="1487424" cy="736600"/>
-          </a:xfrm>
-          <a:prstGeom prst="rect">
-            <a:avLst/>
-          </a:prstGeom>
-          <a:noFill/>
-        </p:spPr>
-        <p:txBody>
-          <a:bodyPr wrap="square" lIns="0" tIns="0" rIns="0" bIns="0" anchor="ctr">
-            <a:noAutofit/>
-          </a:bodyPr>
-          <a:lstStyle/>
-          <a:p>
-            <a:pPr algn="ctr">
-              <a:lnSpc>
-                <a:spcPct val="120000"/>
-              </a:lnSpc>
-            </a:pPr>
-            <a:r>
-              <a:rPr sz="1300" b="0" i="0">
-                <a:solidFill>
-                  <a:srgbClr val="2B2118"/>
-                </a:solidFill>
-                <a:latin typeface="Arial"/>
-                <a:ea typeface="Malgun Gothic"/>
-                <a:cs typeface="Arial"/>
-              </a:rPr>
-              <a:t>Check runner</a:t>
-            </a:r>
-          </a:p>
-          <a:p>
-            <a:pPr algn="ctr">
-              <a:lnSpc>
-                <a:spcPct val="120000"/>
-              </a:lnSpc>
-            </a:pPr>
-            <a:r>
-              <a:rPr sz="1300" b="0" i="0">
-                <a:solidFill>
-                  <a:srgbClr val="2B2118"/>
-                </a:solidFill>
-                <a:latin typeface="Arial"/>
-                <a:ea typeface="Malgun Gothic"/>
-                <a:cs typeface="Arial"/>
-              </a:rPr>
-              <a:t>isolated</a:t>
-            </a:r>
-          </a:p>
-        </p:txBody>
-      </p:sp>
-      <p:sp>
-        <p:nvSpPr>
-          <p:cNvPr id="11" name="Node snap"/>
-          <p:cNvSpPr/>
-          <p:nvPr/>
-        </p:nvSpPr>
-        <p:spPr>
-          <a:xfrm>
-            <a:off x="6571488" y="1955800"/>
-            <a:ext cx="1690624" cy="736600"/>
-          </a:xfrm>
-          <a:prstGeom prst="can">
-            <a:avLst/>
-          </a:prstGeom>
-          <a:solidFill>
-            <a:srgbClr val="FFFCF7"/>
-          </a:solidFill>
-          <a:ln w="9525">
-            <a:solidFill>
-              <a:srgbClr val="6B5E52"/>
-            </a:solidFill>
-          </a:ln>
-        </p:spPr>
-        <p:txBody>
-          <a:bodyPr rtlCol="0" anchor="ctr" wrap="square" lIns="76200" tIns="76200" rIns="76200" bIns="76200"/>
-          <a:lstStyle/>
-          <a:p>
-            <a:pPr algn="ctr"/>
-          </a:p>
-        </p:txBody>
-      </p:sp>
-      <p:sp>
-        <p:nvSpPr>
-          <p:cNvPr id="12" name="Label snap"/>
-          <p:cNvSpPr txBox="1"/>
-          <p:nvPr/>
-        </p:nvSpPr>
-        <p:spPr>
-          <a:xfrm>
-            <a:off x="6673088" y="1955800"/>
-            <a:ext cx="1487424" cy="736600"/>
-          </a:xfrm>
-          <a:prstGeom prst="rect">
-            <a:avLst/>
-          </a:prstGeom>
-          <a:noFill/>
-        </p:spPr>
-        <p:txBody>
-          <a:bodyPr wrap="square" lIns="0" tIns="0" rIns="0" bIns="0" anchor="ctr">
-            <a:noAutofit/>
-          </a:bodyPr>
-          <a:lstStyle/>
-          <a:p>
-            <a:pPr algn="ctr">
-              <a:lnSpc>
-                <a:spcPct val="120000"/>
-              </a:lnSpc>
-            </a:pPr>
-            <a:r>
-              <a:rPr sz="1300" b="0" i="0">
-                <a:solidFill>
-                  <a:srgbClr val="2B2118"/>
-                </a:solidFill>
-                <a:latin typeface="Arial"/>
-                <a:ea typeface="Malgun Gothic"/>
-                <a:cs typeface="Arial"/>
-              </a:rPr>
-              <a:t>Snapshot DB</a:t>
-            </a:r>
-          </a:p>
-          <a:p>
-            <a:pPr algn="ctr">
-              <a:lnSpc>
-                <a:spcPct val="120000"/>
-              </a:lnSpc>
-            </a:pPr>
-            <a:r>
-              <a:rPr sz="1300" b="0" i="0">
-                <a:solidFill>
-                  <a:srgbClr val="2B2118"/>
-                </a:solidFill>
-                <a:latin typeface="Arial"/>
-                <a:ea typeface="Malgun Gothic"/>
-                <a:cs typeface="Arial"/>
-              </a:rPr>
-              <a:t>masked copy</a:t>
-            </a:r>
-          </a:p>
-        </p:txBody>
-      </p:sp>
-      <p:sp>
-        <p:nvSpPr>
-          <p:cNvPr id="13" name="Node report"/>
-          <p:cNvSpPr/>
-          <p:nvPr/>
-        </p:nvSpPr>
-        <p:spPr>
-          <a:xfrm>
-            <a:off x="3929888" y="3759200"/>
-            <a:ext cx="1690624" cy="736600"/>
-          </a:xfrm>
-          <a:prstGeom prst="roundRect">
-            <a:avLst>
-              <a:gd name="adj" fmla="val 10344"/>
-            </a:avLst>
-          </a:prstGeom>
-          <a:solidFill>
-            <a:srgbClr val="FFFCF7"/>
-          </a:solidFill>
-          <a:ln w="9525">
-            <a:solidFill>
-              <a:srgbClr val="6B5E52"/>
-            </a:solidFill>
-          </a:ln>
-        </p:spPr>
-        <p:txBody>
-          <a:bodyPr rtlCol="0" anchor="ctr" wrap="square" lIns="76200" tIns="76200" rIns="76200" bIns="76200"/>
-          <a:lstStyle/>
-          <a:p>
-            <a:pPr algn="ctr"/>
-          </a:p>
-        </p:txBody>
-      </p:sp>
-      <p:sp>
-        <p:nvSpPr>
-          <p:cNvPr id="14" name="Label report"/>
-          <p:cNvSpPr txBox="1"/>
-          <p:nvPr/>
-        </p:nvSpPr>
-        <p:spPr>
-          <a:xfrm>
-            <a:off x="4031488" y="3759200"/>
-            <a:ext cx="1487424" cy="736600"/>
-          </a:xfrm>
-          <a:prstGeom prst="rect">
-            <a:avLst/>
-          </a:prstGeom>
-          <a:noFill/>
-        </p:spPr>
-        <p:txBody>
-          <a:bodyPr wrap="square" lIns="0" tIns="0" rIns="0" bIns="0" anchor="ctr">
-            <a:noAutofit/>
-          </a:bodyPr>
-          <a:lstStyle/>
-          <a:p>
-            <a:pPr algn="ctr">
-              <a:lnSpc>
-                <a:spcPct val="120000"/>
-              </a:lnSpc>
-            </a:pPr>
-            <a:r>
-              <a:rPr sz="1300" b="0" i="0">
-                <a:solidFill>
-                  <a:srgbClr val="2B2118"/>
-                </a:solidFill>
-                <a:latin typeface="Arial"/>
-                <a:ea typeface="Malgun Gothic"/>
-                <a:cs typeface="Arial"/>
-              </a:rPr>
-              <a:t>Check report</a:t>
-            </a:r>
-          </a:p>
-        </p:txBody>
-      </p:sp>
-      <p:sp>
-        <p:nvSpPr>
-          <p:cNvPr id="15" name="Node merge"/>
-          <p:cNvSpPr/>
-          <p:nvPr/>
-        </p:nvSpPr>
-        <p:spPr>
-          <a:xfrm>
-            <a:off x="9213088" y="3759200"/>
-            <a:ext cx="1690624" cy="736600"/>
-          </a:xfrm>
-          <a:prstGeom prst="roundRect">
-            <a:avLst>
-              <a:gd name="adj" fmla="val 10344"/>
-            </a:avLst>
-          </a:prstGeom>
-          <a:solidFill>
-            <a:srgbClr val="FFFCF7"/>
-          </a:solidFill>
-          <a:ln w="9525">
-            <a:solidFill>
-              <a:srgbClr val="6B5E52"/>
-            </a:solidFill>
-          </a:ln>
-        </p:spPr>
-        <p:txBody>
-          <a:bodyPr rtlCol="0" anchor="ctr" wrap="square" lIns="76200" tIns="76200" rIns="76200" bIns="76200"/>
-          <a:lstStyle/>
-          <a:p>
-            <a:pPr algn="ctr"/>
-          </a:p>
-        </p:txBody>
-      </p:sp>
-      <p:sp>
-        <p:nvSpPr>
-          <p:cNvPr id="16" name="Label merge"/>
-          <p:cNvSpPr txBox="1"/>
-          <p:nvPr/>
-        </p:nvSpPr>
-        <p:spPr>
-          <a:xfrm>
-            <a:off x="9314688" y="3759200"/>
-            <a:ext cx="1487424" cy="736600"/>
-          </a:xfrm>
-          <a:prstGeom prst="rect">
-            <a:avLst/>
-          </a:prstGeom>
-          <a:noFill/>
-        </p:spPr>
-        <p:txBody>
-          <a:bodyPr wrap="square" lIns="0" tIns="0" rIns="0" bIns="0" anchor="ctr">
-            <a:noAutofit/>
-          </a:bodyPr>
-          <a:lstStyle/>
-          <a:p>
-            <a:pPr algn="ctr">
-              <a:lnSpc>
-                <a:spcPct val="120000"/>
-              </a:lnSpc>
-            </a:pPr>
-            <a:r>
-              <a:rPr sz="1300" b="0" i="0">
-                <a:solidFill>
-                  <a:srgbClr val="2B2118"/>
-                </a:solidFill>
-                <a:latin typeface="Arial"/>
-                <a:ea typeface="Malgun Gothic"/>
-                <a:cs typeface="Arial"/>
-              </a:rPr>
-              <a:t>Merge gate</a:t>
+              <a:t>Compile and package exactly as the release does</a:t>
             </a:r>
           </a:p>
         </p:txBody>
       </p:sp>
       <p:cxnSp>
         <p:nvCxnSpPr>
-          <p:cNvPr id="17" name="Edge pr-runner"/>
-          <p:cNvCxnSpPr>
-            <a:stCxn id="7" idx="3"/>
-            <a:endCxn id="9" idx="1"/>
-          </p:cNvCxnSpPr>
+          <p:cNvPr id="8" name="Connector 7"/>
+          <p:cNvCxnSpPr/>
           <p:nvPr/>
         </p:nvCxnSpPr>
         <p:spPr>
-          <a:xfrm flipV="1">
-            <a:off x="2978912" y="2324100"/>
-            <a:ext cx="950976" cy="0"/>
-          </a:xfrm>
-          <a:prstGeom prst="line">
-            <a:avLst/>
-          </a:prstGeom>
-          <a:ln w="19050">
-            <a:solidFill>
-              <a:srgbClr val="9C4422"/>
-            </a:solidFill>
-            <a:tailEnd type="triangle" w="med" len="med"/>
-          </a:ln>
-        </p:spPr>
-      </p:cxnSp>
-      <p:sp>
-        <p:nvSpPr>
-          <p:cNvPr id="18" name="Edge label"/>
-          <p:cNvSpPr txBox="1"/>
-          <p:nvPr/>
-        </p:nvSpPr>
-        <p:spPr>
-          <a:xfrm>
-            <a:off x="3140837" y="2089150"/>
-            <a:ext cx="627126" cy="209550"/>
-          </a:xfrm>
-          <a:prstGeom prst="rect">
-            <a:avLst/>
-          </a:prstGeom>
-          <a:solidFill>
-            <a:srgbClr val="FFFCF7"/>
-          </a:solidFill>
-        </p:spPr>
-        <p:txBody>
-          <a:bodyPr wrap="square" lIns="12700" tIns="12700" rIns="12700" bIns="12700" anchor="ctr">
-            <a:noAutofit/>
-          </a:bodyPr>
-          <a:lstStyle/>
-          <a:p>
-            <a:pPr algn="ctr">
-              <a:lnSpc>
-                <a:spcPct val="120000"/>
-              </a:lnSpc>
-            </a:pPr>
-            <a:r>
-              <a:rPr sz="1100" b="0" i="0">
-                <a:solidFill>
-                  <a:srgbClr val="6B5E52"/>
-                </a:solidFill>
-                <a:latin typeface="Arial"/>
-                <a:ea typeface="Malgun Gothic"/>
-                <a:cs typeface="Arial"/>
-              </a:rPr>
-              <a:t>on push</a:t>
-            </a:r>
-          </a:p>
-        </p:txBody>
-      </p:sp>
-      <p:cxnSp>
-        <p:nvCxnSpPr>
-          <p:cNvPr id="19" name="Edge runner-snap"/>
-          <p:cNvCxnSpPr>
-            <a:stCxn id="9" idx="3"/>
-            <a:endCxn id="11" idx="1"/>
-          </p:cNvCxnSpPr>
-          <p:nvPr/>
-        </p:nvCxnSpPr>
-        <p:spPr>
-          <a:xfrm flipV="1">
-            <a:off x="5620512" y="2324100"/>
-            <a:ext cx="950976" cy="0"/>
+          <a:xfrm>
+            <a:off x="3225800" y="1441450"/>
+            <a:ext cx="228600" cy="0"/>
           </a:xfrm>
           <a:prstGeom prst="line">
             <a:avLst/>
@@ -12772,60 +13102,166 @@
       </p:cxnSp>
       <p:sp>
         <p:nvSpPr>
-          <p:cNvPr id="20" name="Edge label"/>
-          <p:cNvSpPr txBox="1"/>
-          <p:nvPr/>
-        </p:nvSpPr>
-        <p:spPr>
-          <a:xfrm>
-            <a:off x="5782437" y="2089150"/>
-            <a:ext cx="627126" cy="209550"/>
+          <p:cNvPr id="9" name="Rectangle 8"/>
+          <p:cNvSpPr/>
+          <p:nvPr/>
+        </p:nvSpPr>
+        <p:spPr>
+          <a:xfrm>
+            <a:off x="3568700" y="1422400"/>
+            <a:ext cx="2298700" cy="38100"/>
           </a:xfrm>
           <a:prstGeom prst="rect">
             <a:avLst/>
           </a:prstGeom>
           <a:solidFill>
-            <a:srgbClr val="FFFCF7"/>
+            <a:srgbClr val="E3DBD1"/>
           </a:solidFill>
-        </p:spPr>
-        <p:txBody>
-          <a:bodyPr wrap="square" lIns="12700" tIns="12700" rIns="12700" bIns="12700" anchor="ctr">
-            <a:noAutofit/>
-          </a:bodyPr>
-          <a:lstStyle/>
-          <a:p>
-            <a:pPr algn="ctr">
+          <a:ln>
+            <a:noFill/>
+          </a:ln>
+        </p:spPr>
+        <p:txBody>
+          <a:bodyPr rtlCol="0" anchor="ctr" wrap="square" lIns="76200" tIns="76200" rIns="76200" bIns="76200"/>
+          <a:lstStyle/>
+          <a:p>
+            <a:pPr algn="ctr"/>
+          </a:p>
+        </p:txBody>
+      </p:sp>
+      <p:sp>
+        <p:nvSpPr>
+          <p:cNvPr id="10" name="TextBox 9"/>
+          <p:cNvSpPr txBox="1"/>
+          <p:nvPr/>
+        </p:nvSpPr>
+        <p:spPr>
+          <a:xfrm>
+            <a:off x="3568700" y="1600200"/>
+            <a:ext cx="2298700" cy="190500"/>
+          </a:xfrm>
+          <a:prstGeom prst="rect">
+            <a:avLst/>
+          </a:prstGeom>
+          <a:noFill/>
+        </p:spPr>
+        <p:txBody>
+          <a:bodyPr wrap="square" lIns="0" tIns="0" rIns="0" bIns="0" anchor="t">
+            <a:noAutofit/>
+          </a:bodyPr>
+          <a:lstStyle/>
+          <a:p>
+            <a:pPr algn="l">
               <a:lnSpc>
                 <a:spcPct val="120000"/>
               </a:lnSpc>
             </a:pPr>
             <a:r>
-              <a:rPr sz="1100" b="0" i="0">
+              <a:rPr sz="1000" b="0" i="0">
                 <a:solidFill>
                   <a:srgbClr val="6B5E52"/>
                 </a:solidFill>
+                <a:latin typeface="Consolas"/>
+                <a:ea typeface="Malgun Gothic"/>
+                <a:cs typeface="Consolas"/>
+              </a:rPr>
+              <a:t>02</a:t>
+            </a:r>
+          </a:p>
+        </p:txBody>
+      </p:sp>
+      <p:sp>
+        <p:nvSpPr>
+          <p:cNvPr id="11" name="TextBox 10"/>
+          <p:cNvSpPr txBox="1"/>
+          <p:nvPr/>
+        </p:nvSpPr>
+        <p:spPr>
+          <a:xfrm>
+            <a:off x="3568700" y="1866900"/>
+            <a:ext cx="2298700" cy="292608"/>
+          </a:xfrm>
+          <a:prstGeom prst="rect">
+            <a:avLst/>
+          </a:prstGeom>
+          <a:noFill/>
+        </p:spPr>
+        <p:txBody>
+          <a:bodyPr wrap="square" lIns="0" tIns="0" rIns="0" bIns="0" anchor="t">
+            <a:noAutofit/>
+          </a:bodyPr>
+          <a:lstStyle/>
+          <a:p>
+            <a:pPr algn="l">
+              <a:lnSpc>
+                <a:spcPct val="120000"/>
+              </a:lnSpc>
+            </a:pPr>
+            <a:r>
+              <a:rPr sz="1600" b="0" i="0">
+                <a:solidFill>
+                  <a:srgbClr val="6B5E52"/>
+                </a:solidFill>
                 <a:latin typeface="Arial"/>
                 <a:ea typeface="Malgun Gothic"/>
                 <a:cs typeface="Arial"/>
               </a:rPr>
-              <a:t>dry run</a:t>
+              <a:t>Contract tests</a:t>
+            </a:r>
+          </a:p>
+        </p:txBody>
+      </p:sp>
+      <p:sp>
+        <p:nvSpPr>
+          <p:cNvPr id="12" name="TextBox 11"/>
+          <p:cNvSpPr txBox="1"/>
+          <p:nvPr/>
+        </p:nvSpPr>
+        <p:spPr>
+          <a:xfrm>
+            <a:off x="3568700" y="2235708"/>
+            <a:ext cx="2298700" cy="475488"/>
+          </a:xfrm>
+          <a:prstGeom prst="rect">
+            <a:avLst/>
+          </a:prstGeom>
+          <a:noFill/>
+        </p:spPr>
+        <p:txBody>
+          <a:bodyPr wrap="square" lIns="0" tIns="0" rIns="0" bIns="0" anchor="t">
+            <a:noAutofit/>
+          </a:bodyPr>
+          <a:lstStyle/>
+          <a:p>
+            <a:pPr algn="l">
+              <a:lnSpc>
+                <a:spcPct val="120000"/>
+              </a:lnSpc>
+            </a:pPr>
+            <a:r>
+              <a:rPr sz="1300" b="0" i="0">
+                <a:solidFill>
+                  <a:srgbClr val="6B5E52"/>
+                </a:solidFill>
+                <a:latin typeface="Arial"/>
+                <a:ea typeface="Malgun Gothic"/>
+                <a:cs typeface="Arial"/>
+              </a:rPr>
+              <a:t>Verify public interfaces against consumers</a:t>
             </a:r>
           </a:p>
         </p:txBody>
       </p:sp>
       <p:cxnSp>
         <p:nvCxnSpPr>
-          <p:cNvPr id="21" name="Edge runner-report"/>
-          <p:cNvCxnSpPr>
-            <a:stCxn id="9" idx="2"/>
-            <a:endCxn id="13" idx="0"/>
-          </p:cNvCxnSpPr>
+          <p:cNvPr id="13" name="Connector 12"/>
+          <p:cNvCxnSpPr/>
           <p:nvPr/>
         </p:nvCxnSpPr>
         <p:spPr>
-          <a:xfrm flipH="1">
-            <a:off x="4775200" y="2692400"/>
-            <a:ext cx="0" cy="1066800"/>
+          <a:xfrm>
+            <a:off x="5981700" y="1441450"/>
+            <a:ext cx="228600" cy="0"/>
           </a:xfrm>
           <a:prstGeom prst="line">
             <a:avLst/>
@@ -12838,19 +13274,168 @@
           </a:ln>
         </p:spPr>
       </p:cxnSp>
+      <p:sp>
+        <p:nvSpPr>
+          <p:cNvPr id="14" name="Rectangle 13"/>
+          <p:cNvSpPr/>
+          <p:nvPr/>
+        </p:nvSpPr>
+        <p:spPr>
+          <a:xfrm>
+            <a:off x="6324600" y="1422400"/>
+            <a:ext cx="2298700" cy="38100"/>
+          </a:xfrm>
+          <a:prstGeom prst="rect">
+            <a:avLst/>
+          </a:prstGeom>
+          <a:solidFill>
+            <a:srgbClr val="9C4422"/>
+          </a:solidFill>
+          <a:ln>
+            <a:noFill/>
+          </a:ln>
+        </p:spPr>
+        <p:txBody>
+          <a:bodyPr rtlCol="0" anchor="ctr" wrap="square" lIns="76200" tIns="76200" rIns="76200" bIns="76200"/>
+          <a:lstStyle/>
+          <a:p>
+            <a:pPr algn="ctr"/>
+          </a:p>
+        </p:txBody>
+      </p:sp>
+      <p:sp>
+        <p:nvSpPr>
+          <p:cNvPr id="15" name="TextBox 14"/>
+          <p:cNvSpPr txBox="1"/>
+          <p:nvPr/>
+        </p:nvSpPr>
+        <p:spPr>
+          <a:xfrm>
+            <a:off x="6324600" y="1600200"/>
+            <a:ext cx="2298700" cy="190500"/>
+          </a:xfrm>
+          <a:prstGeom prst="rect">
+            <a:avLst/>
+          </a:prstGeom>
+          <a:noFill/>
+        </p:spPr>
+        <p:txBody>
+          <a:bodyPr wrap="square" lIns="0" tIns="0" rIns="0" bIns="0" anchor="t">
+            <a:noAutofit/>
+          </a:bodyPr>
+          <a:lstStyle/>
+          <a:p>
+            <a:pPr algn="l">
+              <a:lnSpc>
+                <a:spcPct val="120000"/>
+              </a:lnSpc>
+            </a:pPr>
+            <a:r>
+              <a:rPr sz="1000" b="0" i="0">
+                <a:solidFill>
+                  <a:srgbClr val="9C4422"/>
+                </a:solidFill>
+                <a:latin typeface="Consolas"/>
+                <a:ea typeface="Malgun Gothic"/>
+                <a:cs typeface="Consolas"/>
+              </a:rPr>
+              <a:t>03</a:t>
+            </a:r>
+          </a:p>
+        </p:txBody>
+      </p:sp>
+      <p:sp>
+        <p:nvSpPr>
+          <p:cNvPr id="16" name="TextBox 15"/>
+          <p:cNvSpPr txBox="1"/>
+          <p:nvPr/>
+        </p:nvSpPr>
+        <p:spPr>
+          <a:xfrm>
+            <a:off x="6324600" y="1866900"/>
+            <a:ext cx="2298700" cy="292608"/>
+          </a:xfrm>
+          <a:prstGeom prst="rect">
+            <a:avLst/>
+          </a:prstGeom>
+          <a:noFill/>
+        </p:spPr>
+        <p:txBody>
+          <a:bodyPr wrap="square" lIns="0" tIns="0" rIns="0" bIns="0" anchor="t">
+            <a:noAutofit/>
+          </a:bodyPr>
+          <a:lstStyle/>
+          <a:p>
+            <a:pPr algn="l">
+              <a:lnSpc>
+                <a:spcPct val="120000"/>
+              </a:lnSpc>
+            </a:pPr>
+            <a:r>
+              <a:rPr sz="1600" b="0" i="0">
+                <a:solidFill>
+                  <a:srgbClr val="2B2118"/>
+                </a:solidFill>
+                <a:latin typeface="Arial"/>
+                <a:ea typeface="Malgun Gothic"/>
+                <a:cs typeface="Arial"/>
+              </a:rPr>
+              <a:t>Migration dry run</a:t>
+            </a:r>
+          </a:p>
+        </p:txBody>
+      </p:sp>
+      <p:sp>
+        <p:nvSpPr>
+          <p:cNvPr id="17" name="TextBox 16"/>
+          <p:cNvSpPr txBox="1"/>
+          <p:nvPr/>
+        </p:nvSpPr>
+        <p:spPr>
+          <a:xfrm>
+            <a:off x="6324600" y="2235708"/>
+            <a:ext cx="2298700" cy="475488"/>
+          </a:xfrm>
+          <a:prstGeom prst="rect">
+            <a:avLst/>
+          </a:prstGeom>
+          <a:noFill/>
+        </p:spPr>
+        <p:txBody>
+          <a:bodyPr wrap="square" lIns="0" tIns="0" rIns="0" bIns="0" anchor="t">
+            <a:noAutofit/>
+          </a:bodyPr>
+          <a:lstStyle/>
+          <a:p>
+            <a:pPr algn="l">
+              <a:lnSpc>
+                <a:spcPct val="120000"/>
+              </a:lnSpc>
+            </a:pPr>
+            <a:r>
+              <a:rPr sz="1300" b="0" i="0">
+                <a:solidFill>
+                  <a:srgbClr val="4A3F35"/>
+                </a:solidFill>
+                <a:latin typeface="Arial"/>
+                <a:ea typeface="Malgun Gothic"/>
+                <a:cs typeface="Arial"/>
+              </a:rPr>
+              <a:t>Apply schema changes to a production snapshot</a:t>
+            </a:r>
+          </a:p>
+        </p:txBody>
+      </p:sp>
       <p:cxnSp>
         <p:nvCxnSpPr>
-          <p:cNvPr id="22" name="Edge report-merge"/>
-          <p:cNvCxnSpPr>
-            <a:stCxn id="13" idx="3"/>
-            <a:endCxn id="15" idx="1"/>
-          </p:cNvCxnSpPr>
+          <p:cNvPr id="18" name="Connector 17"/>
+          <p:cNvCxnSpPr/>
           <p:nvPr/>
         </p:nvCxnSpPr>
         <p:spPr>
-          <a:xfrm flipV="1">
-            <a:off x="5620512" y="4127500"/>
-            <a:ext cx="3592576" cy="0"/>
+          <a:xfrm>
+            <a:off x="8737600" y="1441450"/>
+            <a:ext cx="228600" cy="0"/>
           </a:xfrm>
           <a:prstGeom prst="line">
             <a:avLst/>
@@ -12865,50 +13450,159 @@
       </p:cxnSp>
       <p:sp>
         <p:nvSpPr>
-          <p:cNvPr id="23" name="Edge label"/>
-          <p:cNvSpPr txBox="1"/>
-          <p:nvPr/>
-        </p:nvSpPr>
-        <p:spPr>
-          <a:xfrm>
-            <a:off x="7020814" y="3892550"/>
-            <a:ext cx="791972" cy="209550"/>
+          <p:cNvPr id="19" name="Rectangle 18"/>
+          <p:cNvSpPr/>
+          <p:nvPr/>
+        </p:nvSpPr>
+        <p:spPr>
+          <a:xfrm>
+            <a:off x="9080500" y="1422400"/>
+            <a:ext cx="2298700" cy="38100"/>
           </a:xfrm>
           <a:prstGeom prst="rect">
             <a:avLst/>
           </a:prstGeom>
           <a:solidFill>
-            <a:srgbClr val="FFFCF7"/>
+            <a:srgbClr val="E3DBD1"/>
           </a:solidFill>
-        </p:spPr>
-        <p:txBody>
-          <a:bodyPr wrap="square" lIns="12700" tIns="12700" rIns="12700" bIns="12700" anchor="ctr">
-            <a:noAutofit/>
-          </a:bodyPr>
-          <a:lstStyle/>
-          <a:p>
-            <a:pPr algn="ctr">
+          <a:ln>
+            <a:noFill/>
+          </a:ln>
+        </p:spPr>
+        <p:txBody>
+          <a:bodyPr rtlCol="0" anchor="ctr" wrap="square" lIns="76200" tIns="76200" rIns="76200" bIns="76200"/>
+          <a:lstStyle/>
+          <a:p>
+            <a:pPr algn="ctr"/>
+          </a:p>
+        </p:txBody>
+      </p:sp>
+      <p:sp>
+        <p:nvSpPr>
+          <p:cNvPr id="20" name="TextBox 19"/>
+          <p:cNvSpPr txBox="1"/>
+          <p:nvPr/>
+        </p:nvSpPr>
+        <p:spPr>
+          <a:xfrm>
+            <a:off x="9080500" y="1600200"/>
+            <a:ext cx="2298700" cy="190500"/>
+          </a:xfrm>
+          <a:prstGeom prst="rect">
+            <a:avLst/>
+          </a:prstGeom>
+          <a:noFill/>
+        </p:spPr>
+        <p:txBody>
+          <a:bodyPr wrap="square" lIns="0" tIns="0" rIns="0" bIns="0" anchor="t">
+            <a:noAutofit/>
+          </a:bodyPr>
+          <a:lstStyle/>
+          <a:p>
+            <a:pPr algn="l">
               <a:lnSpc>
                 <a:spcPct val="120000"/>
               </a:lnSpc>
             </a:pPr>
             <a:r>
-              <a:rPr sz="1100" b="0" i="0">
+              <a:rPr sz="1000" b="0" i="0">
                 <a:solidFill>
                   <a:srgbClr val="6B5E52"/>
                 </a:solidFill>
+                <a:latin typeface="Consolas"/>
+                <a:ea typeface="Malgun Gothic"/>
+                <a:cs typeface="Consolas"/>
+              </a:rPr>
+              <a:t>04</a:t>
+            </a:r>
+          </a:p>
+        </p:txBody>
+      </p:sp>
+      <p:sp>
+        <p:nvSpPr>
+          <p:cNvPr id="21" name="TextBox 20"/>
+          <p:cNvSpPr txBox="1"/>
+          <p:nvPr/>
+        </p:nvSpPr>
+        <p:spPr>
+          <a:xfrm>
+            <a:off x="9080500" y="1866900"/>
+            <a:ext cx="2298700" cy="292608"/>
+          </a:xfrm>
+          <a:prstGeom prst="rect">
+            <a:avLst/>
+          </a:prstGeom>
+          <a:noFill/>
+        </p:spPr>
+        <p:txBody>
+          <a:bodyPr wrap="square" lIns="0" tIns="0" rIns="0" bIns="0" anchor="t">
+            <a:noAutofit/>
+          </a:bodyPr>
+          <a:lstStyle/>
+          <a:p>
+            <a:pPr algn="l">
+              <a:lnSpc>
+                <a:spcPct val="120000"/>
+              </a:lnSpc>
+            </a:pPr>
+            <a:r>
+              <a:rPr sz="1600" b="0" i="0">
+                <a:solidFill>
+                  <a:srgbClr val="6B5E52"/>
+                </a:solidFill>
                 <a:latin typeface="Arial"/>
                 <a:ea typeface="Malgun Gothic"/>
                 <a:cs typeface="Arial"/>
               </a:rPr>
-              <a:t>pass / fail</a:t>
-            </a:r>
-          </a:p>
-        </p:txBody>
-      </p:sp>
-      <p:sp>
-        <p:nvSpPr>
-          <p:cNvPr id="24" name="Footer"/>
+              <a:t>Review</a:t>
+            </a:r>
+          </a:p>
+        </p:txBody>
+      </p:sp>
+      <p:sp>
+        <p:nvSpPr>
+          <p:cNvPr id="22" name="TextBox 21"/>
+          <p:cNvSpPr txBox="1"/>
+          <p:nvPr/>
+        </p:nvSpPr>
+        <p:spPr>
+          <a:xfrm>
+            <a:off x="9080500" y="2235708"/>
+            <a:ext cx="2298700" cy="475488"/>
+          </a:xfrm>
+          <a:prstGeom prst="rect">
+            <a:avLst/>
+          </a:prstGeom>
+          <a:noFill/>
+        </p:spPr>
+        <p:txBody>
+          <a:bodyPr wrap="square" lIns="0" tIns="0" rIns="0" bIns="0" anchor="t">
+            <a:noAutofit/>
+          </a:bodyPr>
+          <a:lstStyle/>
+          <a:p>
+            <a:pPr algn="l">
+              <a:lnSpc>
+                <a:spcPct val="120000"/>
+              </a:lnSpc>
+            </a:pPr>
+            <a:r>
+              <a:rPr sz="1300" b="0" i="0">
+                <a:solidFill>
+                  <a:srgbClr val="6B5E52"/>
+                </a:solidFill>
+                <a:latin typeface="Arial"/>
+                <a:ea typeface="Malgun Gothic"/>
+                <a:cs typeface="Arial"/>
+              </a:rPr>
+              <a:t>Merge only when all three checks pass</a:t>
+            </a:r>
+          </a:p>
+        </p:txBody>
+      </p:sp>
+      <p:sp>
+        <p:nvSpPr>
+          <p:cNvPr id="23" name="Footer"/>
           <p:cNvSpPr txBox="1"/>
           <p:nvPr/>
         </p:nvSpPr>
@@ -12949,7 +13643,7 @@
       </p:sp>
       <p:sp>
         <p:nvSpPr>
-          <p:cNvPr id="25" name="Page number"/>
+          <p:cNvPr id="24" name="Page number"/>
           <p:cNvSpPr txBox="1"/>
           <p:nvPr/>
         </p:nvSpPr>
